--- a/decks/stress-is-a-signal-lesson-v2.pptx
+++ b/decks/stress-is-a-signal-lesson-v2.pptx
@@ -16,6 +16,7 @@
     <p:sldId id="264" r:id="rId16"/>
     <p:sldId id="265" r:id="rId17"/>
     <p:sldId id="266" r:id="rId18"/>
+    <p:sldId id="267" r:id="rId19"/>
   </p:sldIdLst>
   <p:sldSz cx="12192000" cy="6858000" type="screen4x3"/>
   <p:notesSz cx="6858000" cy="9144000"/>
@@ -512,7 +513,7 @@
           <a:lstStyle/>
           <a:p>
             <a:r>
-              <a:t>This page and the next three are hidden. They stay in the deck for you and are skipped when you present.</a:t>
+              <a:t>This page is hidden and skipped when you present. The full plan, care notes and research are on the hidden pages at the end of the deck, if you want them.</a:t>
             </a:r>
           </a:p>
         </p:txBody>
@@ -1003,6 +1004,76 @@
           <a:p>
             <a:r>
               <a:t>4 MINUTES. Students circle one idea on their card: name it as fuel, spend the energy, flip the off switch, protect sleep, or tell someone. Share the student page link. Close with: "If your stress has been stuck on for a while, that's a good reason to talk to a counselor. You don't have to carry that kind alone."</a:t>
+            </a:r>
+          </a:p>
+        </p:txBody>
+      </p:sp>
+      <p:sp>
+        <p:nvSpPr>
+          <p:cNvPr id="4" name="Slide Number Placeholder 3"/>
+          <p:cNvSpPr>
+            <a:spLocks noGrp="1"/>
+          </p:cNvSpPr>
+          <p:nvPr>
+            <p:ph type="sldNum" idx="5" sz="quarter"/>
+          </p:nvPr>
+        </p:nvSpPr>
+        <p:spPr/>
+      </p:sp>
+    </p:spTree>
+  </p:cSld>
+  <p:clrMapOvr>
+    <a:masterClrMapping/>
+  </p:clrMapOvr>
+</p:notes>
+</file>
+
+<file path=ppt/notesSlides/notesSlide9.xml><?xml version="1.0" encoding="utf-8"?>
+<p:notes xmlns:a="http://schemas.openxmlformats.org/drawingml/2006/main" xmlns:p="http://schemas.openxmlformats.org/presentationml/2006/main" xmlns:r="http://schemas.openxmlformats.org/officeDocument/2006/relationships">
+  <p:cSld>
+    <p:spTree>
+      <p:nvGrpSpPr>
+        <p:cNvPr id="1" name=""/>
+        <p:cNvGrpSpPr/>
+        <p:nvPr/>
+      </p:nvGrpSpPr>
+      <p:grpSpPr>
+        <a:xfrm>
+          <a:off x="0" y="0"/>
+          <a:ext cx="0" cy="0"/>
+          <a:chOff x="0" y="0"/>
+          <a:chExt cx="0" cy="0"/>
+        </a:xfrm>
+      </p:grpSpPr>
+      <p:sp>
+        <p:nvSpPr>
+          <p:cNvPr id="2" name="Slide Image Placeholder 1"/>
+          <p:cNvSpPr>
+            <a:spLocks noGrp="1"/>
+          </p:cNvSpPr>
+          <p:nvPr>
+            <p:ph type="sldImg" idx="2"/>
+          </p:nvPr>
+        </p:nvSpPr>
+        <p:spPr/>
+      </p:sp>
+      <p:sp>
+        <p:nvSpPr>
+          <p:cNvPr id="3" name="Notes Placeholder 2"/>
+          <p:cNvSpPr>
+            <a:spLocks noGrp="1"/>
+          </p:cNvSpPr>
+          <p:nvPr>
+            <p:ph type="body" idx="3" sz="quarter"/>
+          </p:nvPr>
+        </p:nvSpPr>
+        <p:spPr/>
+        <p:txBody>
+          <a:bodyPr/>
+          <a:lstStyle/>
+          <a:p>
+            <a:r>
+              <a:t>If you want more: this page and the next three are hidden and skipped when you present.</a:t>
             </a:r>
           </a:p>
         </p:txBody>
@@ -4094,7 +4165,7 @@
                 </a:solidFill>
                 <a:latin typeface="Inter Tight"/>
               </a:rPr>
-              <a:t>TEACHER PAGE  ·  skipped when you present  ·  Lesson plan</a:t>
+              <a:t>TEACHER PAGE  ·  skipped when you present  ·  Before you start</a:t>
             </a:r>
           </a:p>
         </p:txBody>
@@ -4185,8 +4256,8 @@
         </p:nvSpPr>
         <p:spPr>
           <a:xfrm>
-            <a:off x="548640" y="1828800"/>
-            <a:ext cx="5120640" cy="4389120"/>
+            <a:off x="548640" y="2011680"/>
+            <a:ext cx="11064240" cy="4206240"/>
           </a:xfrm>
           <a:prstGeom prst="rect">
             <a:avLst/>
@@ -4201,43 +4272,43 @@
           <a:p>
             <a:pPr algn="l">
               <a:spcAft>
-                <a:spcPts val="675"/>
-              </a:spcAft>
-            </a:pPr>
-            <a:r>
-              <a:rPr sz="1100" b="1" i="0">
+                <a:spcPts val="900"/>
+              </a:spcAft>
+            </a:pPr>
+            <a:r>
+              <a:rPr sz="1200" b="1" i="0">
                 <a:solidFill>
                   <a:srgbClr val="0B2D5B"/>
                 </a:solidFill>
                 <a:latin typeface="Inter Tight"/>
               </a:rPr>
-              <a:t>GOAL</a:t>
-            </a:r>
-          </a:p>
-          <a:p>
-            <a:pPr algn="l">
-              <a:spcAft>
-                <a:spcPts val="675"/>
-              </a:spcAft>
-            </a:pPr>
-            <a:r>
-              <a:rPr sz="1500" b="0" i="0">
+              <a:t>BEFORE YOU START</a:t>
+            </a:r>
+          </a:p>
+          <a:p>
+            <a:pPr algn="l">
+              <a:spcAft>
+                <a:spcPts val="900"/>
+              </a:spcAft>
+            </a:pPr>
+            <a:r>
+              <a:rPr sz="2000" b="0" i="0">
                 <a:solidFill>
                   <a:srgbClr val="1C1B19"/>
                 </a:solidFill>
                 <a:latin typeface="Source Serif 4"/>
               </a:rPr>
-              <a:t>Students can explain what the stress response does for them, use one way to read a racing heart as fuel, and tell the difference between a stress signal that settles and stress that stays stuck on. Nobody is asked to share what's stressing them or how much.</a:t>
-            </a:r>
-          </a:p>
-          <a:p>
-            <a:pPr algn="l">
-              <a:spcAft>
-                <a:spcPts val="675"/>
-              </a:spcAft>
-            </a:pPr>
-            <a:r>
-              <a:rPr sz="1500" b="0" i="0">
+              <a:t>Students learn that a pounding heart is the body getting ready, and how to tell stress that settles from stress that stays stuck on. Bring index cards, and keep it general: nobody shares their own stress, and if something heavy comes up, thank the student and let a counselor know that day.</a:t>
+            </a:r>
+          </a:p>
+          <a:p>
+            <a:pPr algn="l">
+              <a:spcAft>
+                <a:spcPts val="900"/>
+              </a:spcAft>
+            </a:pPr>
+            <a:r>
+              <a:rPr sz="2000" b="0" i="0">
                 <a:solidFill>
                   <a:srgbClr val="1C1B19"/>
                 </a:solidFill>
@@ -4249,277 +4320,33 @@
           <a:p>
             <a:pPr algn="l">
               <a:spcAft>
-                <a:spcPts val="675"/>
-              </a:spcAft>
-            </a:pPr>
-            <a:r>
-              <a:rPr sz="1100" b="1" i="0">
+                <a:spcPts val="900"/>
+              </a:spcAft>
+            </a:pPr>
+            <a:r>
+              <a:rPr sz="1200" b="1" i="0">
                 <a:solidFill>
                   <a:srgbClr val="0B2D5B"/>
                 </a:solidFill>
                 <a:latin typeface="Inter Tight"/>
               </a:rPr>
-              <a:t>MATERIALS</a:t>
-            </a:r>
-          </a:p>
-          <a:p>
-            <a:pPr algn="l">
-              <a:spcAft>
-                <a:spcPts val="675"/>
-              </a:spcAft>
-            </a:pPr>
-            <a:r>
-              <a:rPr sz="1500" b="0" i="0">
+              <a:t>EVERY STUDENT IN THE ROOM</a:t>
+            </a:r>
+          </a:p>
+          <a:p>
+            <a:pPr algn="l">
+              <a:spcAft>
+                <a:spcPts val="900"/>
+              </a:spcAft>
+            </a:pPr>
+            <a:r>
+              <a:rPr sz="2000" b="0" i="0">
                 <a:solidFill>
                   <a:srgbClr val="1C1B19"/>
                 </a:solidFill>
                 <a:latin typeface="Source Serif 4"/>
               </a:rPr>
-              <a:t>A board or chart paper with two columns: Signal and Stuck on</a:t>
-            </a:r>
-          </a:p>
-          <a:p>
-            <a:pPr algn="l">
-              <a:spcAft>
-                <a:spcPts val="675"/>
-              </a:spcAft>
-            </a:pPr>
-            <a:r>
-              <a:rPr sz="1500" b="0" i="0">
-                <a:solidFill>
-                  <a:srgbClr val="1C1B19"/>
-                </a:solidFill>
-                <a:latin typeface="Source Serif 4"/>
-              </a:rPr>
-              <a:t>Index cards, one per student</a:t>
-            </a:r>
-          </a:p>
-          <a:p>
-            <a:pPr algn="l">
-              <a:spcAft>
-                <a:spcPts val="675"/>
-              </a:spcAft>
-            </a:pPr>
-            <a:r>
-              <a:rPr sz="1500" b="0" i="0">
-                <a:solidFill>
-                  <a:srgbClr val="1C1B19"/>
-                </a:solidFill>
-                <a:latin typeface="Source Serif 4"/>
-              </a:rPr>
-              <a:t>The student page link (last slide) to share after advisory</a:t>
-            </a:r>
-          </a:p>
-        </p:txBody>
-      </p:sp>
-      <p:sp>
-        <p:nvSpPr>
-          <p:cNvPr id="7" name="TextBox 6"/>
-          <p:cNvSpPr txBox="1"/>
-          <p:nvPr/>
-        </p:nvSpPr>
-        <p:spPr>
-          <a:xfrm>
-            <a:off x="6126480" y="1828800"/>
-            <a:ext cx="5486400" cy="4389120"/>
-          </a:xfrm>
-          <a:prstGeom prst="rect">
-            <a:avLst/>
-          </a:prstGeom>
-          <a:noFill/>
-        </p:spPr>
-        <p:txBody>
-          <a:bodyPr wrap="square" anchor="t" lIns="0" rIns="0" tIns="0" bIns="0">
-            <a:spAutoFit/>
-          </a:bodyPr>
-          <a:lstStyle/>
-          <a:p>
-            <a:pPr algn="l">
-              <a:spcAft>
-                <a:spcPts val="630"/>
-              </a:spcAft>
-            </a:pPr>
-            <a:r>
-              <a:rPr sz="1100" b="1" i="0">
-                <a:solidFill>
-                  <a:srgbClr val="0B2D5B"/>
-                </a:solidFill>
-                <a:latin typeface="Inter Tight"/>
-              </a:rPr>
-              <a:t>FLOW</a:t>
-            </a:r>
-          </a:p>
-          <a:p>
-            <a:pPr algn="l">
-              <a:spcAft>
-                <a:spcPts val="630"/>
-              </a:spcAft>
-            </a:pPr>
-            <a:r>
-              <a:rPr sz="1300" b="1" i="0">
-                <a:solidFill>
-                  <a:srgbClr val="F47B20"/>
-                </a:solidFill>
-                <a:latin typeface="Inter Tight"/>
-              </a:rPr>
-              <a:t>3 min   </a:t>
-            </a:r>
-            <a:r>
-              <a:rPr sz="1400" b="0" i="0">
-                <a:solidFill>
-                  <a:srgbClr val="1C1B19"/>
-                </a:solidFill>
-                <a:latin typeface="Source Serif 4"/>
-              </a:rPr>
-              <a:t>Feel it: thirty seconds of movement, then notice</a:t>
-            </a:r>
-          </a:p>
-          <a:p>
-            <a:pPr algn="l">
-              <a:spcAft>
-                <a:spcPts val="630"/>
-              </a:spcAft>
-            </a:pPr>
-            <a:r>
-              <a:rPr sz="1300" b="1" i="0">
-                <a:solidFill>
-                  <a:srgbClr val="F47B20"/>
-                </a:solidFill>
-                <a:latin typeface="Inter Tight"/>
-              </a:rPr>
-              <a:t>4 min   </a:t>
-            </a:r>
-            <a:r>
-              <a:rPr sz="1400" b="0" i="0">
-                <a:solidFill>
-                  <a:srgbClr val="1C1B19"/>
-                </a:solidFill>
-                <a:latin typeface="Source Serif 4"/>
-              </a:rPr>
-              <a:t>Read the signal: what each body change is for</a:t>
-            </a:r>
-          </a:p>
-          <a:p>
-            <a:pPr algn="l">
-              <a:spcAft>
-                <a:spcPts val="630"/>
-              </a:spcAft>
-            </a:pPr>
-            <a:r>
-              <a:rPr sz="1300" b="1" i="0">
-                <a:solidFill>
-                  <a:srgbClr val="F47B20"/>
-                </a:solidFill>
-                <a:latin typeface="Inter Tight"/>
-              </a:rPr>
-              <a:t>4 min   </a:t>
-            </a:r>
-            <a:r>
-              <a:rPr sz="1400" b="0" i="0">
-                <a:solidFill>
-                  <a:srgbClr val="1C1B19"/>
-                </a:solidFill>
-                <a:latin typeface="Source Serif 4"/>
-              </a:rPr>
-              <a:t>Signal, effort, recovery, and the research</a:t>
-            </a:r>
-          </a:p>
-          <a:p>
-            <a:pPr algn="l">
-              <a:spcAft>
-                <a:spcPts val="630"/>
-              </a:spcAft>
-            </a:pPr>
-            <a:r>
-              <a:rPr sz="1300" b="1" i="0">
-                <a:solidFill>
-                  <a:srgbClr val="F47B20"/>
-                </a:solidFill>
-                <a:latin typeface="Inter Tight"/>
-              </a:rPr>
-              <a:t>5 min   </a:t>
-            </a:r>
-            <a:r>
-              <a:rPr sz="1400" b="0" i="0">
-                <a:solidFill>
-                  <a:srgbClr val="1C1B19"/>
-                </a:solidFill>
-                <a:latin typeface="Source Serif 4"/>
-              </a:rPr>
-              <a:t>Signal or stuck on? (four cards)</a:t>
-            </a:r>
-          </a:p>
-          <a:p>
-            <a:pPr algn="l">
-              <a:spcAft>
-                <a:spcPts val="630"/>
-              </a:spcAft>
-            </a:pPr>
-            <a:r>
-              <a:rPr sz="1300" b="1" i="0">
-                <a:solidFill>
-                  <a:srgbClr val="F47B20"/>
-                </a:solidFill>
-                <a:latin typeface="Inter Tight"/>
-              </a:rPr>
-              <a:t>4 min   </a:t>
-            </a:r>
-            <a:r>
-              <a:rPr sz="1400" b="0" i="0">
-                <a:solidFill>
-                  <a:srgbClr val="1C1B19"/>
-                </a:solidFill>
-                <a:latin typeface="Source Serif 4"/>
-              </a:rPr>
-              <a:t>Pick one, privately, and the student page link</a:t>
-            </a:r>
-          </a:p>
-          <a:p>
-            <a:pPr algn="l">
-              <a:spcAft>
-                <a:spcPts val="630"/>
-              </a:spcAft>
-            </a:pPr>
-            <a:r>
-              <a:rPr sz="1400" b="0" i="0">
-                <a:solidFill>
-                  <a:srgbClr val="1C1B19"/>
-                </a:solidFill>
-                <a:latin typeface="Source Serif 4"/>
-              </a:rPr>
-              <a:t/>
-            </a:r>
-          </a:p>
-          <a:p>
-            <a:pPr algn="l">
-              <a:spcAft>
-                <a:spcPts val="630"/>
-              </a:spcAft>
-            </a:pPr>
-            <a:r>
-              <a:rPr sz="1100" b="1" i="0">
-                <a:solidFill>
-                  <a:srgbClr val="0B2D5B"/>
-                </a:solidFill>
-                <a:latin typeface="Inter Tight"/>
-              </a:rPr>
-              <a:t>SHORT ON TIME (10-MINUTE CHECK-IN)</a:t>
-            </a:r>
-          </a:p>
-          <a:p>
-            <a:pPr algn="l">
-              <a:spcAft>
-                <a:spcPts val="630"/>
-              </a:spcAft>
-            </a:pPr>
-            <a:r>
-              <a:rPr sz="1400" b="0" i="0">
-                <a:solidFill>
-                  <a:srgbClr val="1C1B19"/>
-                </a:solidFill>
-                <a:latin typeface="Source Serif 4"/>
-              </a:rPr>
-              <a:t>Feel it (2), the Read the signal slide (3), Signal or stuck on with two of the cards (3), pick one and share the link (2).</a:t>
+              <a:t>Keep the movement optional, and when the Andre and Lena cards come up, say plainly that stress from money, home, or racism is something that happens to people, not a sign they cope badly.</a:t>
             </a:r>
           </a:p>
         </p:txBody>
@@ -4533,6 +4360,1724 @@
 </file>
 
 <file path=ppt/slides/slide10.xml><?xml version="1.0" encoding="utf-8"?>
+<p:sld xmlns:a="http://schemas.openxmlformats.org/drawingml/2006/main" xmlns:p="http://schemas.openxmlformats.org/presentationml/2006/main" xmlns:r="http://schemas.openxmlformats.org/officeDocument/2006/relationships" show="0">
+  <p:cSld>
+    <p:bg>
+      <p:bgPr>
+        <a:solidFill>
+          <a:srgbClr val="EEEBE4"/>
+        </a:solidFill>
+        <a:effectLst/>
+      </p:bgPr>
+    </p:bg>
+    <p:spTree>
+      <p:nvGrpSpPr>
+        <p:cNvPr id="1" name=""/>
+        <p:cNvGrpSpPr/>
+        <p:nvPr/>
+      </p:nvGrpSpPr>
+      <p:grpSpPr/>
+      <p:sp>
+        <p:nvSpPr>
+          <p:cNvPr id="2" name="Rectangle 1"/>
+          <p:cNvSpPr/>
+          <p:nvPr/>
+        </p:nvSpPr>
+        <p:spPr>
+          <a:xfrm>
+            <a:off x="0" y="0"/>
+            <a:ext cx="12191695" cy="384048"/>
+          </a:xfrm>
+          <a:prstGeom prst="rect">
+            <a:avLst/>
+          </a:prstGeom>
+          <a:solidFill>
+            <a:srgbClr val="0B2D5B"/>
+          </a:solidFill>
+          <a:ln>
+            <a:noFill/>
+          </a:ln>
+          <a:effectLst/>
+        </p:spPr>
+        <p:style>
+          <a:lnRef idx="1">
+            <a:schemeClr val="accent1"/>
+          </a:lnRef>
+          <a:fillRef idx="3">
+            <a:schemeClr val="accent1"/>
+          </a:fillRef>
+          <a:effectRef idx="2">
+            <a:schemeClr val="accent1"/>
+          </a:effectRef>
+          <a:fontRef idx="minor">
+            <a:schemeClr val="lt1"/>
+          </a:fontRef>
+        </p:style>
+        <p:txBody>
+          <a:bodyPr rtlCol="0" anchor="ctr"/>
+          <a:lstStyle/>
+          <a:p>
+            <a:pPr algn="ctr"/>
+          </a:p>
+        </p:txBody>
+      </p:sp>
+      <p:sp>
+        <p:nvSpPr>
+          <p:cNvPr id="3" name="TextBox 2"/>
+          <p:cNvSpPr txBox="1"/>
+          <p:nvPr/>
+        </p:nvSpPr>
+        <p:spPr>
+          <a:xfrm>
+            <a:off x="548640" y="100584"/>
+            <a:ext cx="10972800" cy="274320"/>
+          </a:xfrm>
+          <a:prstGeom prst="rect">
+            <a:avLst/>
+          </a:prstGeom>
+          <a:noFill/>
+        </p:spPr>
+        <p:txBody>
+          <a:bodyPr wrap="square" anchor="t" lIns="0" rIns="0" tIns="0" bIns="0">
+            <a:spAutoFit/>
+          </a:bodyPr>
+          <a:lstStyle/>
+          <a:p>
+            <a:pPr algn="l">
+              <a:spcAft>
+                <a:spcPts val="495"/>
+              </a:spcAft>
+            </a:pPr>
+            <a:r>
+              <a:rPr sz="1100" b="1" i="0">
+                <a:solidFill>
+                  <a:srgbClr val="FFFFFF"/>
+                </a:solidFill>
+                <a:latin typeface="Inter Tight"/>
+              </a:rPr>
+              <a:t>TEACHER PAGE  ·  skipped when you present  ·  Before you teach</a:t>
+            </a:r>
+          </a:p>
+        </p:txBody>
+      </p:sp>
+      <p:sp>
+        <p:nvSpPr>
+          <p:cNvPr id="4" name="TextBox 3"/>
+          <p:cNvSpPr txBox="1"/>
+          <p:nvPr/>
+        </p:nvSpPr>
+        <p:spPr>
+          <a:xfrm>
+            <a:off x="548640" y="685800"/>
+            <a:ext cx="10972800" cy="640080"/>
+          </a:xfrm>
+          <a:prstGeom prst="rect">
+            <a:avLst/>
+          </a:prstGeom>
+          <a:noFill/>
+        </p:spPr>
+        <p:txBody>
+          <a:bodyPr wrap="square" anchor="t" lIns="0" rIns="0" tIns="0" bIns="0">
+            <a:spAutoFit/>
+          </a:bodyPr>
+          <a:lstStyle/>
+          <a:p>
+            <a:pPr algn="l">
+              <a:spcAft>
+                <a:spcPts val="1350"/>
+              </a:spcAft>
+            </a:pPr>
+            <a:r>
+              <a:rPr sz="3000" b="1" i="0">
+                <a:solidFill>
+                  <a:srgbClr val="1C1B19"/>
+                </a:solidFill>
+                <a:latin typeface="Source Serif 4"/>
+              </a:rPr>
+              <a:t>Before you teach</a:t>
+            </a:r>
+          </a:p>
+        </p:txBody>
+      </p:sp>
+      <p:sp>
+        <p:nvSpPr>
+          <p:cNvPr id="5" name="TextBox 4"/>
+          <p:cNvSpPr txBox="1"/>
+          <p:nvPr/>
+        </p:nvSpPr>
+        <p:spPr>
+          <a:xfrm>
+            <a:off x="548640" y="1463040"/>
+            <a:ext cx="5394960" cy="4937760"/>
+          </a:xfrm>
+          <a:prstGeom prst="rect">
+            <a:avLst/>
+          </a:prstGeom>
+          <a:noFill/>
+        </p:spPr>
+        <p:txBody>
+          <a:bodyPr wrap="square" anchor="t" lIns="0" rIns="0" tIns="0" bIns="0">
+            <a:spAutoFit/>
+          </a:bodyPr>
+          <a:lstStyle/>
+          <a:p>
+            <a:pPr algn="l">
+              <a:spcAft>
+                <a:spcPts val="585"/>
+              </a:spcAft>
+            </a:pPr>
+            <a:r>
+              <a:rPr sz="1500" b="1" i="0">
+                <a:solidFill>
+                  <a:srgbClr val="1C1B19"/>
+                </a:solidFill>
+                <a:latin typeface="Source Serif 4"/>
+              </a:rPr>
+              <a:t>Lead with the good news, and keep it honest.</a:t>
+            </a:r>
+          </a:p>
+          <a:p>
+            <a:pPr algn="l">
+              <a:spcAft>
+                <a:spcPts val="585"/>
+              </a:spcAft>
+            </a:pPr>
+            <a:r>
+              <a:rPr sz="1300" b="0" i="0">
+                <a:solidFill>
+                  <a:srgbClr val="1C1B19"/>
+                </a:solidFill>
+                <a:latin typeface="Source Serif 4"/>
+              </a:rPr>
+              <a:t>Stress is necessary and the research backs that up: short bursts help focus and performance, and reading a racing heart as "getting ready" helps a little. Don't promise that a mindset makes stress harmless. The claim that stress only hurts people who believe it does goes beyond the evidence.</a:t>
+            </a:r>
+          </a:p>
+          <a:p>
+            <a:pPr algn="l">
+              <a:spcAft>
+                <a:spcPts val="585"/>
+              </a:spcAft>
+            </a:pPr>
+            <a:r>
+              <a:rPr sz="1300" b="0" i="0">
+                <a:solidFill>
+                  <a:srgbClr val="1C1B19"/>
+                </a:solidFill>
+                <a:latin typeface="Source Serif 4"/>
+              </a:rPr>
+              <a:t/>
+            </a:r>
+          </a:p>
+          <a:p>
+            <a:pPr algn="l">
+              <a:spcAft>
+                <a:spcPts val="585"/>
+              </a:spcAft>
+            </a:pPr>
+            <a:r>
+              <a:rPr sz="1500" b="1" i="0">
+                <a:solidFill>
+                  <a:srgbClr val="1C1B19"/>
+                </a:solidFill>
+                <a:latin typeface="Source Serif 4"/>
+              </a:rPr>
+              <a:t>Some stress isn't a challenge.</a:t>
+            </a:r>
+          </a:p>
+          <a:p>
+            <a:pPr algn="l">
+              <a:spcAft>
+                <a:spcPts val="585"/>
+              </a:spcAft>
+            </a:pPr>
+            <a:r>
+              <a:rPr sz="1300" b="0" i="0">
+                <a:solidFill>
+                  <a:srgbClr val="1C1B19"/>
+                </a:solidFill>
+                <a:latin typeface="Source Serif 4"/>
+              </a:rPr>
+              <a:t>For a student dealing with money worries, a parent's illness, conflict at home, or racism, "stress is good for you" can land as "your problem is how you think about it." Say plainly that stress which stays on is a different thing, that it often comes from things students can't control, and that it's a reason to bring in adults, not to think harder.</a:t>
+            </a:r>
+          </a:p>
+          <a:p>
+            <a:pPr algn="l">
+              <a:spcAft>
+                <a:spcPts val="585"/>
+              </a:spcAft>
+            </a:pPr>
+            <a:r>
+              <a:rPr sz="1300" b="0" i="0">
+                <a:solidFill>
+                  <a:srgbClr val="1C1B19"/>
+                </a:solidFill>
+                <a:latin typeface="Source Serif 4"/>
+              </a:rPr>
+              <a:t/>
+            </a:r>
+          </a:p>
+          <a:p>
+            <a:pPr algn="l">
+              <a:spcAft>
+                <a:spcPts val="585"/>
+              </a:spcAft>
+            </a:pPr>
+            <a:r>
+              <a:rPr sz="1500" b="1" i="0">
+                <a:solidFill>
+                  <a:srgbClr val="1C1B19"/>
+                </a:solidFill>
+                <a:latin typeface="Source Serif 4"/>
+              </a:rPr>
+              <a:t>Keep the cards invented.</a:t>
+            </a:r>
+          </a:p>
+          <a:p>
+            <a:pPr algn="l">
+              <a:spcAft>
+                <a:spcPts val="585"/>
+              </a:spcAft>
+            </a:pPr>
+            <a:r>
+              <a:rPr sz="1300" b="0" i="0">
+                <a:solidFill>
+                  <a:srgbClr val="1C1B19"/>
+                </a:solidFill>
+                <a:latin typeface="Source Serif 4"/>
+              </a:rPr>
+              <a:t>Use the scenario cards, not students' own stories. If a student starts describing something heavy, thank them, keep it brief in the group, and follow up privately.</a:t>
+            </a:r>
+          </a:p>
+          <a:p>
+            <a:pPr algn="l">
+              <a:spcAft>
+                <a:spcPts val="585"/>
+              </a:spcAft>
+            </a:pPr>
+            <a:r>
+              <a:rPr sz="1300" b="0" i="0">
+                <a:solidFill>
+                  <a:srgbClr val="1C1B19"/>
+                </a:solidFill>
+                <a:latin typeface="Source Serif 4"/>
+              </a:rPr>
+              <a:t/>
+            </a:r>
+          </a:p>
+        </p:txBody>
+      </p:sp>
+      <p:sp>
+        <p:nvSpPr>
+          <p:cNvPr id="6" name="TextBox 5"/>
+          <p:cNvSpPr txBox="1"/>
+          <p:nvPr/>
+        </p:nvSpPr>
+        <p:spPr>
+          <a:xfrm>
+            <a:off x="6217920" y="1463040"/>
+            <a:ext cx="5394960" cy="4937760"/>
+          </a:xfrm>
+          <a:prstGeom prst="rect">
+            <a:avLst/>
+          </a:prstGeom>
+          <a:noFill/>
+        </p:spPr>
+        <p:txBody>
+          <a:bodyPr wrap="square" anchor="t" lIns="0" rIns="0" tIns="0" bIns="0">
+            <a:spAutoFit/>
+          </a:bodyPr>
+          <a:lstStyle/>
+          <a:p>
+            <a:pPr algn="l">
+              <a:spcAft>
+                <a:spcPts val="585"/>
+              </a:spcAft>
+            </a:pPr>
+            <a:r>
+              <a:rPr sz="1500" b="1" i="0">
+                <a:solidFill>
+                  <a:srgbClr val="1C1B19"/>
+                </a:solidFill>
+                <a:latin typeface="Source Serif 4"/>
+              </a:rPr>
+              <a:t>Watch for stuck on.</a:t>
+            </a:r>
+          </a:p>
+          <a:p>
+            <a:pPr algn="l">
+              <a:spcAft>
+                <a:spcPts val="585"/>
+              </a:spcAft>
+            </a:pPr>
+            <a:r>
+              <a:rPr sz="1300" b="0" i="0">
+                <a:solidFill>
+                  <a:srgbClr val="1C1B19"/>
+                </a:solidFill>
+                <a:latin typeface="Source Serif 4"/>
+              </a:rPr>
+              <a:t>Weeks of poor sleep, frequent headaches or stomachaches, pulling away, or using substances to come down are worth a quiet check-in after advisory and a same-day note to a counselor if it sounds serious. Disclosures go to a counselor. No screening questions in the group.</a:t>
+            </a:r>
+          </a:p>
+          <a:p>
+            <a:pPr algn="l">
+              <a:spcAft>
+                <a:spcPts val="585"/>
+              </a:spcAft>
+            </a:pPr>
+            <a:r>
+              <a:rPr sz="1300" b="0" i="0">
+                <a:solidFill>
+                  <a:srgbClr val="1C1B19"/>
+                </a:solidFill>
+                <a:latin typeface="Source Serif 4"/>
+              </a:rPr>
+              <a:t/>
+            </a:r>
+          </a:p>
+          <a:p>
+            <a:pPr algn="l">
+              <a:spcAft>
+                <a:spcPts val="585"/>
+              </a:spcAft>
+            </a:pPr>
+            <a:r>
+              <a:rPr sz="1500" b="1" i="0">
+                <a:solidFill>
+                  <a:srgbClr val="1C1B19"/>
+                </a:solidFill>
+                <a:latin typeface="Source Serif 4"/>
+              </a:rPr>
+              <a:t>Panic and anxiety disorders are their own thing.</a:t>
+            </a:r>
+          </a:p>
+          <a:p>
+            <a:pPr algn="l">
+              <a:spcAft>
+                <a:spcPts val="585"/>
+              </a:spcAft>
+            </a:pPr>
+            <a:r>
+              <a:rPr sz="1300" b="0" i="0">
+                <a:solidFill>
+                  <a:srgbClr val="1C1B19"/>
+                </a:solidFill>
+                <a:latin typeface="Source Serif 4"/>
+              </a:rPr>
+              <a:t>Some students have panic attacks or an anxiety disorder, and "it's just a signal" won't be enough for them. Point them to The False Alarm and to a counselor.</a:t>
+            </a:r>
+          </a:p>
+          <a:p>
+            <a:pPr algn="l">
+              <a:spcAft>
+                <a:spcPts val="585"/>
+              </a:spcAft>
+            </a:pPr>
+            <a:r>
+              <a:rPr sz="1300" b="0" i="0">
+                <a:solidFill>
+                  <a:srgbClr val="1C1B19"/>
+                </a:solidFill>
+                <a:latin typeface="Source Serif 4"/>
+              </a:rPr>
+              <a:t/>
+            </a:r>
+          </a:p>
+          <a:p>
+            <a:pPr algn="l">
+              <a:spcAft>
+                <a:spcPts val="585"/>
+              </a:spcAft>
+            </a:pPr>
+            <a:r>
+              <a:rPr sz="1500" b="1" i="0">
+                <a:solidFill>
+                  <a:srgbClr val="1C1B19"/>
+                </a:solidFill>
+                <a:latin typeface="Source Serif 4"/>
+              </a:rPr>
+              <a:t>Model it.</a:t>
+            </a:r>
+          </a:p>
+          <a:p>
+            <a:pPr algn="l">
+              <a:spcAft>
+                <a:spcPts val="585"/>
+              </a:spcAft>
+            </a:pPr>
+            <a:r>
+              <a:rPr sz="1300" b="0" i="0">
+                <a:solidFill>
+                  <a:srgbClr val="1C1B19"/>
+                </a:solidFill>
+                <a:latin typeface="Source Serif 4"/>
+              </a:rPr>
+              <a:t>Name a time your own heart pounded before something that mattered, and what you told yourself. It gives students permission to notice their own.</a:t>
+            </a:r>
+          </a:p>
+          <a:p>
+            <a:pPr algn="l">
+              <a:spcAft>
+                <a:spcPts val="585"/>
+              </a:spcAft>
+            </a:pPr>
+            <a:r>
+              <a:rPr sz="1300" b="0" i="0">
+                <a:solidFill>
+                  <a:srgbClr val="1C1B19"/>
+                </a:solidFill>
+                <a:latin typeface="Source Serif 4"/>
+              </a:rPr>
+              <a:t/>
+            </a:r>
+          </a:p>
+        </p:txBody>
+      </p:sp>
+    </p:spTree>
+  </p:cSld>
+  <p:clrMapOvr>
+    <a:masterClrMapping/>
+  </p:clrMapOvr>
+</p:sld>
+</file>
+
+<file path=ppt/slides/slide11.xml><?xml version="1.0" encoding="utf-8"?>
+<p:sld xmlns:a="http://schemas.openxmlformats.org/drawingml/2006/main" xmlns:p="http://schemas.openxmlformats.org/presentationml/2006/main" xmlns:r="http://schemas.openxmlformats.org/officeDocument/2006/relationships" show="0">
+  <p:cSld>
+    <p:bg>
+      <p:bgPr>
+        <a:solidFill>
+          <a:srgbClr val="EEEBE4"/>
+        </a:solidFill>
+        <a:effectLst/>
+      </p:bgPr>
+    </p:bg>
+    <p:spTree>
+      <p:nvGrpSpPr>
+        <p:cNvPr id="1" name=""/>
+        <p:cNvGrpSpPr/>
+        <p:nvPr/>
+      </p:nvGrpSpPr>
+      <p:grpSpPr/>
+      <p:sp>
+        <p:nvSpPr>
+          <p:cNvPr id="2" name="Rectangle 1"/>
+          <p:cNvSpPr/>
+          <p:nvPr/>
+        </p:nvSpPr>
+        <p:spPr>
+          <a:xfrm>
+            <a:off x="0" y="0"/>
+            <a:ext cx="12191695" cy="384048"/>
+          </a:xfrm>
+          <a:prstGeom prst="rect">
+            <a:avLst/>
+          </a:prstGeom>
+          <a:solidFill>
+            <a:srgbClr val="0B2D5B"/>
+          </a:solidFill>
+          <a:ln>
+            <a:noFill/>
+          </a:ln>
+          <a:effectLst/>
+        </p:spPr>
+        <p:style>
+          <a:lnRef idx="1">
+            <a:schemeClr val="accent1"/>
+          </a:lnRef>
+          <a:fillRef idx="3">
+            <a:schemeClr val="accent1"/>
+          </a:fillRef>
+          <a:effectRef idx="2">
+            <a:schemeClr val="accent1"/>
+          </a:effectRef>
+          <a:fontRef idx="minor">
+            <a:schemeClr val="lt1"/>
+          </a:fontRef>
+        </p:style>
+        <p:txBody>
+          <a:bodyPr rtlCol="0" anchor="ctr"/>
+          <a:lstStyle/>
+          <a:p>
+            <a:pPr algn="ctr"/>
+          </a:p>
+        </p:txBody>
+      </p:sp>
+      <p:sp>
+        <p:nvSpPr>
+          <p:cNvPr id="3" name="TextBox 2"/>
+          <p:cNvSpPr txBox="1"/>
+          <p:nvPr/>
+        </p:nvSpPr>
+        <p:spPr>
+          <a:xfrm>
+            <a:off x="548640" y="100584"/>
+            <a:ext cx="10972800" cy="274320"/>
+          </a:xfrm>
+          <a:prstGeom prst="rect">
+            <a:avLst/>
+          </a:prstGeom>
+          <a:noFill/>
+        </p:spPr>
+        <p:txBody>
+          <a:bodyPr wrap="square" anchor="t" lIns="0" rIns="0" tIns="0" bIns="0">
+            <a:spAutoFit/>
+          </a:bodyPr>
+          <a:lstStyle/>
+          <a:p>
+            <a:pPr algn="l">
+              <a:spcAft>
+                <a:spcPts val="495"/>
+              </a:spcAft>
+            </a:pPr>
+            <a:r>
+              <a:rPr sz="1100" b="1" i="0">
+                <a:solidFill>
+                  <a:srgbClr val="FFFFFF"/>
+                </a:solidFill>
+                <a:latin typeface="Inter Tight"/>
+              </a:rPr>
+              <a:t>TEACHER PAGE  ·  skipped when you present  ·  Every student in the room</a:t>
+            </a:r>
+          </a:p>
+        </p:txBody>
+      </p:sp>
+      <p:sp>
+        <p:nvSpPr>
+          <p:cNvPr id="4" name="TextBox 3"/>
+          <p:cNvSpPr txBox="1"/>
+          <p:nvPr/>
+        </p:nvSpPr>
+        <p:spPr>
+          <a:xfrm>
+            <a:off x="548640" y="685800"/>
+            <a:ext cx="10972800" cy="640080"/>
+          </a:xfrm>
+          <a:prstGeom prst="rect">
+            <a:avLst/>
+          </a:prstGeom>
+          <a:noFill/>
+        </p:spPr>
+        <p:txBody>
+          <a:bodyPr wrap="square" anchor="t" lIns="0" rIns="0" tIns="0" bIns="0">
+            <a:spAutoFit/>
+          </a:bodyPr>
+          <a:lstStyle/>
+          <a:p>
+            <a:pPr algn="l">
+              <a:spcAft>
+                <a:spcPts val="1350"/>
+              </a:spcAft>
+            </a:pPr>
+            <a:r>
+              <a:rPr sz="3000" b="1" i="0">
+                <a:solidFill>
+                  <a:srgbClr val="1C1B19"/>
+                </a:solidFill>
+                <a:latin typeface="Source Serif 4"/>
+              </a:rPr>
+              <a:t>Every student in the room</a:t>
+            </a:r>
+          </a:p>
+        </p:txBody>
+      </p:sp>
+      <p:sp>
+        <p:nvSpPr>
+          <p:cNvPr id="5" name="TextBox 4"/>
+          <p:cNvSpPr txBox="1"/>
+          <p:nvPr/>
+        </p:nvSpPr>
+        <p:spPr>
+          <a:xfrm>
+            <a:off x="548640" y="1325880"/>
+            <a:ext cx="10972800" cy="365760"/>
+          </a:xfrm>
+          <a:prstGeom prst="rect">
+            <a:avLst/>
+          </a:prstGeom>
+          <a:noFill/>
+        </p:spPr>
+        <p:txBody>
+          <a:bodyPr wrap="square" anchor="t" lIns="0" rIns="0" tIns="0" bIns="0">
+            <a:spAutoFit/>
+          </a:bodyPr>
+          <a:lstStyle/>
+          <a:p>
+            <a:pPr algn="l">
+              <a:spcAft>
+                <a:spcPts val="630"/>
+              </a:spcAft>
+            </a:pPr>
+            <a:r>
+              <a:rPr sz="1400" b="0" i="0">
+                <a:solidFill>
+                  <a:srgbClr val="5D5A54"/>
+                </a:solidFill>
+                <a:latin typeface="Inter Tight"/>
+              </a:rPr>
+              <a:t>Culture, family, identity, ability and money: what to keep in mind for this topic.</a:t>
+            </a:r>
+          </a:p>
+        </p:txBody>
+      </p:sp>
+      <p:sp>
+        <p:nvSpPr>
+          <p:cNvPr id="6" name="TextBox 5"/>
+          <p:cNvSpPr txBox="1"/>
+          <p:nvPr/>
+        </p:nvSpPr>
+        <p:spPr>
+          <a:xfrm>
+            <a:off x="548640" y="1828800"/>
+            <a:ext cx="5394960" cy="4572000"/>
+          </a:xfrm>
+          <a:prstGeom prst="rect">
+            <a:avLst/>
+          </a:prstGeom>
+          <a:noFill/>
+        </p:spPr>
+        <p:txBody>
+          <a:bodyPr wrap="square" anchor="t" lIns="0" rIns="0" tIns="0" bIns="0">
+            <a:spAutoFit/>
+          </a:bodyPr>
+          <a:lstStyle/>
+          <a:p>
+            <a:pPr algn="l">
+              <a:spcAft>
+                <a:spcPts val="585"/>
+              </a:spcAft>
+            </a:pPr>
+            <a:r>
+              <a:rPr sz="1500" b="1" i="0">
+                <a:solidFill>
+                  <a:srgbClr val="1C1B19"/>
+                </a:solidFill>
+                <a:latin typeface="Source Serif 4"/>
+              </a:rPr>
+              <a:t>Stress isn't spread evenly.</a:t>
+            </a:r>
+          </a:p>
+          <a:p>
+            <a:pPr algn="l">
+              <a:spcAft>
+                <a:spcPts val="585"/>
+              </a:spcAft>
+            </a:pPr>
+            <a:r>
+              <a:rPr sz="1300" b="0" i="0">
+                <a:solidFill>
+                  <a:srgbClr val="1C1B19"/>
+                </a:solidFill>
+                <a:latin typeface="Source Serif 4"/>
+              </a:rPr>
+              <a:t>Students carrying racism, poverty, immigration worries, caregiving, or unsafe neighborhoods face more stress that stays on. Name chronic stress as something that happens to people, not a flaw in how they cope.</a:t>
+            </a:r>
+          </a:p>
+          <a:p>
+            <a:pPr algn="l">
+              <a:spcAft>
+                <a:spcPts val="585"/>
+              </a:spcAft>
+            </a:pPr>
+            <a:r>
+              <a:rPr sz="1300" b="0" i="0">
+                <a:solidFill>
+                  <a:srgbClr val="1C1B19"/>
+                </a:solidFill>
+                <a:latin typeface="Source Serif 4"/>
+              </a:rPr>
+              <a:t/>
+            </a:r>
+          </a:p>
+          <a:p>
+            <a:pPr algn="l">
+              <a:spcAft>
+                <a:spcPts val="585"/>
+              </a:spcAft>
+            </a:pPr>
+            <a:r>
+              <a:rPr sz="1500" b="1" i="0">
+                <a:solidFill>
+                  <a:srgbClr val="1C1B19"/>
+                </a:solidFill>
+                <a:latin typeface="Source Serif 4"/>
+              </a:rPr>
+              <a:t>Families name it differently.</a:t>
+            </a:r>
+          </a:p>
+          <a:p>
+            <a:pPr algn="l">
+              <a:spcAft>
+                <a:spcPts val="585"/>
+              </a:spcAft>
+            </a:pPr>
+            <a:r>
+              <a:rPr sz="1300" b="0" i="0">
+                <a:solidFill>
+                  <a:srgbClr val="1C1B19"/>
+                </a:solidFill>
+                <a:latin typeface="Source Serif 4"/>
+              </a:rPr>
+              <a:t>Some families say nerves, pressure, or nothing at all; in some homes stress shows up as stomachaches or headaches. Ask what students' families call it, and treat faith, music, food, family and community as real ways of coping.</a:t>
+            </a:r>
+          </a:p>
+          <a:p>
+            <a:pPr algn="l">
+              <a:spcAft>
+                <a:spcPts val="585"/>
+              </a:spcAft>
+            </a:pPr>
+            <a:r>
+              <a:rPr sz="1300" b="0" i="0">
+                <a:solidFill>
+                  <a:srgbClr val="1C1B19"/>
+                </a:solidFill>
+                <a:latin typeface="Source Serif 4"/>
+              </a:rPr>
+              <a:t/>
+            </a:r>
+          </a:p>
+          <a:p>
+            <a:pPr algn="l">
+              <a:spcAft>
+                <a:spcPts val="585"/>
+              </a:spcAft>
+            </a:pPr>
+            <a:r>
+              <a:rPr sz="1500" b="1" i="0">
+                <a:solidFill>
+                  <a:srgbClr val="1C1B19"/>
+                </a:solidFill>
+                <a:latin typeface="Source Serif 4"/>
+              </a:rPr>
+              <a:t>Movement for every body.</a:t>
+            </a:r>
+          </a:p>
+          <a:p>
+            <a:pPr algn="l">
+              <a:spcAft>
+                <a:spcPts val="585"/>
+              </a:spcAft>
+            </a:pPr>
+            <a:r>
+              <a:rPr sz="1300" b="0" i="0">
+                <a:solidFill>
+                  <a:srgbClr val="1C1B19"/>
+                </a:solidFill>
+                <a:latin typeface="Source Serif 4"/>
+              </a:rPr>
+              <a:t>The opening movement is optional. Offer clapping fast, tapping feet, a few deep fast breaths, or simply noticing your pulse. Students with heart conditions, injuries or disabilities can sit it out without explaining.</a:t>
+            </a:r>
+          </a:p>
+          <a:p>
+            <a:pPr algn="l">
+              <a:spcAft>
+                <a:spcPts val="585"/>
+              </a:spcAft>
+            </a:pPr>
+            <a:r>
+              <a:rPr sz="1300" b="0" i="0">
+                <a:solidFill>
+                  <a:srgbClr val="1C1B19"/>
+                </a:solidFill>
+                <a:latin typeface="Source Serif 4"/>
+              </a:rPr>
+              <a:t/>
+            </a:r>
+          </a:p>
+        </p:txBody>
+      </p:sp>
+      <p:sp>
+        <p:nvSpPr>
+          <p:cNvPr id="7" name="TextBox 6"/>
+          <p:cNvSpPr txBox="1"/>
+          <p:nvPr/>
+        </p:nvSpPr>
+        <p:spPr>
+          <a:xfrm>
+            <a:off x="6217920" y="1828800"/>
+            <a:ext cx="5394960" cy="4572000"/>
+          </a:xfrm>
+          <a:prstGeom prst="rect">
+            <a:avLst/>
+          </a:prstGeom>
+          <a:noFill/>
+        </p:spPr>
+        <p:txBody>
+          <a:bodyPr wrap="square" anchor="t" lIns="0" rIns="0" tIns="0" bIns="0">
+            <a:spAutoFit/>
+          </a:bodyPr>
+          <a:lstStyle/>
+          <a:p>
+            <a:pPr algn="l">
+              <a:spcAft>
+                <a:spcPts val="585"/>
+              </a:spcAft>
+            </a:pPr>
+            <a:r>
+              <a:rPr sz="1500" b="1" i="0">
+                <a:solidFill>
+                  <a:srgbClr val="1C1B19"/>
+                </a:solidFill>
+                <a:latin typeface="Source Serif 4"/>
+              </a:rPr>
+              <a:t>Bodies that react differently.</a:t>
+            </a:r>
+          </a:p>
+          <a:p>
+            <a:pPr algn="l">
+              <a:spcAft>
+                <a:spcPts val="585"/>
+              </a:spcAft>
+            </a:pPr>
+            <a:r>
+              <a:rPr sz="1300" b="0" i="0">
+                <a:solidFill>
+                  <a:srgbClr val="1C1B19"/>
+                </a:solidFill>
+                <a:latin typeface="Source Serif 4"/>
+              </a:rPr>
+              <a:t>Students with anxiety, trauma histories, or sensory sensitivities may find focusing on heartbeat uncomfortable. Make noticing optional and keep eyes-open.</a:t>
+            </a:r>
+          </a:p>
+          <a:p>
+            <a:pPr algn="l">
+              <a:spcAft>
+                <a:spcPts val="585"/>
+              </a:spcAft>
+            </a:pPr>
+            <a:r>
+              <a:rPr sz="1300" b="0" i="0">
+                <a:solidFill>
+                  <a:srgbClr val="1C1B19"/>
+                </a:solidFill>
+                <a:latin typeface="Source Serif 4"/>
+              </a:rPr>
+              <a:t/>
+            </a:r>
+          </a:p>
+          <a:p>
+            <a:pPr algn="l">
+              <a:spcAft>
+                <a:spcPts val="585"/>
+              </a:spcAft>
+            </a:pPr>
+            <a:r>
+              <a:rPr sz="1500" b="1" i="0">
+                <a:solidFill>
+                  <a:srgbClr val="1C1B19"/>
+                </a:solidFill>
+                <a:latin typeface="Source Serif 4"/>
+              </a:rPr>
+              <a:t>Neurodivergent students.</a:t>
+            </a:r>
+          </a:p>
+          <a:p>
+            <a:pPr algn="l">
+              <a:spcAft>
+                <a:spcPts val="585"/>
+              </a:spcAft>
+            </a:pPr>
+            <a:r>
+              <a:rPr sz="1300" b="0" i="0">
+                <a:solidFill>
+                  <a:srgbClr val="1C1B19"/>
+                </a:solidFill>
+                <a:latin typeface="Source Serif 4"/>
+              </a:rPr>
+              <a:t>Students with ADHD or autism may feel stress signals more or less strongly, or read them later. There's no right way to feel it. Concrete cards help.</a:t>
+            </a:r>
+          </a:p>
+          <a:p>
+            <a:pPr algn="l">
+              <a:spcAft>
+                <a:spcPts val="585"/>
+              </a:spcAft>
+            </a:pPr>
+            <a:r>
+              <a:rPr sz="1300" b="0" i="0">
+                <a:solidFill>
+                  <a:srgbClr val="1C1B19"/>
+                </a:solidFill>
+                <a:latin typeface="Source Serif 4"/>
+              </a:rPr>
+              <a:t/>
+            </a:r>
+          </a:p>
+          <a:p>
+            <a:pPr algn="l">
+              <a:spcAft>
+                <a:spcPts val="585"/>
+              </a:spcAft>
+            </a:pPr>
+            <a:r>
+              <a:rPr sz="1500" b="1" i="0">
+                <a:solidFill>
+                  <a:srgbClr val="1C1B19"/>
+                </a:solidFill>
+                <a:latin typeface="Source Serif 4"/>
+              </a:rPr>
+              <a:t>Language.</a:t>
+            </a:r>
+          </a:p>
+          <a:p>
+            <a:pPr algn="l">
+              <a:spcAft>
+                <a:spcPts val="585"/>
+              </a:spcAft>
+            </a:pPr>
+            <a:r>
+              <a:rPr sz="1300" b="0" i="0">
+                <a:solidFill>
+                  <a:srgbClr val="1C1B19"/>
+                </a:solidFill>
+                <a:latin typeface="Source Serif 4"/>
+              </a:rPr>
+              <a:t>English learners can answer with a word in any language, a gesture, or a number from 1 to 10.</a:t>
+            </a:r>
+          </a:p>
+          <a:p>
+            <a:pPr algn="l">
+              <a:spcAft>
+                <a:spcPts val="585"/>
+              </a:spcAft>
+            </a:pPr>
+            <a:r>
+              <a:rPr sz="1300" b="0" i="0">
+                <a:solidFill>
+                  <a:srgbClr val="1C1B19"/>
+                </a:solidFill>
+                <a:latin typeface="Source Serif 4"/>
+              </a:rPr>
+              <a:t/>
+            </a:r>
+          </a:p>
+        </p:txBody>
+      </p:sp>
+    </p:spTree>
+  </p:cSld>
+  <p:clrMapOvr>
+    <a:masterClrMapping/>
+  </p:clrMapOvr>
+</p:sld>
+</file>
+
+<file path=ppt/slides/slide12.xml><?xml version="1.0" encoding="utf-8"?>
+<p:sld xmlns:a="http://schemas.openxmlformats.org/drawingml/2006/main" xmlns:p="http://schemas.openxmlformats.org/presentationml/2006/main" xmlns:r="http://schemas.openxmlformats.org/officeDocument/2006/relationships" show="0">
+  <p:cSld>
+    <p:bg>
+      <p:bgPr>
+        <a:solidFill>
+          <a:srgbClr val="EEEBE4"/>
+        </a:solidFill>
+        <a:effectLst/>
+      </p:bgPr>
+    </p:bg>
+    <p:spTree>
+      <p:nvGrpSpPr>
+        <p:cNvPr id="1" name=""/>
+        <p:cNvGrpSpPr/>
+        <p:nvPr/>
+      </p:nvGrpSpPr>
+      <p:grpSpPr/>
+      <p:sp>
+        <p:nvSpPr>
+          <p:cNvPr id="2" name="Rectangle 1"/>
+          <p:cNvSpPr/>
+          <p:nvPr/>
+        </p:nvSpPr>
+        <p:spPr>
+          <a:xfrm>
+            <a:off x="0" y="0"/>
+            <a:ext cx="12191695" cy="384048"/>
+          </a:xfrm>
+          <a:prstGeom prst="rect">
+            <a:avLst/>
+          </a:prstGeom>
+          <a:solidFill>
+            <a:srgbClr val="0B2D5B"/>
+          </a:solidFill>
+          <a:ln>
+            <a:noFill/>
+          </a:ln>
+          <a:effectLst/>
+        </p:spPr>
+        <p:style>
+          <a:lnRef idx="1">
+            <a:schemeClr val="accent1"/>
+          </a:lnRef>
+          <a:fillRef idx="3">
+            <a:schemeClr val="accent1"/>
+          </a:fillRef>
+          <a:effectRef idx="2">
+            <a:schemeClr val="accent1"/>
+          </a:effectRef>
+          <a:fontRef idx="minor">
+            <a:schemeClr val="lt1"/>
+          </a:fontRef>
+        </p:style>
+        <p:txBody>
+          <a:bodyPr rtlCol="0" anchor="ctr"/>
+          <a:lstStyle/>
+          <a:p>
+            <a:pPr algn="ctr"/>
+          </a:p>
+        </p:txBody>
+      </p:sp>
+      <p:sp>
+        <p:nvSpPr>
+          <p:cNvPr id="3" name="TextBox 2"/>
+          <p:cNvSpPr txBox="1"/>
+          <p:nvPr/>
+        </p:nvSpPr>
+        <p:spPr>
+          <a:xfrm>
+            <a:off x="548640" y="100584"/>
+            <a:ext cx="10972800" cy="274320"/>
+          </a:xfrm>
+          <a:prstGeom prst="rect">
+            <a:avLst/>
+          </a:prstGeom>
+          <a:noFill/>
+        </p:spPr>
+        <p:txBody>
+          <a:bodyPr wrap="square" anchor="t" lIns="0" rIns="0" tIns="0" bIns="0">
+            <a:spAutoFit/>
+          </a:bodyPr>
+          <a:lstStyle/>
+          <a:p>
+            <a:pPr algn="l">
+              <a:spcAft>
+                <a:spcPts val="495"/>
+              </a:spcAft>
+            </a:pPr>
+            <a:r>
+              <a:rPr sz="1100" b="1" i="0">
+                <a:solidFill>
+                  <a:srgbClr val="FFFFFF"/>
+                </a:solidFill>
+                <a:latin typeface="Inter Tight"/>
+              </a:rPr>
+              <a:t>TEACHER PAGE  ·  skipped when you present  ·  Background</a:t>
+            </a:r>
+          </a:p>
+        </p:txBody>
+      </p:sp>
+      <p:sp>
+        <p:nvSpPr>
+          <p:cNvPr id="4" name="TextBox 3"/>
+          <p:cNvSpPr txBox="1"/>
+          <p:nvPr/>
+        </p:nvSpPr>
+        <p:spPr>
+          <a:xfrm>
+            <a:off x="548640" y="685800"/>
+            <a:ext cx="10972800" cy="640080"/>
+          </a:xfrm>
+          <a:prstGeom prst="rect">
+            <a:avLst/>
+          </a:prstGeom>
+          <a:noFill/>
+        </p:spPr>
+        <p:txBody>
+          <a:bodyPr wrap="square" anchor="t" lIns="0" rIns="0" tIns="0" bIns="0">
+            <a:spAutoFit/>
+          </a:bodyPr>
+          <a:lstStyle/>
+          <a:p>
+            <a:pPr algn="l">
+              <a:spcAft>
+                <a:spcPts val="1350"/>
+              </a:spcAft>
+            </a:pPr>
+            <a:r>
+              <a:rPr sz="3000" b="1" i="0">
+                <a:solidFill>
+                  <a:srgbClr val="1C1B19"/>
+                </a:solidFill>
+                <a:latin typeface="Source Serif 4"/>
+              </a:rPr>
+              <a:t>What the research says</a:t>
+            </a:r>
+          </a:p>
+        </p:txBody>
+      </p:sp>
+      <p:sp>
+        <p:nvSpPr>
+          <p:cNvPr id="5" name="TextBox 4"/>
+          <p:cNvSpPr txBox="1"/>
+          <p:nvPr/>
+        </p:nvSpPr>
+        <p:spPr>
+          <a:xfrm>
+            <a:off x="548640" y="1463040"/>
+            <a:ext cx="5394960" cy="4937760"/>
+          </a:xfrm>
+          <a:prstGeom prst="rect">
+            <a:avLst/>
+          </a:prstGeom>
+          <a:noFill/>
+        </p:spPr>
+        <p:txBody>
+          <a:bodyPr wrap="square" anchor="t" lIns="0" rIns="0" tIns="0" bIns="0">
+            <a:spAutoFit/>
+          </a:bodyPr>
+          <a:lstStyle/>
+          <a:p>
+            <a:pPr algn="l">
+              <a:spcAft>
+                <a:spcPts val="585"/>
+              </a:spcAft>
+            </a:pPr>
+            <a:r>
+              <a:rPr sz="1300" b="0" i="0">
+                <a:solidFill>
+                  <a:srgbClr val="1C1B19"/>
+                </a:solidFill>
+                <a:latin typeface="Source Serif 4"/>
+              </a:rPr>
+              <a:t>In a 30-minute online lesson tested in several studies with thousands of high school and college students, learning that stress responses can fuel performance (together with a growth mindset) improved heart and blood vessel responses to a stress test, lowered daily cortisol, reduced anxiety, and improved academic outcomes.</a:t>
+            </a:r>
+          </a:p>
+          <a:p>
+            <a:pPr algn="l">
+              <a:spcAft>
+                <a:spcPts val="585"/>
+              </a:spcAft>
+            </a:pPr>
+            <a:r>
+              <a:rPr sz="1050" b="0" i="0">
+                <a:solidFill>
+                  <a:srgbClr val="5D5A54"/>
+                </a:solidFill>
+                <a:latin typeface="Inter Tight"/>
+              </a:rPr>
+              <a:t>Yeager et al., Nature, 2022</a:t>
+            </a:r>
+          </a:p>
+          <a:p>
+            <a:pPr algn="l">
+              <a:spcAft>
+                <a:spcPts val="585"/>
+              </a:spcAft>
+            </a:pPr>
+            <a:r>
+              <a:rPr sz="1300" b="0" i="0">
+                <a:solidFill>
+                  <a:srgbClr val="1C1B19"/>
+                </a:solidFill>
+                <a:latin typeface="Source Serif 4"/>
+              </a:rPr>
+              <a:t>People told that a racing heart helps them perform showed a more efficient cardiovascular response under social stress and paid less attention to threat.</a:t>
+            </a:r>
+          </a:p>
+          <a:p>
+            <a:pPr algn="l">
+              <a:spcAft>
+                <a:spcPts val="585"/>
+              </a:spcAft>
+            </a:pPr>
+            <a:r>
+              <a:rPr sz="1050" b="0" i="0">
+                <a:solidFill>
+                  <a:srgbClr val="5D5A54"/>
+                </a:solidFill>
+                <a:latin typeface="Inter Tight"/>
+              </a:rPr>
+              <a:t>Jamieson, Nock &amp; Mendes, Journal of Experimental Psychology: General, 2012</a:t>
+            </a:r>
+          </a:p>
+          <a:p>
+            <a:pPr algn="l">
+              <a:spcAft>
+                <a:spcPts val="585"/>
+              </a:spcAft>
+            </a:pPr>
+            <a:r>
+              <a:rPr sz="1300" b="0" i="0">
+                <a:solidFill>
+                  <a:srgbClr val="1C1B19"/>
+                </a:solidFill>
+                <a:latin typeface="Source Serif 4"/>
+              </a:rPr>
+              <a:t>Students told that arousal can help did better on GRE math practice and on the real GRE months later.</a:t>
+            </a:r>
+          </a:p>
+          <a:p>
+            <a:pPr algn="l">
+              <a:spcAft>
+                <a:spcPts val="585"/>
+              </a:spcAft>
+            </a:pPr>
+            <a:r>
+              <a:rPr sz="1050" b="0" i="0">
+                <a:solidFill>
+                  <a:srgbClr val="5D5A54"/>
+                </a:solidFill>
+                <a:latin typeface="Inter Tight"/>
+              </a:rPr>
+              <a:t>Jamieson et al., Journal of Experimental Social Psychology, 2010</a:t>
+            </a:r>
+          </a:p>
+          <a:p>
+            <a:pPr algn="l">
+              <a:spcAft>
+                <a:spcPts val="585"/>
+              </a:spcAft>
+            </a:pPr>
+            <a:r>
+              <a:rPr sz="1300" b="0" i="0">
+                <a:solidFill>
+                  <a:srgbClr val="1C1B19"/>
+                </a:solidFill>
+                <a:latin typeface="Source Serif 4"/>
+              </a:rPr>
+              <a:t>Believing stress can be enhancing was linked to better health and work performance, and a short video shifting that belief changed how people responded to stress.</a:t>
+            </a:r>
+          </a:p>
+          <a:p>
+            <a:pPr algn="l">
+              <a:spcAft>
+                <a:spcPts val="585"/>
+              </a:spcAft>
+            </a:pPr>
+            <a:r>
+              <a:rPr sz="1050" b="0" i="0">
+                <a:solidFill>
+                  <a:srgbClr val="5D5A54"/>
+                </a:solidFill>
+                <a:latin typeface="Inter Tight"/>
+              </a:rPr>
+              <a:t>Crum, Salovey &amp; Achor, Journal of Personality and Social Psychology, 2013</a:t>
+            </a:r>
+          </a:p>
+        </p:txBody>
+      </p:sp>
+      <p:sp>
+        <p:nvSpPr>
+          <p:cNvPr id="6" name="TextBox 5"/>
+          <p:cNvSpPr txBox="1"/>
+          <p:nvPr/>
+        </p:nvSpPr>
+        <p:spPr>
+          <a:xfrm>
+            <a:off x="6217920" y="1463040"/>
+            <a:ext cx="5394960" cy="4937760"/>
+          </a:xfrm>
+          <a:prstGeom prst="rect">
+            <a:avLst/>
+          </a:prstGeom>
+          <a:noFill/>
+        </p:spPr>
+        <p:txBody>
+          <a:bodyPr wrap="square" anchor="t" lIns="0" rIns="0" tIns="0" bIns="0">
+            <a:spAutoFit/>
+          </a:bodyPr>
+          <a:lstStyle/>
+          <a:p>
+            <a:pPr algn="l">
+              <a:spcAft>
+                <a:spcPts val="585"/>
+              </a:spcAft>
+            </a:pPr>
+            <a:r>
+              <a:rPr sz="1300" b="0" i="0">
+                <a:solidFill>
+                  <a:srgbClr val="1C1B19"/>
+                </a:solidFill>
+                <a:latin typeface="Source Serif 4"/>
+              </a:rPr>
+              <a:t>Short-term stress responses protect and prepare the body; harm comes when they are turned on too often or fail to turn off (allostatic load).</a:t>
+            </a:r>
+          </a:p>
+          <a:p>
+            <a:pPr algn="l">
+              <a:spcAft>
+                <a:spcPts val="585"/>
+              </a:spcAft>
+            </a:pPr>
+            <a:r>
+              <a:rPr sz="1050" b="0" i="0">
+                <a:solidFill>
+                  <a:srgbClr val="5D5A54"/>
+                </a:solidFill>
+                <a:latin typeface="Inter Tight"/>
+              </a:rPr>
+              <a:t>McEwen, New England Journal of Medicine, 1998</a:t>
+            </a:r>
+          </a:p>
+          <a:p>
+            <a:pPr algn="l">
+              <a:spcAft>
+                <a:spcPts val="585"/>
+              </a:spcAft>
+            </a:pPr>
+            <a:r>
+              <a:rPr sz="1300" b="0" i="0">
+                <a:solidFill>
+                  <a:srgbClr val="1C1B19"/>
+                </a:solidFill>
+                <a:latin typeface="Source Serif 4"/>
+              </a:rPr>
+              <a:t>Developmental scientists separate positive stress (brief, mild), tolerable stress (serious but buffered by supportive adults), and toxic stress (strong, frequent or prolonged without that support).</a:t>
+            </a:r>
+          </a:p>
+          <a:p>
+            <a:pPr algn="l">
+              <a:spcAft>
+                <a:spcPts val="585"/>
+              </a:spcAft>
+            </a:pPr>
+            <a:r>
+              <a:rPr sz="1050" b="0" i="0">
+                <a:solidFill>
+                  <a:srgbClr val="5D5A54"/>
+                </a:solidFill>
+                <a:latin typeface="Inter Tight"/>
+              </a:rPr>
+              <a:t>National Scientific Council on the Developing Child, Harvard, 2005/2014</a:t>
+            </a:r>
+          </a:p>
+          <a:p>
+            <a:pPr algn="l">
+              <a:spcAft>
+                <a:spcPts val="585"/>
+              </a:spcAft>
+            </a:pPr>
+            <a:r>
+              <a:rPr sz="1300" b="0" i="0">
+                <a:solidFill>
+                  <a:srgbClr val="1C1B19"/>
+                </a:solidFill>
+                <a:latin typeface="Source Serif 4"/>
+              </a:rPr>
+              <a:t>Worry and rumination keep the stress response switched on long after the stressful event is over.</a:t>
+            </a:r>
+          </a:p>
+          <a:p>
+            <a:pPr algn="l">
+              <a:spcAft>
+                <a:spcPts val="585"/>
+              </a:spcAft>
+            </a:pPr>
+            <a:r>
+              <a:rPr sz="1050" b="0" i="0">
+                <a:solidFill>
+                  <a:srgbClr val="5D5A54"/>
+                </a:solidFill>
+                <a:latin typeface="Inter Tight"/>
+              </a:rPr>
+              <a:t>Brosschot, Gerin &amp; Thayer, Journal of Psychosomatic Research, 2006</a:t>
+            </a:r>
+          </a:p>
+          <a:p>
+            <a:pPr algn="l">
+              <a:spcAft>
+                <a:spcPts val="585"/>
+              </a:spcAft>
+            </a:pPr>
+            <a:r>
+              <a:rPr sz="1300" b="0" i="0">
+                <a:solidFill>
+                  <a:srgbClr val="1C1B19"/>
+                </a:solidFill>
+                <a:latin typeface="Source Serif 4"/>
+              </a:rPr>
+              <a:t>Discrimination and poverty act as chronic stressors with measurable effects on mental and physical health.</a:t>
+            </a:r>
+          </a:p>
+          <a:p>
+            <a:pPr algn="l">
+              <a:spcAft>
+                <a:spcPts val="585"/>
+              </a:spcAft>
+            </a:pPr>
+            <a:r>
+              <a:rPr sz="1050" b="0" i="0">
+                <a:solidFill>
+                  <a:srgbClr val="5D5A54"/>
+                </a:solidFill>
+                <a:latin typeface="Inter Tight"/>
+              </a:rPr>
+              <a:t>Williams, Journal of Health and Social Behavior, 2018; Evans &amp; Kim, Child Development Perspectives, 2013</a:t>
+            </a:r>
+          </a:p>
+        </p:txBody>
+      </p:sp>
+    </p:spTree>
+  </p:cSld>
+  <p:clrMapOvr>
+    <a:masterClrMapping/>
+  </p:clrMapOvr>
+</p:sld>
+</file>
+
+<file path=ppt/slides/slide2.xml><?xml version="1.0" encoding="utf-8"?>
+<p:sld xmlns:a="http://schemas.openxmlformats.org/drawingml/2006/main" xmlns:p="http://schemas.openxmlformats.org/presentationml/2006/main" xmlns:r="http://schemas.openxmlformats.org/officeDocument/2006/relationships">
+  <p:cSld>
+    <p:bg>
+      <p:bgPr>
+        <a:solidFill>
+          <a:srgbClr val="0B2D5B"/>
+        </a:solidFill>
+        <a:effectLst/>
+      </p:bgPr>
+    </p:bg>
+    <p:spTree>
+      <p:nvGrpSpPr>
+        <p:cNvPr id="1" name=""/>
+        <p:cNvGrpSpPr/>
+        <p:nvPr/>
+      </p:nvGrpSpPr>
+      <p:grpSpPr/>
+      <p:sp>
+        <p:nvSpPr>
+          <p:cNvPr id="2" name="Rectangle 1"/>
+          <p:cNvSpPr/>
+          <p:nvPr/>
+        </p:nvSpPr>
+        <p:spPr>
+          <a:xfrm>
+            <a:off x="548640" y="502920"/>
+            <a:ext cx="457200" cy="54864"/>
+          </a:xfrm>
+          <a:prstGeom prst="rect">
+            <a:avLst/>
+          </a:prstGeom>
+          <a:solidFill>
+            <a:srgbClr val="F47B20"/>
+          </a:solidFill>
+          <a:ln>
+            <a:noFill/>
+          </a:ln>
+          <a:effectLst/>
+        </p:spPr>
+        <p:style>
+          <a:lnRef idx="1">
+            <a:schemeClr val="accent1"/>
+          </a:lnRef>
+          <a:fillRef idx="3">
+            <a:schemeClr val="accent1"/>
+          </a:fillRef>
+          <a:effectRef idx="2">
+            <a:schemeClr val="accent1"/>
+          </a:effectRef>
+          <a:fontRef idx="minor">
+            <a:schemeClr val="lt1"/>
+          </a:fontRef>
+        </p:style>
+        <p:txBody>
+          <a:bodyPr rtlCol="0" anchor="ctr"/>
+          <a:lstStyle/>
+          <a:p>
+            <a:pPr algn="ctr"/>
+          </a:p>
+        </p:txBody>
+      </p:sp>
+      <p:sp>
+        <p:nvSpPr>
+          <p:cNvPr id="3" name="TextBox 2"/>
+          <p:cNvSpPr txBox="1"/>
+          <p:nvPr/>
+        </p:nvSpPr>
+        <p:spPr>
+          <a:xfrm>
+            <a:off x="1143000" y="393192"/>
+            <a:ext cx="8229600" cy="274320"/>
+          </a:xfrm>
+          <a:prstGeom prst="rect">
+            <a:avLst/>
+          </a:prstGeom>
+          <a:noFill/>
+        </p:spPr>
+        <p:txBody>
+          <a:bodyPr wrap="square" anchor="t" lIns="0" rIns="0" tIns="0" bIns="0">
+            <a:spAutoFit/>
+          </a:bodyPr>
+          <a:lstStyle/>
+          <a:p>
+            <a:pPr algn="l">
+              <a:spcAft>
+                <a:spcPts val="540"/>
+              </a:spcAft>
+            </a:pPr>
+            <a:r>
+              <a:rPr sz="1200" b="1" i="0">
+                <a:solidFill>
+                  <a:srgbClr val="5D5A54"/>
+                </a:solidFill>
+                <a:latin typeface="Inter Tight"/>
+              </a:rPr>
+              <a:t>STRESS IS A SIGNAL</a:t>
+            </a:r>
+          </a:p>
+        </p:txBody>
+      </p:sp>
+      <p:sp>
+        <p:nvSpPr>
+          <p:cNvPr id="4" name="TextBox 3"/>
+          <p:cNvSpPr txBox="1"/>
+          <p:nvPr/>
+        </p:nvSpPr>
+        <p:spPr>
+          <a:xfrm>
+            <a:off x="8229600" y="6400800"/>
+            <a:ext cx="3410712" cy="274320"/>
+          </a:xfrm>
+          <a:prstGeom prst="rect">
+            <a:avLst/>
+          </a:prstGeom>
+          <a:noFill/>
+        </p:spPr>
+        <p:txBody>
+          <a:bodyPr wrap="square" anchor="t" lIns="0" rIns="0" tIns="0" bIns="0">
+            <a:spAutoFit/>
+          </a:bodyPr>
+          <a:lstStyle/>
+          <a:p>
+            <a:pPr algn="r">
+              <a:spcAft>
+                <a:spcPts val="450"/>
+              </a:spcAft>
+            </a:pPr>
+            <a:r>
+              <a:rPr sz="1000" b="0" i="0">
+                <a:solidFill>
+                  <a:srgbClr val="5D5A54"/>
+                </a:solidFill>
+                <a:latin typeface="Inter Tight"/>
+              </a:rPr>
+              <a:t>Beaver Counseling</a:t>
+            </a:r>
+          </a:p>
+        </p:txBody>
+      </p:sp>
+      <p:sp>
+        <p:nvSpPr>
+          <p:cNvPr id="5" name="TextBox 4"/>
+          <p:cNvSpPr txBox="1"/>
+          <p:nvPr/>
+        </p:nvSpPr>
+        <p:spPr>
+          <a:xfrm>
+            <a:off x="822960" y="2011680"/>
+            <a:ext cx="10515600" cy="1463040"/>
+          </a:xfrm>
+          <a:prstGeom prst="rect">
+            <a:avLst/>
+          </a:prstGeom>
+          <a:noFill/>
+        </p:spPr>
+        <p:txBody>
+          <a:bodyPr wrap="square" anchor="b" lIns="0" rIns="0" tIns="0" bIns="0">
+            <a:spAutoFit/>
+          </a:bodyPr>
+          <a:lstStyle/>
+          <a:p>
+            <a:pPr algn="l">
+              <a:spcAft>
+                <a:spcPts val="2700"/>
+              </a:spcAft>
+            </a:pPr>
+            <a:r>
+              <a:rPr sz="6000" b="1" i="0">
+                <a:solidFill>
+                  <a:srgbClr val="FFFFFF"/>
+                </a:solidFill>
+                <a:latin typeface="Source Serif 4"/>
+              </a:rPr>
+              <a:t>Stress Is a Signal</a:t>
+            </a:r>
+          </a:p>
+        </p:txBody>
+      </p:sp>
+      <p:sp>
+        <p:nvSpPr>
+          <p:cNvPr id="6" name="TextBox 5"/>
+          <p:cNvSpPr txBox="1"/>
+          <p:nvPr/>
+        </p:nvSpPr>
+        <p:spPr>
+          <a:xfrm>
+            <a:off x="822960" y="3611880"/>
+            <a:ext cx="10515600" cy="914400"/>
+          </a:xfrm>
+          <a:prstGeom prst="rect">
+            <a:avLst/>
+          </a:prstGeom>
+          <a:noFill/>
+        </p:spPr>
+        <p:txBody>
+          <a:bodyPr wrap="square" anchor="t" lIns="0" rIns="0" tIns="0" bIns="0">
+            <a:spAutoFit/>
+          </a:bodyPr>
+          <a:lstStyle/>
+          <a:p>
+            <a:pPr algn="l">
+              <a:spcAft>
+                <a:spcPts val="1080"/>
+              </a:spcAft>
+            </a:pPr>
+            <a:r>
+              <a:rPr sz="2400" b="0" i="1">
+                <a:solidFill>
+                  <a:srgbClr val="E8E4DA"/>
+                </a:solidFill>
+                <a:latin typeface="Source Serif 4"/>
+              </a:rPr>
+              <a:t>Your body is getting you ready. Here's how to use it.</a:t>
+            </a:r>
+          </a:p>
+        </p:txBody>
+      </p:sp>
+      <p:sp>
+        <p:nvSpPr>
+          <p:cNvPr id="7" name="TextBox 6"/>
+          <p:cNvSpPr txBox="1"/>
+          <p:nvPr/>
+        </p:nvSpPr>
+        <p:spPr>
+          <a:xfrm>
+            <a:off x="822960" y="6035040"/>
+            <a:ext cx="7315200" cy="365760"/>
+          </a:xfrm>
+          <a:prstGeom prst="rect">
+            <a:avLst/>
+          </a:prstGeom>
+          <a:noFill/>
+        </p:spPr>
+        <p:txBody>
+          <a:bodyPr wrap="square" anchor="t" lIns="0" rIns="0" tIns="0" bIns="0">
+            <a:spAutoFit/>
+          </a:bodyPr>
+          <a:lstStyle/>
+          <a:p>
+            <a:pPr algn="l">
+              <a:spcAft>
+                <a:spcPts val="585"/>
+              </a:spcAft>
+            </a:pPr>
+            <a:r>
+              <a:rPr sz="1300" b="0" i="0">
+                <a:solidFill>
+                  <a:srgbClr val="E8E4DA"/>
+                </a:solidFill>
+                <a:latin typeface="Inter Tight"/>
+              </a:rPr>
+              <a:t>Beaver Upper School · Counseling</a:t>
+            </a:r>
+          </a:p>
+        </p:txBody>
+      </p:sp>
+    </p:spTree>
+  </p:cSld>
+  <p:clrMapOvr>
+    <a:masterClrMapping/>
+  </p:clrMapOvr>
+</p:sld>
+</file>
+
+<file path=ppt/slides/slide3.xml><?xml version="1.0" encoding="utf-8"?>
 <p:sld xmlns:a="http://schemas.openxmlformats.org/drawingml/2006/main" xmlns:p="http://schemas.openxmlformats.org/presentationml/2006/main" xmlns:r="http://schemas.openxmlformats.org/officeDocument/2006/relationships">
   <p:cSld>
     <p:bg>
@@ -4628,7 +6173,7 @@
                 </a:solidFill>
                 <a:latin typeface="Inter Tight"/>
               </a:rPr>
-              <a:t>SIGNAL OR STUCK ON?</a:t>
+              <a:t>FEEL IT</a:t>
             </a:r>
           </a:p>
         </p:txBody>
@@ -4674,64 +6219,23 @@
       </p:sp>
       <p:sp>
         <p:nvSpPr>
-          <p:cNvPr id="5" name="TextBox 4"/>
-          <p:cNvSpPr txBox="1"/>
-          <p:nvPr/>
-        </p:nvSpPr>
-        <p:spPr>
-          <a:xfrm>
-            <a:off x="822960" y="1005840"/>
-            <a:ext cx="10515600" cy="914400"/>
-          </a:xfrm>
-          <a:prstGeom prst="rect">
-            <a:avLst/>
-          </a:prstGeom>
-          <a:noFill/>
-        </p:spPr>
-        <p:txBody>
-          <a:bodyPr wrap="square" anchor="t" lIns="0" rIns="0" tIns="0" bIns="0">
-            <a:spAutoFit/>
-          </a:bodyPr>
-          <a:lstStyle/>
-          <a:p>
-            <a:pPr algn="l">
-              <a:spcAft>
-                <a:spcPts val="1530"/>
-              </a:spcAft>
-            </a:pPr>
-            <a:r>
-              <a:rPr sz="3400" b="1" i="0">
-                <a:solidFill>
-                  <a:srgbClr val="1C1B19"/>
-                </a:solidFill>
-                <a:latin typeface="Source Serif 4"/>
-              </a:rPr>
-              <a:t>Which is which?</a:t>
-            </a:r>
-          </a:p>
-        </p:txBody>
-      </p:sp>
-      <p:sp>
-        <p:nvSpPr>
-          <p:cNvPr id="6" name="Rectangle 5"/>
+          <p:cNvPr id="5" name="Rectangle 4"/>
           <p:cNvSpPr/>
           <p:nvPr/>
         </p:nvSpPr>
         <p:spPr>
           <a:xfrm>
-            <a:off x="822960" y="2103120"/>
-            <a:ext cx="2423160" cy="3840480"/>
+            <a:off x="822960" y="1371600"/>
+            <a:ext cx="73152" cy="3566160"/>
           </a:xfrm>
           <a:prstGeom prst="rect">
             <a:avLst/>
           </a:prstGeom>
           <a:solidFill>
-            <a:srgbClr val="FFFFFF"/>
+            <a:srgbClr val="F47B20"/>
           </a:solidFill>
-          <a:ln w="15875">
-            <a:solidFill>
-              <a:srgbClr val="D8D2C6"/>
-            </a:solidFill>
+          <a:ln>
+            <a:noFill/>
           </a:ln>
           <a:effectLst/>
         </p:spPr>
@@ -4759,14 +6263,53 @@
       </p:sp>
       <p:sp>
         <p:nvSpPr>
+          <p:cNvPr id="6" name="TextBox 5"/>
+          <p:cNvSpPr txBox="1"/>
+          <p:nvPr/>
+        </p:nvSpPr>
+        <p:spPr>
+          <a:xfrm>
+            <a:off x="1188720" y="1371600"/>
+            <a:ext cx="10058400" cy="3566160"/>
+          </a:xfrm>
+          <a:prstGeom prst="rect">
+            <a:avLst/>
+          </a:prstGeom>
+          <a:noFill/>
+        </p:spPr>
+        <p:txBody>
+          <a:bodyPr wrap="square" anchor="ctr" lIns="0" rIns="0" tIns="0" bIns="0">
+            <a:spAutoFit/>
+          </a:bodyPr>
+          <a:lstStyle/>
+          <a:p>
+            <a:pPr algn="l">
+              <a:spcAft>
+                <a:spcPts val="1800"/>
+              </a:spcAft>
+            </a:pPr>
+            <a:r>
+              <a:rPr sz="4000" b="0" i="1">
+                <a:solidFill>
+                  <a:srgbClr val="1C1B19"/>
+                </a:solidFill>
+                <a:latin typeface="Source Serif 4"/>
+              </a:rPr>
+              <a:t>Thirty seconds. Jumping jacks, fast claps, or tap your feet. Then notice.</a:t>
+            </a:r>
+          </a:p>
+        </p:txBody>
+      </p:sp>
+      <p:sp>
+        <p:nvSpPr>
           <p:cNvPr id="7" name="TextBox 6"/>
           <p:cNvSpPr txBox="1"/>
           <p:nvPr/>
         </p:nvSpPr>
         <p:spPr>
           <a:xfrm>
-            <a:off x="1051560" y="2286000"/>
-            <a:ext cx="1965960" cy="365760"/>
+            <a:off x="1188720" y="5120640"/>
+            <a:ext cx="10058400" cy="914400"/>
           </a:xfrm>
           <a:prstGeom prst="rect">
             <a:avLst/>
@@ -4781,428 +6324,17 @@
           <a:p>
             <a:pPr algn="l">
               <a:spcAft>
-                <a:spcPts val="585"/>
-              </a:spcAft>
-            </a:pPr>
-            <a:r>
-              <a:rPr sz="1300" b="1" i="0">
-                <a:solidFill>
-                  <a:srgbClr val="0B2D5B"/>
+                <a:spcPts val="810"/>
+              </a:spcAft>
+            </a:pPr>
+            <a:r>
+              <a:rPr sz="1800" b="0" i="0">
+                <a:solidFill>
+                  <a:srgbClr val="5D5A54"/>
                 </a:solidFill>
                 <a:latin typeface="Inter Tight"/>
               </a:rPr>
-              <a:t>MIA</a:t>
-            </a:r>
-          </a:p>
-        </p:txBody>
-      </p:sp>
-      <p:sp>
-        <p:nvSpPr>
-          <p:cNvPr id="8" name="TextBox 7"/>
-          <p:cNvSpPr txBox="1"/>
-          <p:nvPr/>
-        </p:nvSpPr>
-        <p:spPr>
-          <a:xfrm>
-            <a:off x="1051560" y="2743200"/>
-            <a:ext cx="1965960" cy="3017520"/>
-          </a:xfrm>
-          <a:prstGeom prst="rect">
-            <a:avLst/>
-          </a:prstGeom>
-          <a:noFill/>
-        </p:spPr>
-        <p:txBody>
-          <a:bodyPr wrap="square" anchor="t" lIns="0" rIns="0" tIns="0" bIns="0">
-            <a:spAutoFit/>
-          </a:bodyPr>
-          <a:lstStyle/>
-          <a:p>
-            <a:pPr algn="l">
-              <a:spcAft>
-                <a:spcPts val="810"/>
-              </a:spcAft>
-            </a:pPr>
-            <a:r>
-              <a:rPr sz="1800" b="0" i="0">
-                <a:solidFill>
-                  <a:srgbClr val="1C1B19"/>
-                </a:solidFill>
-                <a:latin typeface="Source Serif 4"/>
-              </a:rPr>
-              <a:t>Heart pounding in the hallway before her solo. After the concert she's wiped out and happy.</a:t>
-            </a:r>
-          </a:p>
-        </p:txBody>
-      </p:sp>
-      <p:sp>
-        <p:nvSpPr>
-          <p:cNvPr id="9" name="Rectangle 8"/>
-          <p:cNvSpPr/>
-          <p:nvPr/>
-        </p:nvSpPr>
-        <p:spPr>
-          <a:xfrm>
-            <a:off x="3520439" y="2103120"/>
-            <a:ext cx="2423160" cy="3840480"/>
-          </a:xfrm>
-          <a:prstGeom prst="rect">
-            <a:avLst/>
-          </a:prstGeom>
-          <a:solidFill>
-            <a:srgbClr val="FFFFFF"/>
-          </a:solidFill>
-          <a:ln w="15875">
-            <a:solidFill>
-              <a:srgbClr val="D8D2C6"/>
-            </a:solidFill>
-          </a:ln>
-          <a:effectLst/>
-        </p:spPr>
-        <p:style>
-          <a:lnRef idx="1">
-            <a:schemeClr val="accent1"/>
-          </a:lnRef>
-          <a:fillRef idx="3">
-            <a:schemeClr val="accent1"/>
-          </a:fillRef>
-          <a:effectRef idx="2">
-            <a:schemeClr val="accent1"/>
-          </a:effectRef>
-          <a:fontRef idx="minor">
-            <a:schemeClr val="lt1"/>
-          </a:fontRef>
-        </p:style>
-        <p:txBody>
-          <a:bodyPr rtlCol="0" anchor="ctr"/>
-          <a:lstStyle/>
-          <a:p>
-            <a:pPr algn="ctr"/>
-          </a:p>
-        </p:txBody>
-      </p:sp>
-      <p:sp>
-        <p:nvSpPr>
-          <p:cNvPr id="10" name="TextBox 9"/>
-          <p:cNvSpPr txBox="1"/>
-          <p:nvPr/>
-        </p:nvSpPr>
-        <p:spPr>
-          <a:xfrm>
-            <a:off x="3749039" y="2286000"/>
-            <a:ext cx="1965960" cy="365760"/>
-          </a:xfrm>
-          <a:prstGeom prst="rect">
-            <a:avLst/>
-          </a:prstGeom>
-          <a:noFill/>
-        </p:spPr>
-        <p:txBody>
-          <a:bodyPr wrap="square" anchor="t" lIns="0" rIns="0" tIns="0" bIns="0">
-            <a:spAutoFit/>
-          </a:bodyPr>
-          <a:lstStyle/>
-          <a:p>
-            <a:pPr algn="l">
-              <a:spcAft>
-                <a:spcPts val="585"/>
-              </a:spcAft>
-            </a:pPr>
-            <a:r>
-              <a:rPr sz="1300" b="1" i="0">
-                <a:solidFill>
-                  <a:srgbClr val="0B2D5B"/>
-                </a:solidFill>
-                <a:latin typeface="Inter Tight"/>
-              </a:rPr>
-              <a:t>ANDRE</a:t>
-            </a:r>
-          </a:p>
-        </p:txBody>
-      </p:sp>
-      <p:sp>
-        <p:nvSpPr>
-          <p:cNvPr id="11" name="TextBox 10"/>
-          <p:cNvSpPr txBox="1"/>
-          <p:nvPr/>
-        </p:nvSpPr>
-        <p:spPr>
-          <a:xfrm>
-            <a:off x="3749039" y="2743200"/>
-            <a:ext cx="1965960" cy="3017520"/>
-          </a:xfrm>
-          <a:prstGeom prst="rect">
-            <a:avLst/>
-          </a:prstGeom>
-          <a:noFill/>
-        </p:spPr>
-        <p:txBody>
-          <a:bodyPr wrap="square" anchor="t" lIns="0" rIns="0" tIns="0" bIns="0">
-            <a:spAutoFit/>
-          </a:bodyPr>
-          <a:lstStyle/>
-          <a:p>
-            <a:pPr algn="l">
-              <a:spcAft>
-                <a:spcPts val="810"/>
-              </a:spcAft>
-            </a:pPr>
-            <a:r>
-              <a:rPr sz="1800" b="0" i="0">
-                <a:solidFill>
-                  <a:srgbClr val="1C1B19"/>
-                </a:solidFill>
-                <a:latin typeface="Source Serif 4"/>
-              </a:rPr>
-              <a:t>Hasn't slept well in a month. His family might have to move, and he thinks about it all through class.</a:t>
-            </a:r>
-          </a:p>
-        </p:txBody>
-      </p:sp>
-      <p:sp>
-        <p:nvSpPr>
-          <p:cNvPr id="12" name="Rectangle 11"/>
-          <p:cNvSpPr/>
-          <p:nvPr/>
-        </p:nvSpPr>
-        <p:spPr>
-          <a:xfrm>
-            <a:off x="6217920" y="2103120"/>
-            <a:ext cx="2423160" cy="3840480"/>
-          </a:xfrm>
-          <a:prstGeom prst="rect">
-            <a:avLst/>
-          </a:prstGeom>
-          <a:solidFill>
-            <a:srgbClr val="FFFFFF"/>
-          </a:solidFill>
-          <a:ln w="15875">
-            <a:solidFill>
-              <a:srgbClr val="D8D2C6"/>
-            </a:solidFill>
-          </a:ln>
-          <a:effectLst/>
-        </p:spPr>
-        <p:style>
-          <a:lnRef idx="1">
-            <a:schemeClr val="accent1"/>
-          </a:lnRef>
-          <a:fillRef idx="3">
-            <a:schemeClr val="accent1"/>
-          </a:fillRef>
-          <a:effectRef idx="2">
-            <a:schemeClr val="accent1"/>
-          </a:effectRef>
-          <a:fontRef idx="minor">
-            <a:schemeClr val="lt1"/>
-          </a:fontRef>
-        </p:style>
-        <p:txBody>
-          <a:bodyPr rtlCol="0" anchor="ctr"/>
-          <a:lstStyle/>
-          <a:p>
-            <a:pPr algn="ctr"/>
-          </a:p>
-        </p:txBody>
-      </p:sp>
-      <p:sp>
-        <p:nvSpPr>
-          <p:cNvPr id="13" name="TextBox 12"/>
-          <p:cNvSpPr txBox="1"/>
-          <p:nvPr/>
-        </p:nvSpPr>
-        <p:spPr>
-          <a:xfrm>
-            <a:off x="6446520" y="2286000"/>
-            <a:ext cx="1965960" cy="365760"/>
-          </a:xfrm>
-          <a:prstGeom prst="rect">
-            <a:avLst/>
-          </a:prstGeom>
-          <a:noFill/>
-        </p:spPr>
-        <p:txBody>
-          <a:bodyPr wrap="square" anchor="t" lIns="0" rIns="0" tIns="0" bIns="0">
-            <a:spAutoFit/>
-          </a:bodyPr>
-          <a:lstStyle/>
-          <a:p>
-            <a:pPr algn="l">
-              <a:spcAft>
-                <a:spcPts val="585"/>
-              </a:spcAft>
-            </a:pPr>
-            <a:r>
-              <a:rPr sz="1300" b="1" i="0">
-                <a:solidFill>
-                  <a:srgbClr val="0B2D5B"/>
-                </a:solidFill>
-                <a:latin typeface="Inter Tight"/>
-              </a:rPr>
-              <a:t>SAM</a:t>
-            </a:r>
-          </a:p>
-        </p:txBody>
-      </p:sp>
-      <p:sp>
-        <p:nvSpPr>
-          <p:cNvPr id="14" name="TextBox 13"/>
-          <p:cNvSpPr txBox="1"/>
-          <p:nvPr/>
-        </p:nvSpPr>
-        <p:spPr>
-          <a:xfrm>
-            <a:off x="6446520" y="2743200"/>
-            <a:ext cx="1965960" cy="3017520"/>
-          </a:xfrm>
-          <a:prstGeom prst="rect">
-            <a:avLst/>
-          </a:prstGeom>
-          <a:noFill/>
-        </p:spPr>
-        <p:txBody>
-          <a:bodyPr wrap="square" anchor="t" lIns="0" rIns="0" tIns="0" bIns="0">
-            <a:spAutoFit/>
-          </a:bodyPr>
-          <a:lstStyle/>
-          <a:p>
-            <a:pPr algn="l">
-              <a:spcAft>
-                <a:spcPts val="810"/>
-              </a:spcAft>
-            </a:pPr>
-            <a:r>
-              <a:rPr sz="1800" b="0" i="0">
-                <a:solidFill>
-                  <a:srgbClr val="1C1B19"/>
-                </a:solidFill>
-                <a:latin typeface="Source Serif 4"/>
-              </a:rPr>
-              <a:t>Nervous all week about a big test. Once it's over, Sam sleeps nine hours.</a:t>
-            </a:r>
-          </a:p>
-        </p:txBody>
-      </p:sp>
-      <p:sp>
-        <p:nvSpPr>
-          <p:cNvPr id="15" name="Rectangle 14"/>
-          <p:cNvSpPr/>
-          <p:nvPr/>
-        </p:nvSpPr>
-        <p:spPr>
-          <a:xfrm>
-            <a:off x="8915400" y="2103120"/>
-            <a:ext cx="2423160" cy="3840480"/>
-          </a:xfrm>
-          <a:prstGeom prst="rect">
-            <a:avLst/>
-          </a:prstGeom>
-          <a:solidFill>
-            <a:srgbClr val="FFFFFF"/>
-          </a:solidFill>
-          <a:ln w="15875">
-            <a:solidFill>
-              <a:srgbClr val="D8D2C6"/>
-            </a:solidFill>
-          </a:ln>
-          <a:effectLst/>
-        </p:spPr>
-        <p:style>
-          <a:lnRef idx="1">
-            <a:schemeClr val="accent1"/>
-          </a:lnRef>
-          <a:fillRef idx="3">
-            <a:schemeClr val="accent1"/>
-          </a:fillRef>
-          <a:effectRef idx="2">
-            <a:schemeClr val="accent1"/>
-          </a:effectRef>
-          <a:fontRef idx="minor">
-            <a:schemeClr val="lt1"/>
-          </a:fontRef>
-        </p:style>
-        <p:txBody>
-          <a:bodyPr rtlCol="0" anchor="ctr"/>
-          <a:lstStyle/>
-          <a:p>
-            <a:pPr algn="ctr"/>
-          </a:p>
-        </p:txBody>
-      </p:sp>
-      <p:sp>
-        <p:nvSpPr>
-          <p:cNvPr id="16" name="TextBox 15"/>
-          <p:cNvSpPr txBox="1"/>
-          <p:nvPr/>
-        </p:nvSpPr>
-        <p:spPr>
-          <a:xfrm>
-            <a:off x="9144000" y="2286000"/>
-            <a:ext cx="1965960" cy="365760"/>
-          </a:xfrm>
-          <a:prstGeom prst="rect">
-            <a:avLst/>
-          </a:prstGeom>
-          <a:noFill/>
-        </p:spPr>
-        <p:txBody>
-          <a:bodyPr wrap="square" anchor="t" lIns="0" rIns="0" tIns="0" bIns="0">
-            <a:spAutoFit/>
-          </a:bodyPr>
-          <a:lstStyle/>
-          <a:p>
-            <a:pPr algn="l">
-              <a:spcAft>
-                <a:spcPts val="585"/>
-              </a:spcAft>
-            </a:pPr>
-            <a:r>
-              <a:rPr sz="1300" b="1" i="0">
-                <a:solidFill>
-                  <a:srgbClr val="0B2D5B"/>
-                </a:solidFill>
-                <a:latin typeface="Inter Tight"/>
-              </a:rPr>
-              <a:t>LENA</a:t>
-            </a:r>
-          </a:p>
-        </p:txBody>
-      </p:sp>
-      <p:sp>
-        <p:nvSpPr>
-          <p:cNvPr id="17" name="TextBox 16"/>
-          <p:cNvSpPr txBox="1"/>
-          <p:nvPr/>
-        </p:nvSpPr>
-        <p:spPr>
-          <a:xfrm>
-            <a:off x="9144000" y="2743200"/>
-            <a:ext cx="1965960" cy="3017520"/>
-          </a:xfrm>
-          <a:prstGeom prst="rect">
-            <a:avLst/>
-          </a:prstGeom>
-          <a:noFill/>
-        </p:spPr>
-        <p:txBody>
-          <a:bodyPr wrap="square" anchor="t" lIns="0" rIns="0" tIns="0" bIns="0">
-            <a:spAutoFit/>
-          </a:bodyPr>
-          <a:lstStyle/>
-          <a:p>
-            <a:pPr algn="l">
-              <a:spcAft>
-                <a:spcPts val="810"/>
-              </a:spcAft>
-            </a:pPr>
-            <a:r>
-              <a:rPr sz="1800" b="0" i="0">
-                <a:solidFill>
-                  <a:srgbClr val="1C1B19"/>
-                </a:solidFill>
-                <a:latin typeface="Source Serif 4"/>
-              </a:rPr>
-              <a:t>Gets comments about her accent most days. Her stomach hurts every morning before school.</a:t>
+              <a:t>What changed? Heart, breathing, hands, face?</a:t>
             </a:r>
           </a:p>
         </p:txBody>
@@ -5215,7 +6347,7 @@
 </p:sld>
 </file>
 
-<file path=ppt/slides/slide11.xml><?xml version="1.0" encoding="utf-8"?>
+<file path=ppt/slides/slide4.xml><?xml version="1.0" encoding="utf-8"?>
 <p:sld xmlns:a="http://schemas.openxmlformats.org/drawingml/2006/main" xmlns:p="http://schemas.openxmlformats.org/presentationml/2006/main" xmlns:r="http://schemas.openxmlformats.org/officeDocument/2006/relationships">
   <p:cSld>
     <p:bg>
@@ -5311,7 +6443,7 @@
                 </a:solidFill>
                 <a:latin typeface="Inter Tight"/>
               </a:rPr>
-              <a:t>BEFORE YOU GO</a:t>
+              <a:t>READ THE SIGNAL</a:t>
             </a:r>
           </a:p>
         </p:txBody>
@@ -5363,7 +6495,7 @@
         </p:nvSpPr>
         <p:spPr>
           <a:xfrm>
-            <a:off x="822960" y="1188720"/>
+            <a:off x="822960" y="1005840"/>
             <a:ext cx="10515600" cy="914400"/>
           </a:xfrm>
           <a:prstGeom prst="rect">
@@ -5379,70 +6511,31 @@
           <a:p>
             <a:pPr algn="l">
               <a:spcAft>
-                <a:spcPts val="1620"/>
-              </a:spcAft>
-            </a:pPr>
-            <a:r>
-              <a:rPr sz="3600" b="1" i="0">
+                <a:spcPts val="1530"/>
+              </a:spcAft>
+            </a:pPr>
+            <a:r>
+              <a:rPr sz="3400" b="1" i="0">
                 <a:solidFill>
                   <a:srgbClr val="1C1B19"/>
                 </a:solidFill>
                 <a:latin typeface="Source Serif 4"/>
               </a:rPr>
-              <a:t>Signal, or stuck on?</a:t>
-            </a:r>
-          </a:p>
-        </p:txBody>
-      </p:sp>
-      <p:sp>
-        <p:nvSpPr>
-          <p:cNvPr id="6" name="TextBox 5"/>
-          <p:cNvSpPr txBox="1"/>
-          <p:nvPr/>
-        </p:nvSpPr>
-        <p:spPr>
-          <a:xfrm>
-            <a:off x="822960" y="2286000"/>
-            <a:ext cx="10515600" cy="1463040"/>
-          </a:xfrm>
-          <a:prstGeom prst="rect">
-            <a:avLst/>
-          </a:prstGeom>
-          <a:noFill/>
-        </p:spPr>
-        <p:txBody>
-          <a:bodyPr wrap="square" anchor="t" lIns="0" rIns="0" tIns="0" bIns="0">
-            <a:spAutoFit/>
-          </a:bodyPr>
-          <a:lstStyle/>
-          <a:p>
-            <a:pPr algn="l">
-              <a:spcAft>
-                <a:spcPts val="1080"/>
-              </a:spcAft>
-            </a:pPr>
-            <a:r>
-              <a:rPr sz="2400" b="0" i="0">
-                <a:solidFill>
-                  <a:srgbClr val="1C1B19"/>
-                </a:solidFill>
-                <a:latin typeface="Source Serif 4"/>
-              </a:rPr>
-              <a:t>Pick one thing from the student page to try. Keep it to yourself.</a:t>
-            </a:r>
-          </a:p>
-        </p:txBody>
-      </p:sp>
-      <p:sp>
-        <p:nvSpPr>
-          <p:cNvPr id="7" name="Rectangle 6"/>
+              <a:t>What each change is for</a:t>
+            </a:r>
+          </a:p>
+        </p:txBody>
+      </p:sp>
+      <p:sp>
+        <p:nvSpPr>
+          <p:cNvPr id="6" name="Rectangle 5"/>
           <p:cNvSpPr/>
           <p:nvPr/>
         </p:nvSpPr>
         <p:spPr>
           <a:xfrm>
-            <a:off x="822960" y="4023360"/>
-            <a:ext cx="10515600" cy="1371600"/>
+            <a:off x="822960" y="2103120"/>
+            <a:ext cx="5120640" cy="3931920"/>
           </a:xfrm>
           <a:prstGeom prst="rect">
             <a:avLst/>
@@ -5452,7 +6545,7 @@
           </a:solidFill>
           <a:ln w="15875">
             <a:solidFill>
-              <a:srgbClr val="1C1B19"/>
+              <a:srgbClr val="D8D2C6"/>
             </a:solidFill>
           </a:ln>
           <a:effectLst/>
@@ -5481,14 +6574,53 @@
       </p:sp>
       <p:sp>
         <p:nvSpPr>
+          <p:cNvPr id="7" name="TextBox 6"/>
+          <p:cNvSpPr txBox="1"/>
+          <p:nvPr/>
+        </p:nvSpPr>
+        <p:spPr>
+          <a:xfrm>
+            <a:off x="1097280" y="2286000"/>
+            <a:ext cx="4572000" cy="457200"/>
+          </a:xfrm>
+          <a:prstGeom prst="rect">
+            <a:avLst/>
+          </a:prstGeom>
+          <a:noFill/>
+        </p:spPr>
+        <p:txBody>
+          <a:bodyPr wrap="square" anchor="t" lIns="0" rIns="0" tIns="0" bIns="0">
+            <a:spAutoFit/>
+          </a:bodyPr>
+          <a:lstStyle/>
+          <a:p>
+            <a:pPr algn="l">
+              <a:spcAft>
+                <a:spcPts val="585"/>
+              </a:spcAft>
+            </a:pPr>
+            <a:r>
+              <a:rPr sz="1300" b="1" i="0">
+                <a:solidFill>
+                  <a:srgbClr val="0B2D5B"/>
+                </a:solidFill>
+                <a:latin typeface="Inter Tight"/>
+              </a:rPr>
+              <a:t>YOU FEEL</a:t>
+            </a:r>
+          </a:p>
+        </p:txBody>
+      </p:sp>
+      <p:sp>
+        <p:nvSpPr>
           <p:cNvPr id="8" name="TextBox 7"/>
           <p:cNvSpPr txBox="1"/>
           <p:nvPr/>
         </p:nvSpPr>
         <p:spPr>
           <a:xfrm>
-            <a:off x="1097280" y="4206240"/>
-            <a:ext cx="10058400" cy="365760"/>
+            <a:off x="1097280" y="2788920"/>
+            <a:ext cx="4572000" cy="3108960"/>
           </a:xfrm>
           <a:prstGeom prst="rect">
             <a:avLst/>
@@ -5503,105 +6635,106 @@
           <a:p>
             <a:pPr algn="l">
               <a:spcAft>
-                <a:spcPts val="540"/>
-              </a:spcAft>
-            </a:pPr>
-            <a:r>
-              <a:rPr sz="1200" b="1" i="0">
-                <a:solidFill>
-                  <a:srgbClr val="0B2D5B"/>
-                </a:solidFill>
-                <a:latin typeface="Inter Tight"/>
-              </a:rPr>
-              <a:t>STUDENT PAGE</a:t>
-            </a:r>
-          </a:p>
-        </p:txBody>
-      </p:sp>
-      <p:sp>
-        <p:nvSpPr>
-          <p:cNvPr id="9" name="TextBox 8"/>
-          <p:cNvSpPr txBox="1"/>
-          <p:nvPr/>
-        </p:nvSpPr>
-        <p:spPr>
-          <a:xfrm>
-            <a:off x="1097280" y="4617720"/>
-            <a:ext cx="10058400" cy="640080"/>
-          </a:xfrm>
-          <a:prstGeom prst="rect">
-            <a:avLst/>
-          </a:prstGeom>
-          <a:noFill/>
-        </p:spPr>
-        <p:txBody>
-          <a:bodyPr wrap="square" anchor="t" lIns="0" rIns="0" tIns="0" bIns="0">
-            <a:spAutoFit/>
-          </a:bodyPr>
-          <a:lstStyle/>
-          <a:p>
-            <a:pPr algn="l">
-              <a:spcAft>
-                <a:spcPts val="900"/>
-              </a:spcAft>
-            </a:pPr>
-            <a:r>
-              <a:rPr sz="2000" b="0" i="0">
+                <a:spcPts val="855"/>
+              </a:spcAft>
+            </a:pPr>
+            <a:r>
+              <a:rPr sz="1900" b="0" i="0">
                 <a:solidFill>
                   <a:srgbClr val="1C1B19"/>
                 </a:solidFill>
-                <a:latin typeface="Inter Tight"/>
-              </a:rPr>
-              <a:t>https://rmwtoolkit.github.io/bcds-toolkit/stress-is-a-signal-high-school.html</a:t>
-            </a:r>
-          </a:p>
-        </p:txBody>
-      </p:sp>
-    </p:spTree>
-  </p:cSld>
-  <p:clrMapOvr>
-    <a:masterClrMapping/>
-  </p:clrMapOvr>
-</p:sld>
-</file>
-
-<file path=ppt/slides/slide2.xml><?xml version="1.0" encoding="utf-8"?>
-<p:sld xmlns:a="http://schemas.openxmlformats.org/drawingml/2006/main" xmlns:p="http://schemas.openxmlformats.org/presentationml/2006/main" xmlns:r="http://schemas.openxmlformats.org/officeDocument/2006/relationships" show="0">
-  <p:cSld>
-    <p:bg>
-      <p:bgPr>
-        <a:solidFill>
-          <a:srgbClr val="EEEBE4"/>
-        </a:solidFill>
-        <a:effectLst/>
-      </p:bgPr>
-    </p:bg>
-    <p:spTree>
-      <p:nvGrpSpPr>
-        <p:cNvPr id="1" name=""/>
-        <p:cNvGrpSpPr/>
-        <p:nvPr/>
-      </p:nvGrpSpPr>
-      <p:grpSpPr/>
-      <p:sp>
-        <p:nvSpPr>
-          <p:cNvPr id="2" name="Rectangle 1"/>
+                <a:latin typeface="Source Serif 4"/>
+              </a:rPr>
+              <a:t>Racing heart</a:t>
+            </a:r>
+          </a:p>
+          <a:p>
+            <a:pPr algn="l">
+              <a:spcAft>
+                <a:spcPts val="855"/>
+              </a:spcAft>
+            </a:pPr>
+            <a:r>
+              <a:rPr sz="1900" b="0" i="0">
+                <a:solidFill>
+                  <a:srgbClr val="1C1B19"/>
+                </a:solidFill>
+                <a:latin typeface="Source Serif 4"/>
+              </a:rPr>
+              <a:t>Fast breathing</a:t>
+            </a:r>
+          </a:p>
+          <a:p>
+            <a:pPr algn="l">
+              <a:spcAft>
+                <a:spcPts val="855"/>
+              </a:spcAft>
+            </a:pPr>
+            <a:r>
+              <a:rPr sz="1900" b="0" i="0">
+                <a:solidFill>
+                  <a:srgbClr val="1C1B19"/>
+                </a:solidFill>
+                <a:latin typeface="Source Serif 4"/>
+              </a:rPr>
+              <a:t>Butterflies</a:t>
+            </a:r>
+          </a:p>
+          <a:p>
+            <a:pPr algn="l">
+              <a:spcAft>
+                <a:spcPts val="855"/>
+              </a:spcAft>
+            </a:pPr>
+            <a:r>
+              <a:rPr sz="1900" b="0" i="0">
+                <a:solidFill>
+                  <a:srgbClr val="1C1B19"/>
+                </a:solidFill>
+                <a:latin typeface="Source Serif 4"/>
+              </a:rPr>
+              <a:t>Sweaty hands</a:t>
+            </a:r>
+          </a:p>
+          <a:p>
+            <a:pPr algn="l">
+              <a:spcAft>
+                <a:spcPts val="855"/>
+              </a:spcAft>
+            </a:pPr>
+            <a:r>
+              <a:rPr sz="1900" b="0" i="0">
+                <a:solidFill>
+                  <a:srgbClr val="1C1B19"/>
+                </a:solidFill>
+                <a:latin typeface="Source Serif 4"/>
+              </a:rPr>
+              <a:t>Laser focus</a:t>
+            </a:r>
+          </a:p>
+        </p:txBody>
+      </p:sp>
+      <p:sp>
+        <p:nvSpPr>
+          <p:cNvPr id="9" name="Rectangle 8"/>
           <p:cNvSpPr/>
           <p:nvPr/>
         </p:nvSpPr>
         <p:spPr>
           <a:xfrm>
-            <a:off x="0" y="0"/>
-            <a:ext cx="12191695" cy="384048"/>
+            <a:off x="6309360" y="2103120"/>
+            <a:ext cx="5120640" cy="3931920"/>
           </a:xfrm>
           <a:prstGeom prst="rect">
             <a:avLst/>
           </a:prstGeom>
           <a:solidFill>
-            <a:srgbClr val="0B2D5B"/>
+            <a:srgbClr val="FFFFFF"/>
           </a:solidFill>
-          <a:ln>
-            <a:noFill/>
+          <a:ln w="15875">
+            <a:solidFill>
+              <a:srgbClr val="D8D2C6"/>
+            </a:solidFill>
           </a:ln>
           <a:effectLst/>
         </p:spPr>
@@ -5629,14 +6762,14 @@
       </p:sp>
       <p:sp>
         <p:nvSpPr>
-          <p:cNvPr id="3" name="TextBox 2"/>
+          <p:cNvPr id="10" name="TextBox 9"/>
           <p:cNvSpPr txBox="1"/>
           <p:nvPr/>
         </p:nvSpPr>
         <p:spPr>
           <a:xfrm>
-            <a:off x="548640" y="100584"/>
-            <a:ext cx="10972800" cy="274320"/>
+            <a:off x="6583680" y="2286000"/>
+            <a:ext cx="4572000" cy="457200"/>
           </a:xfrm>
           <a:prstGeom prst="rect">
             <a:avLst/>
@@ -5651,31 +6784,31 @@
           <a:p>
             <a:pPr algn="l">
               <a:spcAft>
-                <a:spcPts val="495"/>
-              </a:spcAft>
-            </a:pPr>
-            <a:r>
-              <a:rPr sz="1100" b="1" i="0">
-                <a:solidFill>
-                  <a:srgbClr val="FFFFFF"/>
+                <a:spcPts val="585"/>
+              </a:spcAft>
+            </a:pPr>
+            <a:r>
+              <a:rPr sz="1300" b="1" i="0">
+                <a:solidFill>
+                  <a:srgbClr val="0B2D5B"/>
                 </a:solidFill>
                 <a:latin typeface="Inter Tight"/>
               </a:rPr>
-              <a:t>TEACHER PAGE  ·  skipped when you present  ·  Before you teach</a:t>
-            </a:r>
-          </a:p>
-        </p:txBody>
-      </p:sp>
-      <p:sp>
-        <p:nvSpPr>
-          <p:cNvPr id="4" name="TextBox 3"/>
+              <a:t>YOUR BODY IS</a:t>
+            </a:r>
+          </a:p>
+        </p:txBody>
+      </p:sp>
+      <p:sp>
+        <p:nvSpPr>
+          <p:cNvPr id="11" name="TextBox 10"/>
           <p:cNvSpPr txBox="1"/>
           <p:nvPr/>
         </p:nvSpPr>
         <p:spPr>
           <a:xfrm>
-            <a:off x="548640" y="685800"/>
-            <a:ext cx="10972800" cy="640080"/>
+            <a:off x="6583680" y="2788920"/>
+            <a:ext cx="4572000" cy="3108960"/>
           </a:xfrm>
           <a:prstGeom prst="rect">
             <a:avLst/>
@@ -5690,351 +6823,81 @@
           <a:p>
             <a:pPr algn="l">
               <a:spcAft>
-                <a:spcPts val="1350"/>
-              </a:spcAft>
-            </a:pPr>
-            <a:r>
-              <a:rPr sz="3000" b="1" i="0">
+                <a:spcPts val="855"/>
+              </a:spcAft>
+            </a:pPr>
+            <a:r>
+              <a:rPr sz="1900" b="0" i="0">
                 <a:solidFill>
                   <a:srgbClr val="1C1B19"/>
                 </a:solidFill>
                 <a:latin typeface="Source Serif 4"/>
               </a:rPr>
-              <a:t>Before you teach</a:t>
-            </a:r>
-          </a:p>
-        </p:txBody>
-      </p:sp>
-      <p:sp>
-        <p:nvSpPr>
-          <p:cNvPr id="5" name="TextBox 4"/>
-          <p:cNvSpPr txBox="1"/>
-          <p:nvPr/>
-        </p:nvSpPr>
-        <p:spPr>
-          <a:xfrm>
-            <a:off x="548640" y="1463040"/>
-            <a:ext cx="5394960" cy="4937760"/>
-          </a:xfrm>
-          <a:prstGeom prst="rect">
-            <a:avLst/>
-          </a:prstGeom>
-          <a:noFill/>
-        </p:spPr>
-        <p:txBody>
-          <a:bodyPr wrap="square" anchor="t" lIns="0" rIns="0" tIns="0" bIns="0">
-            <a:spAutoFit/>
-          </a:bodyPr>
-          <a:lstStyle/>
-          <a:p>
-            <a:pPr algn="l">
-              <a:spcAft>
-                <a:spcPts val="585"/>
-              </a:spcAft>
-            </a:pPr>
-            <a:r>
-              <a:rPr sz="1500" b="1" i="0">
+              <a:t>Sending blood to muscles and brain</a:t>
+            </a:r>
+          </a:p>
+          <a:p>
+            <a:pPr algn="l">
+              <a:spcAft>
+                <a:spcPts val="855"/>
+              </a:spcAft>
+            </a:pPr>
+            <a:r>
+              <a:rPr sz="1900" b="0" i="0">
                 <a:solidFill>
                   <a:srgbClr val="1C1B19"/>
                 </a:solidFill>
                 <a:latin typeface="Source Serif 4"/>
               </a:rPr>
-              <a:t>Lead with the good news, and keep it honest.</a:t>
-            </a:r>
-          </a:p>
-          <a:p>
-            <a:pPr algn="l">
-              <a:spcAft>
-                <a:spcPts val="585"/>
-              </a:spcAft>
-            </a:pPr>
-            <a:r>
-              <a:rPr sz="1300" b="0" i="0">
+              <a:t>Taking in more oxygen</a:t>
+            </a:r>
+          </a:p>
+          <a:p>
+            <a:pPr algn="l">
+              <a:spcAft>
+                <a:spcPts val="855"/>
+              </a:spcAft>
+            </a:pPr>
+            <a:r>
+              <a:rPr sz="1900" b="0" i="0">
                 <a:solidFill>
                   <a:srgbClr val="1C1B19"/>
                 </a:solidFill>
                 <a:latin typeface="Source Serif 4"/>
               </a:rPr>
-              <a:t>Stress is necessary and the research backs that up: short bursts help focus and performance, and reading a racing heart as "getting ready" helps a little. Don't promise that a mindset makes stress harmless. The claim that stress only hurts people who believe it does goes beyond the evidence.</a:t>
-            </a:r>
-          </a:p>
-          <a:p>
-            <a:pPr algn="l">
-              <a:spcAft>
-                <a:spcPts val="585"/>
-              </a:spcAft>
-            </a:pPr>
-            <a:r>
-              <a:rPr sz="1300" b="0" i="0">
+              <a:t>Moving blood away from your stomach</a:t>
+            </a:r>
+          </a:p>
+          <a:p>
+            <a:pPr algn="l">
+              <a:spcAft>
+                <a:spcPts val="855"/>
+              </a:spcAft>
+            </a:pPr>
+            <a:r>
+              <a:rPr sz="1900" b="0" i="0">
                 <a:solidFill>
                   <a:srgbClr val="1C1B19"/>
                 </a:solidFill>
                 <a:latin typeface="Source Serif 4"/>
               </a:rPr>
-              <a:t/>
-            </a:r>
-          </a:p>
-          <a:p>
-            <a:pPr algn="l">
-              <a:spcAft>
-                <a:spcPts val="585"/>
-              </a:spcAft>
-            </a:pPr>
-            <a:r>
-              <a:rPr sz="1500" b="1" i="0">
+              <a:t>Turning the cooling system on early</a:t>
+            </a:r>
+          </a:p>
+          <a:p>
+            <a:pPr algn="l">
+              <a:spcAft>
+                <a:spcPts val="855"/>
+              </a:spcAft>
+            </a:pPr>
+            <a:r>
+              <a:rPr sz="1900" b="0" i="0">
                 <a:solidFill>
                   <a:srgbClr val="1C1B19"/>
                 </a:solidFill>
                 <a:latin typeface="Source Serif 4"/>
               </a:rPr>
-              <a:t>Some stress isn't a challenge.</a:t>
-            </a:r>
-          </a:p>
-          <a:p>
-            <a:pPr algn="l">
-              <a:spcAft>
-                <a:spcPts val="585"/>
-              </a:spcAft>
-            </a:pPr>
-            <a:r>
-              <a:rPr sz="1300" b="0" i="0">
-                <a:solidFill>
-                  <a:srgbClr val="1C1B19"/>
-                </a:solidFill>
-                <a:latin typeface="Source Serif 4"/>
-              </a:rPr>
-              <a:t>For a student dealing with money worries, a parent's illness, conflict at home, or racism, "stress is good for you" can land as "your problem is how you think about it." Say plainly that stress which stays on is a different thing, that it often comes from things students can't control, and that it's a reason to bring in adults, not to think harder.</a:t>
-            </a:r>
-          </a:p>
-          <a:p>
-            <a:pPr algn="l">
-              <a:spcAft>
-                <a:spcPts val="585"/>
-              </a:spcAft>
-            </a:pPr>
-            <a:r>
-              <a:rPr sz="1300" b="0" i="0">
-                <a:solidFill>
-                  <a:srgbClr val="1C1B19"/>
-                </a:solidFill>
-                <a:latin typeface="Source Serif 4"/>
-              </a:rPr>
-              <a:t/>
-            </a:r>
-          </a:p>
-          <a:p>
-            <a:pPr algn="l">
-              <a:spcAft>
-                <a:spcPts val="585"/>
-              </a:spcAft>
-            </a:pPr>
-            <a:r>
-              <a:rPr sz="1500" b="1" i="0">
-                <a:solidFill>
-                  <a:srgbClr val="1C1B19"/>
-                </a:solidFill>
-                <a:latin typeface="Source Serif 4"/>
-              </a:rPr>
-              <a:t>Keep the cards invented.</a:t>
-            </a:r>
-          </a:p>
-          <a:p>
-            <a:pPr algn="l">
-              <a:spcAft>
-                <a:spcPts val="585"/>
-              </a:spcAft>
-            </a:pPr>
-            <a:r>
-              <a:rPr sz="1300" b="0" i="0">
-                <a:solidFill>
-                  <a:srgbClr val="1C1B19"/>
-                </a:solidFill>
-                <a:latin typeface="Source Serif 4"/>
-              </a:rPr>
-              <a:t>Use the scenario cards, not students' own stories. If a student starts describing something heavy, thank them, keep it brief in the group, and follow up privately.</a:t>
-            </a:r>
-          </a:p>
-          <a:p>
-            <a:pPr algn="l">
-              <a:spcAft>
-                <a:spcPts val="585"/>
-              </a:spcAft>
-            </a:pPr>
-            <a:r>
-              <a:rPr sz="1300" b="0" i="0">
-                <a:solidFill>
-                  <a:srgbClr val="1C1B19"/>
-                </a:solidFill>
-                <a:latin typeface="Source Serif 4"/>
-              </a:rPr>
-              <a:t/>
-            </a:r>
-          </a:p>
-        </p:txBody>
-      </p:sp>
-      <p:sp>
-        <p:nvSpPr>
-          <p:cNvPr id="6" name="TextBox 5"/>
-          <p:cNvSpPr txBox="1"/>
-          <p:nvPr/>
-        </p:nvSpPr>
-        <p:spPr>
-          <a:xfrm>
-            <a:off x="6217920" y="1463040"/>
-            <a:ext cx="5394960" cy="4937760"/>
-          </a:xfrm>
-          <a:prstGeom prst="rect">
-            <a:avLst/>
-          </a:prstGeom>
-          <a:noFill/>
-        </p:spPr>
-        <p:txBody>
-          <a:bodyPr wrap="square" anchor="t" lIns="0" rIns="0" tIns="0" bIns="0">
-            <a:spAutoFit/>
-          </a:bodyPr>
-          <a:lstStyle/>
-          <a:p>
-            <a:pPr algn="l">
-              <a:spcAft>
-                <a:spcPts val="585"/>
-              </a:spcAft>
-            </a:pPr>
-            <a:r>
-              <a:rPr sz="1500" b="1" i="0">
-                <a:solidFill>
-                  <a:srgbClr val="1C1B19"/>
-                </a:solidFill>
-                <a:latin typeface="Source Serif 4"/>
-              </a:rPr>
-              <a:t>Watch for stuck on.</a:t>
-            </a:r>
-          </a:p>
-          <a:p>
-            <a:pPr algn="l">
-              <a:spcAft>
-                <a:spcPts val="585"/>
-              </a:spcAft>
-            </a:pPr>
-            <a:r>
-              <a:rPr sz="1300" b="0" i="0">
-                <a:solidFill>
-                  <a:srgbClr val="1C1B19"/>
-                </a:solidFill>
-                <a:latin typeface="Source Serif 4"/>
-              </a:rPr>
-              <a:t>Weeks of poor sleep, frequent headaches or stomachaches, pulling away, or using substances to come down are worth a quiet check-in after advisory and a same-day note to a counselor if it sounds serious. Disclosures go to a counselor. No screening questions in the group.</a:t>
-            </a:r>
-          </a:p>
-          <a:p>
-            <a:pPr algn="l">
-              <a:spcAft>
-                <a:spcPts val="585"/>
-              </a:spcAft>
-            </a:pPr>
-            <a:r>
-              <a:rPr sz="1300" b="0" i="0">
-                <a:solidFill>
-                  <a:srgbClr val="1C1B19"/>
-                </a:solidFill>
-                <a:latin typeface="Source Serif 4"/>
-              </a:rPr>
-              <a:t/>
-            </a:r>
-          </a:p>
-          <a:p>
-            <a:pPr algn="l">
-              <a:spcAft>
-                <a:spcPts val="585"/>
-              </a:spcAft>
-            </a:pPr>
-            <a:r>
-              <a:rPr sz="1500" b="1" i="0">
-                <a:solidFill>
-                  <a:srgbClr val="1C1B19"/>
-                </a:solidFill>
-                <a:latin typeface="Source Serif 4"/>
-              </a:rPr>
-              <a:t>Panic and anxiety disorders are their own thing.</a:t>
-            </a:r>
-          </a:p>
-          <a:p>
-            <a:pPr algn="l">
-              <a:spcAft>
-                <a:spcPts val="585"/>
-              </a:spcAft>
-            </a:pPr>
-            <a:r>
-              <a:rPr sz="1300" b="0" i="0">
-                <a:solidFill>
-                  <a:srgbClr val="1C1B19"/>
-                </a:solidFill>
-                <a:latin typeface="Source Serif 4"/>
-              </a:rPr>
-              <a:t>Some students have panic attacks or an anxiety disorder, and "it's just a signal" won't be enough for them. Point them to The False Alarm and to a counselor.</a:t>
-            </a:r>
-          </a:p>
-          <a:p>
-            <a:pPr algn="l">
-              <a:spcAft>
-                <a:spcPts val="585"/>
-              </a:spcAft>
-            </a:pPr>
-            <a:r>
-              <a:rPr sz="1300" b="0" i="0">
-                <a:solidFill>
-                  <a:srgbClr val="1C1B19"/>
-                </a:solidFill>
-                <a:latin typeface="Source Serif 4"/>
-              </a:rPr>
-              <a:t/>
-            </a:r>
-          </a:p>
-          <a:p>
-            <a:pPr algn="l">
-              <a:spcAft>
-                <a:spcPts val="585"/>
-              </a:spcAft>
-            </a:pPr>
-            <a:r>
-              <a:rPr sz="1500" b="1" i="0">
-                <a:solidFill>
-                  <a:srgbClr val="1C1B19"/>
-                </a:solidFill>
-                <a:latin typeface="Source Serif 4"/>
-              </a:rPr>
-              <a:t>Model it.</a:t>
-            </a:r>
-          </a:p>
-          <a:p>
-            <a:pPr algn="l">
-              <a:spcAft>
-                <a:spcPts val="585"/>
-              </a:spcAft>
-            </a:pPr>
-            <a:r>
-              <a:rPr sz="1300" b="0" i="0">
-                <a:solidFill>
-                  <a:srgbClr val="1C1B19"/>
-                </a:solidFill>
-                <a:latin typeface="Source Serif 4"/>
-              </a:rPr>
-              <a:t>Name a time your own heart pounded before something that mattered, and what you told yourself. It gives students permission to notice their own.</a:t>
-            </a:r>
-          </a:p>
-          <a:p>
-            <a:pPr algn="l">
-              <a:spcAft>
-                <a:spcPts val="585"/>
-              </a:spcAft>
-            </a:pPr>
-            <a:r>
-              <a:rPr sz="1300" b="0" i="0">
-                <a:solidFill>
-                  <a:srgbClr val="1C1B19"/>
-                </a:solidFill>
-                <a:latin typeface="Source Serif 4"/>
-              </a:rPr>
-              <a:t/>
+              <a:t>Zooming in on what matters</a:t>
             </a:r>
           </a:p>
         </p:txBody>
@@ -6047,13 +6910,13 @@
 </p:sld>
 </file>
 
-<file path=ppt/slides/slide3.xml><?xml version="1.0" encoding="utf-8"?>
-<p:sld xmlns:a="http://schemas.openxmlformats.org/drawingml/2006/main" xmlns:p="http://schemas.openxmlformats.org/presentationml/2006/main" xmlns:r="http://schemas.openxmlformats.org/officeDocument/2006/relationships" show="0">
+<file path=ppt/slides/slide5.xml><?xml version="1.0" encoding="utf-8"?>
+<p:sld xmlns:a="http://schemas.openxmlformats.org/drawingml/2006/main" xmlns:p="http://schemas.openxmlformats.org/presentationml/2006/main" xmlns:r="http://schemas.openxmlformats.org/officeDocument/2006/relationships">
   <p:cSld>
     <p:bg>
       <p:bgPr>
         <a:solidFill>
-          <a:srgbClr val="EEEBE4"/>
+          <a:srgbClr val="F7F4EE"/>
         </a:solidFill>
         <a:effectLst/>
       </p:bgPr>
@@ -6073,14 +6936,14 @@
         </p:nvSpPr>
         <p:spPr>
           <a:xfrm>
-            <a:off x="0" y="0"/>
-            <a:ext cx="12191695" cy="384048"/>
+            <a:off x="548640" y="502920"/>
+            <a:ext cx="457200" cy="54864"/>
           </a:xfrm>
           <a:prstGeom prst="rect">
             <a:avLst/>
           </a:prstGeom>
           <a:solidFill>
-            <a:srgbClr val="0B2D5B"/>
+            <a:srgbClr val="F47B20"/>
           </a:solidFill>
           <a:ln>
             <a:noFill/>
@@ -6117,8 +6980,8 @@
         </p:nvSpPr>
         <p:spPr>
           <a:xfrm>
-            <a:off x="548640" y="100584"/>
-            <a:ext cx="10972800" cy="274320"/>
+            <a:off x="1143000" y="393192"/>
+            <a:ext cx="8229600" cy="274320"/>
           </a:xfrm>
           <a:prstGeom prst="rect">
             <a:avLst/>
@@ -6133,17 +6996,17 @@
           <a:p>
             <a:pPr algn="l">
               <a:spcAft>
-                <a:spcPts val="495"/>
-              </a:spcAft>
-            </a:pPr>
-            <a:r>
-              <a:rPr sz="1100" b="1" i="0">
-                <a:solidFill>
-                  <a:srgbClr val="FFFFFF"/>
+                <a:spcPts val="540"/>
+              </a:spcAft>
+            </a:pPr>
+            <a:r>
+              <a:rPr sz="1200" b="1" i="0">
+                <a:solidFill>
+                  <a:srgbClr val="5D5A54"/>
                 </a:solidFill>
                 <a:latin typeface="Inter Tight"/>
               </a:rPr>
-              <a:t>TEACHER PAGE  ·  skipped when you present  ·  Every student in the room</a:t>
+              <a:t>BUILT TO SWITCH OFF</a:t>
             </a:r>
           </a:p>
         </p:txBody>
@@ -6156,8 +7019,8 @@
         </p:nvSpPr>
         <p:spPr>
           <a:xfrm>
-            <a:off x="548640" y="685800"/>
-            <a:ext cx="10972800" cy="640080"/>
+            <a:off x="8229600" y="6400800"/>
+            <a:ext cx="3410712" cy="274320"/>
           </a:xfrm>
           <a:prstGeom prst="rect">
             <a:avLst/>
@@ -6170,19 +7033,19 @@
           </a:bodyPr>
           <a:lstStyle/>
           <a:p>
-            <a:pPr algn="l">
-              <a:spcAft>
-                <a:spcPts val="1350"/>
-              </a:spcAft>
-            </a:pPr>
-            <a:r>
-              <a:rPr sz="3000" b="1" i="0">
-                <a:solidFill>
-                  <a:srgbClr val="1C1B19"/>
-                </a:solidFill>
-                <a:latin typeface="Source Serif 4"/>
-              </a:rPr>
-              <a:t>Every student in the room</a:t>
+            <a:pPr algn="r">
+              <a:spcAft>
+                <a:spcPts val="450"/>
+              </a:spcAft>
+            </a:pPr>
+            <a:r>
+              <a:rPr sz="1000" b="0" i="0">
+                <a:solidFill>
+                  <a:srgbClr val="5D5A54"/>
+                </a:solidFill>
+                <a:latin typeface="Inter Tight"/>
+              </a:rPr>
+              <a:t>Beaver Counseling</a:t>
             </a:r>
           </a:p>
         </p:txBody>
@@ -6195,8 +7058,8 @@
         </p:nvSpPr>
         <p:spPr>
           <a:xfrm>
-            <a:off x="548640" y="1325880"/>
-            <a:ext cx="10972800" cy="365760"/>
+            <a:off x="822960" y="1005840"/>
+            <a:ext cx="10515600" cy="914400"/>
           </a:xfrm>
           <a:prstGeom prst="rect">
             <a:avLst/>
@@ -6211,400 +7074,42 @@
           <a:p>
             <a:pPr algn="l">
               <a:spcAft>
-                <a:spcPts val="630"/>
-              </a:spcAft>
-            </a:pPr>
-            <a:r>
-              <a:rPr sz="1400" b="0" i="0">
-                <a:solidFill>
-                  <a:srgbClr val="5D5A54"/>
-                </a:solidFill>
-                <a:latin typeface="Inter Tight"/>
-              </a:rPr>
-              <a:t>Culture, family, identity, ability and money: what to keep in mind for this topic.</a:t>
-            </a:r>
-          </a:p>
-        </p:txBody>
-      </p:sp>
-      <p:sp>
-        <p:nvSpPr>
-          <p:cNvPr id="6" name="TextBox 5"/>
-          <p:cNvSpPr txBox="1"/>
-          <p:nvPr/>
-        </p:nvSpPr>
-        <p:spPr>
-          <a:xfrm>
-            <a:off x="548640" y="1828800"/>
-            <a:ext cx="5394960" cy="4572000"/>
-          </a:xfrm>
-          <a:prstGeom prst="rect">
-            <a:avLst/>
-          </a:prstGeom>
-          <a:noFill/>
-        </p:spPr>
-        <p:txBody>
-          <a:bodyPr wrap="square" anchor="t" lIns="0" rIns="0" tIns="0" bIns="0">
-            <a:spAutoFit/>
-          </a:bodyPr>
-          <a:lstStyle/>
-          <a:p>
-            <a:pPr algn="l">
-              <a:spcAft>
-                <a:spcPts val="585"/>
-              </a:spcAft>
-            </a:pPr>
-            <a:r>
-              <a:rPr sz="1500" b="1" i="0">
+                <a:spcPts val="1530"/>
+              </a:spcAft>
+            </a:pPr>
+            <a:r>
+              <a:rPr sz="3400" b="1" i="0">
                 <a:solidFill>
                   <a:srgbClr val="1C1B19"/>
                 </a:solidFill>
                 <a:latin typeface="Source Serif 4"/>
               </a:rPr>
-              <a:t>Stress isn't spread evenly.</a:t>
-            </a:r>
-          </a:p>
-          <a:p>
-            <a:pPr algn="l">
-              <a:spcAft>
-                <a:spcPts val="585"/>
-              </a:spcAft>
-            </a:pPr>
-            <a:r>
-              <a:rPr sz="1300" b="0" i="0">
-                <a:solidFill>
-                  <a:srgbClr val="1C1B19"/>
-                </a:solidFill>
-                <a:latin typeface="Source Serif 4"/>
-              </a:rPr>
-              <a:t>Students carrying racism, poverty, immigration worries, caregiving, or unsafe neighborhoods face more stress that stays on. Name chronic stress as something that happens to people, not a flaw in how they cope.</a:t>
-            </a:r>
-          </a:p>
-          <a:p>
-            <a:pPr algn="l">
-              <a:spcAft>
-                <a:spcPts val="585"/>
-              </a:spcAft>
-            </a:pPr>
-            <a:r>
-              <a:rPr sz="1300" b="0" i="0">
-                <a:solidFill>
-                  <a:srgbClr val="1C1B19"/>
-                </a:solidFill>
-                <a:latin typeface="Source Serif 4"/>
-              </a:rPr>
-              <a:t/>
-            </a:r>
-          </a:p>
-          <a:p>
-            <a:pPr algn="l">
-              <a:spcAft>
-                <a:spcPts val="585"/>
-              </a:spcAft>
-            </a:pPr>
-            <a:r>
-              <a:rPr sz="1500" b="1" i="0">
-                <a:solidFill>
-                  <a:srgbClr val="1C1B19"/>
-                </a:solidFill>
-                <a:latin typeface="Source Serif 4"/>
-              </a:rPr>
-              <a:t>Families name it differently.</a:t>
-            </a:r>
-          </a:p>
-          <a:p>
-            <a:pPr algn="l">
-              <a:spcAft>
-                <a:spcPts val="585"/>
-              </a:spcAft>
-            </a:pPr>
-            <a:r>
-              <a:rPr sz="1300" b="0" i="0">
-                <a:solidFill>
-                  <a:srgbClr val="1C1B19"/>
-                </a:solidFill>
-                <a:latin typeface="Source Serif 4"/>
-              </a:rPr>
-              <a:t>Some families say nerves, pressure, or nothing at all; in some homes stress shows up as stomachaches or headaches. Ask what students' families call it, and treat faith, music, food, family and community as real ways of coping.</a:t>
-            </a:r>
-          </a:p>
-          <a:p>
-            <a:pPr algn="l">
-              <a:spcAft>
-                <a:spcPts val="585"/>
-              </a:spcAft>
-            </a:pPr>
-            <a:r>
-              <a:rPr sz="1300" b="0" i="0">
-                <a:solidFill>
-                  <a:srgbClr val="1C1B19"/>
-                </a:solidFill>
-                <a:latin typeface="Source Serif 4"/>
-              </a:rPr>
-              <a:t/>
-            </a:r>
-          </a:p>
-          <a:p>
-            <a:pPr algn="l">
-              <a:spcAft>
-                <a:spcPts val="585"/>
-              </a:spcAft>
-            </a:pPr>
-            <a:r>
-              <a:rPr sz="1500" b="1" i="0">
-                <a:solidFill>
-                  <a:srgbClr val="1C1B19"/>
-                </a:solidFill>
-                <a:latin typeface="Source Serif 4"/>
-              </a:rPr>
-              <a:t>Movement for every body.</a:t>
-            </a:r>
-          </a:p>
-          <a:p>
-            <a:pPr algn="l">
-              <a:spcAft>
-                <a:spcPts val="585"/>
-              </a:spcAft>
-            </a:pPr>
-            <a:r>
-              <a:rPr sz="1300" b="0" i="0">
-                <a:solidFill>
-                  <a:srgbClr val="1C1B19"/>
-                </a:solidFill>
-                <a:latin typeface="Source Serif 4"/>
-              </a:rPr>
-              <a:t>The opening movement is optional. Offer clapping fast, tapping feet, a few deep fast breaths, or simply noticing your pulse. Students with heart conditions, injuries or disabilities can sit it out without explaining.</a:t>
-            </a:r>
-          </a:p>
-          <a:p>
-            <a:pPr algn="l">
-              <a:spcAft>
-                <a:spcPts val="585"/>
-              </a:spcAft>
-            </a:pPr>
-            <a:r>
-              <a:rPr sz="1300" b="0" i="0">
-                <a:solidFill>
-                  <a:srgbClr val="1C1B19"/>
-                </a:solidFill>
-                <a:latin typeface="Source Serif 4"/>
-              </a:rPr>
-              <a:t/>
-            </a:r>
-          </a:p>
-        </p:txBody>
-      </p:sp>
-      <p:sp>
-        <p:nvSpPr>
-          <p:cNvPr id="7" name="TextBox 6"/>
-          <p:cNvSpPr txBox="1"/>
-          <p:nvPr/>
-        </p:nvSpPr>
-        <p:spPr>
-          <a:xfrm>
-            <a:off x="6217920" y="1828800"/>
-            <a:ext cx="5394960" cy="4572000"/>
-          </a:xfrm>
-          <a:prstGeom prst="rect">
-            <a:avLst/>
-          </a:prstGeom>
-          <a:noFill/>
-        </p:spPr>
-        <p:txBody>
-          <a:bodyPr wrap="square" anchor="t" lIns="0" rIns="0" tIns="0" bIns="0">
-            <a:spAutoFit/>
-          </a:bodyPr>
-          <a:lstStyle/>
-          <a:p>
-            <a:pPr algn="l">
-              <a:spcAft>
-                <a:spcPts val="585"/>
-              </a:spcAft>
-            </a:pPr>
-            <a:r>
-              <a:rPr sz="1500" b="1" i="0">
-                <a:solidFill>
-                  <a:srgbClr val="1C1B19"/>
-                </a:solidFill>
-                <a:latin typeface="Source Serif 4"/>
-              </a:rPr>
-              <a:t>Bodies that react differently.</a:t>
-            </a:r>
-          </a:p>
-          <a:p>
-            <a:pPr algn="l">
-              <a:spcAft>
-                <a:spcPts val="585"/>
-              </a:spcAft>
-            </a:pPr>
-            <a:r>
-              <a:rPr sz="1300" b="0" i="0">
-                <a:solidFill>
-                  <a:srgbClr val="1C1B19"/>
-                </a:solidFill>
-                <a:latin typeface="Source Serif 4"/>
-              </a:rPr>
-              <a:t>Students with anxiety, trauma histories, or sensory sensitivities may find focusing on heartbeat uncomfortable. Make noticing optional and keep eyes-open.</a:t>
-            </a:r>
-          </a:p>
-          <a:p>
-            <a:pPr algn="l">
-              <a:spcAft>
-                <a:spcPts val="585"/>
-              </a:spcAft>
-            </a:pPr>
-            <a:r>
-              <a:rPr sz="1300" b="0" i="0">
-                <a:solidFill>
-                  <a:srgbClr val="1C1B19"/>
-                </a:solidFill>
-                <a:latin typeface="Source Serif 4"/>
-              </a:rPr>
-              <a:t/>
-            </a:r>
-          </a:p>
-          <a:p>
-            <a:pPr algn="l">
-              <a:spcAft>
-                <a:spcPts val="585"/>
-              </a:spcAft>
-            </a:pPr>
-            <a:r>
-              <a:rPr sz="1500" b="1" i="0">
-                <a:solidFill>
-                  <a:srgbClr val="1C1B19"/>
-                </a:solidFill>
-                <a:latin typeface="Source Serif 4"/>
-              </a:rPr>
-              <a:t>Neurodivergent students.</a:t>
-            </a:r>
-          </a:p>
-          <a:p>
-            <a:pPr algn="l">
-              <a:spcAft>
-                <a:spcPts val="585"/>
-              </a:spcAft>
-            </a:pPr>
-            <a:r>
-              <a:rPr sz="1300" b="0" i="0">
-                <a:solidFill>
-                  <a:srgbClr val="1C1B19"/>
-                </a:solidFill>
-                <a:latin typeface="Source Serif 4"/>
-              </a:rPr>
-              <a:t>Students with ADHD or autism may feel stress signals more or less strongly, or read them later. There's no right way to feel it. Concrete cards help.</a:t>
-            </a:r>
-          </a:p>
-          <a:p>
-            <a:pPr algn="l">
-              <a:spcAft>
-                <a:spcPts val="585"/>
-              </a:spcAft>
-            </a:pPr>
-            <a:r>
-              <a:rPr sz="1300" b="0" i="0">
-                <a:solidFill>
-                  <a:srgbClr val="1C1B19"/>
-                </a:solidFill>
-                <a:latin typeface="Source Serif 4"/>
-              </a:rPr>
-              <a:t/>
-            </a:r>
-          </a:p>
-          <a:p>
-            <a:pPr algn="l">
-              <a:spcAft>
-                <a:spcPts val="585"/>
-              </a:spcAft>
-            </a:pPr>
-            <a:r>
-              <a:rPr sz="1500" b="1" i="0">
-                <a:solidFill>
-                  <a:srgbClr val="1C1B19"/>
-                </a:solidFill>
-                <a:latin typeface="Source Serif 4"/>
-              </a:rPr>
-              <a:t>Language.</a:t>
-            </a:r>
-          </a:p>
-          <a:p>
-            <a:pPr algn="l">
-              <a:spcAft>
-                <a:spcPts val="585"/>
-              </a:spcAft>
-            </a:pPr>
-            <a:r>
-              <a:rPr sz="1300" b="0" i="0">
-                <a:solidFill>
-                  <a:srgbClr val="1C1B19"/>
-                </a:solidFill>
-                <a:latin typeface="Source Serif 4"/>
-              </a:rPr>
-              <a:t>English learners can answer with a word in any language, a gesture, or a number from 1 to 10.</a:t>
-            </a:r>
-          </a:p>
-          <a:p>
-            <a:pPr algn="l">
-              <a:spcAft>
-                <a:spcPts val="585"/>
-              </a:spcAft>
-            </a:pPr>
-            <a:r>
-              <a:rPr sz="1300" b="0" i="0">
-                <a:solidFill>
-                  <a:srgbClr val="1C1B19"/>
-                </a:solidFill>
-                <a:latin typeface="Source Serif 4"/>
-              </a:rPr>
-              <a:t/>
-            </a:r>
-          </a:p>
-        </p:txBody>
-      </p:sp>
-    </p:spTree>
-  </p:cSld>
-  <p:clrMapOvr>
-    <a:masterClrMapping/>
-  </p:clrMapOvr>
-</p:sld>
-</file>
-
-<file path=ppt/slides/slide4.xml><?xml version="1.0" encoding="utf-8"?>
-<p:sld xmlns:a="http://schemas.openxmlformats.org/drawingml/2006/main" xmlns:p="http://schemas.openxmlformats.org/presentationml/2006/main" xmlns:r="http://schemas.openxmlformats.org/officeDocument/2006/relationships" show="0">
-  <p:cSld>
-    <p:bg>
-      <p:bgPr>
-        <a:solidFill>
-          <a:srgbClr val="EEEBE4"/>
-        </a:solidFill>
-        <a:effectLst/>
-      </p:bgPr>
-    </p:bg>
-    <p:spTree>
-      <p:nvGrpSpPr>
-        <p:cNvPr id="1" name=""/>
-        <p:cNvGrpSpPr/>
-        <p:nvPr/>
-      </p:nvGrpSpPr>
-      <p:grpSpPr/>
-      <p:sp>
-        <p:nvSpPr>
-          <p:cNvPr id="2" name="Rectangle 1"/>
+              <a:t>Signal, effort, recovery</a:t>
+            </a:r>
+          </a:p>
+        </p:txBody>
+      </p:sp>
+      <p:sp>
+        <p:nvSpPr>
+          <p:cNvPr id="6" name="Rectangle 5"/>
           <p:cNvSpPr/>
           <p:nvPr/>
         </p:nvSpPr>
         <p:spPr>
           <a:xfrm>
-            <a:off x="0" y="0"/>
-            <a:ext cx="12191695" cy="384048"/>
+            <a:off x="822960" y="2743200"/>
+            <a:ext cx="1874519" cy="1005840"/>
           </a:xfrm>
           <a:prstGeom prst="rect">
             <a:avLst/>
           </a:prstGeom>
           <a:solidFill>
-            <a:srgbClr val="0B2D5B"/>
+            <a:srgbClr val="FFFFFF"/>
           </a:solidFill>
-          <a:ln>
-            <a:noFill/>
+          <a:ln w="15875">
+            <a:solidFill>
+              <a:srgbClr val="0B2D5B"/>
+            </a:solidFill>
           </a:ln>
           <a:effectLst/>
         </p:spPr>
@@ -6632,14 +7137,14 @@
       </p:sp>
       <p:sp>
         <p:nvSpPr>
-          <p:cNvPr id="3" name="TextBox 2"/>
+          <p:cNvPr id="7" name="TextBox 6"/>
           <p:cNvSpPr txBox="1"/>
           <p:nvPr/>
         </p:nvSpPr>
         <p:spPr>
           <a:xfrm>
-            <a:off x="548640" y="100584"/>
-            <a:ext cx="10972800" cy="274320"/>
+            <a:off x="822960" y="2743200"/>
+            <a:ext cx="1874519" cy="1005840"/>
           </a:xfrm>
           <a:prstGeom prst="rect">
             <a:avLst/>
@@ -6647,414 +7152,85 @@
           <a:noFill/>
         </p:spPr>
         <p:txBody>
-          <a:bodyPr wrap="square" anchor="t" lIns="0" rIns="0" tIns="0" bIns="0">
+          <a:bodyPr wrap="square" anchor="ctr" lIns="0" rIns="0" tIns="0" bIns="0">
             <a:spAutoFit/>
           </a:bodyPr>
           <a:lstStyle/>
           <a:p>
-            <a:pPr algn="l">
-              <a:spcAft>
-                <a:spcPts val="495"/>
-              </a:spcAft>
-            </a:pPr>
-            <a:r>
-              <a:rPr sz="1100" b="1" i="0">
-                <a:solidFill>
-                  <a:srgbClr val="FFFFFF"/>
-                </a:solidFill>
-                <a:latin typeface="Inter Tight"/>
-              </a:rPr>
-              <a:t>TEACHER PAGE  ·  skipped when you present  ·  Background</a:t>
-            </a:r>
-          </a:p>
-        </p:txBody>
-      </p:sp>
-      <p:sp>
-        <p:nvSpPr>
-          <p:cNvPr id="4" name="TextBox 3"/>
-          <p:cNvSpPr txBox="1"/>
+            <a:pPr algn="ctr">
+              <a:spcAft>
+                <a:spcPts val="900"/>
+              </a:spcAft>
+            </a:pPr>
+            <a:r>
+              <a:rPr sz="2000" b="1" i="0">
+                <a:solidFill>
+                  <a:srgbClr val="1C1B19"/>
+                </a:solidFill>
+                <a:latin typeface="Source Serif 4"/>
+              </a:rPr>
+              <a:t>Challenge</a:t>
+            </a:r>
+          </a:p>
+        </p:txBody>
+      </p:sp>
+      <p:cxnSp>
+        <p:nvCxnSpPr>
+          <p:cNvPr id="8" name="Connector 7"/>
+          <p:cNvCxnSpPr/>
           <p:nvPr/>
-        </p:nvSpPr>
-        <p:spPr>
-          <a:xfrm>
-            <a:off x="548640" y="685800"/>
-            <a:ext cx="10972800" cy="640080"/>
-          </a:xfrm>
-          <a:prstGeom prst="rect">
-            <a:avLst/>
-          </a:prstGeom>
-          <a:noFill/>
-        </p:spPr>
-        <p:txBody>
-          <a:bodyPr wrap="square" anchor="t" lIns="0" rIns="0" tIns="0" bIns="0">
-            <a:spAutoFit/>
-          </a:bodyPr>
-          <a:lstStyle/>
-          <a:p>
-            <a:pPr algn="l">
-              <a:spcAft>
-                <a:spcPts val="1350"/>
-              </a:spcAft>
-            </a:pPr>
-            <a:r>
-              <a:rPr sz="3000" b="1" i="0">
-                <a:solidFill>
-                  <a:srgbClr val="1C1B19"/>
-                </a:solidFill>
-                <a:latin typeface="Source Serif 4"/>
-              </a:rPr>
-              <a:t>What the research says</a:t>
-            </a:r>
-          </a:p>
-        </p:txBody>
-      </p:sp>
-      <p:sp>
-        <p:nvSpPr>
-          <p:cNvPr id="5" name="TextBox 4"/>
-          <p:cNvSpPr txBox="1"/>
-          <p:nvPr/>
-        </p:nvSpPr>
-        <p:spPr>
-          <a:xfrm>
-            <a:off x="548640" y="1463040"/>
-            <a:ext cx="5394960" cy="4937760"/>
-          </a:xfrm>
-          <a:prstGeom prst="rect">
-            <a:avLst/>
-          </a:prstGeom>
-          <a:noFill/>
-        </p:spPr>
-        <p:txBody>
-          <a:bodyPr wrap="square" anchor="t" lIns="0" rIns="0" tIns="0" bIns="0">
-            <a:spAutoFit/>
-          </a:bodyPr>
-          <a:lstStyle/>
-          <a:p>
-            <a:pPr algn="l">
-              <a:spcAft>
-                <a:spcPts val="585"/>
-              </a:spcAft>
-            </a:pPr>
-            <a:r>
-              <a:rPr sz="1300" b="0" i="0">
-                <a:solidFill>
-                  <a:srgbClr val="1C1B19"/>
-                </a:solidFill>
-                <a:latin typeface="Source Serif 4"/>
-              </a:rPr>
-              <a:t>In a 30-minute online lesson tested in several studies with thousands of high school and college students, learning that stress responses can fuel performance (together with a growth mindset) improved heart and blood vessel responses to a stress test, lowered daily cortisol, reduced anxiety, and improved academic outcomes.</a:t>
-            </a:r>
-          </a:p>
-          <a:p>
-            <a:pPr algn="l">
-              <a:spcAft>
-                <a:spcPts val="585"/>
-              </a:spcAft>
-            </a:pPr>
-            <a:r>
-              <a:rPr sz="1050" b="0" i="0">
-                <a:solidFill>
-                  <a:srgbClr val="5D5A54"/>
-                </a:solidFill>
-                <a:latin typeface="Inter Tight"/>
-              </a:rPr>
-              <a:t>Yeager et al., Nature, 2022</a:t>
-            </a:r>
-          </a:p>
-          <a:p>
-            <a:pPr algn="l">
-              <a:spcAft>
-                <a:spcPts val="585"/>
-              </a:spcAft>
-            </a:pPr>
-            <a:r>
-              <a:rPr sz="1300" b="0" i="0">
-                <a:solidFill>
-                  <a:srgbClr val="1C1B19"/>
-                </a:solidFill>
-                <a:latin typeface="Source Serif 4"/>
-              </a:rPr>
-              <a:t>People told that a racing heart helps them perform showed a more efficient cardiovascular response under social stress and paid less attention to threat.</a:t>
-            </a:r>
-          </a:p>
-          <a:p>
-            <a:pPr algn="l">
-              <a:spcAft>
-                <a:spcPts val="585"/>
-              </a:spcAft>
-            </a:pPr>
-            <a:r>
-              <a:rPr sz="1050" b="0" i="0">
-                <a:solidFill>
-                  <a:srgbClr val="5D5A54"/>
-                </a:solidFill>
-                <a:latin typeface="Inter Tight"/>
-              </a:rPr>
-              <a:t>Jamieson, Nock &amp; Mendes, Journal of Experimental Psychology: General, 2012</a:t>
-            </a:r>
-          </a:p>
-          <a:p>
-            <a:pPr algn="l">
-              <a:spcAft>
-                <a:spcPts val="585"/>
-              </a:spcAft>
-            </a:pPr>
-            <a:r>
-              <a:rPr sz="1300" b="0" i="0">
-                <a:solidFill>
-                  <a:srgbClr val="1C1B19"/>
-                </a:solidFill>
-                <a:latin typeface="Source Serif 4"/>
-              </a:rPr>
-              <a:t>Students told that arousal can help did better on GRE math practice and on the real GRE months later.</a:t>
-            </a:r>
-          </a:p>
-          <a:p>
-            <a:pPr algn="l">
-              <a:spcAft>
-                <a:spcPts val="585"/>
-              </a:spcAft>
-            </a:pPr>
-            <a:r>
-              <a:rPr sz="1050" b="0" i="0">
-                <a:solidFill>
-                  <a:srgbClr val="5D5A54"/>
-                </a:solidFill>
-                <a:latin typeface="Inter Tight"/>
-              </a:rPr>
-              <a:t>Jamieson et al., Journal of Experimental Social Psychology, 2010</a:t>
-            </a:r>
-          </a:p>
-          <a:p>
-            <a:pPr algn="l">
-              <a:spcAft>
-                <a:spcPts val="585"/>
-              </a:spcAft>
-            </a:pPr>
-            <a:r>
-              <a:rPr sz="1300" b="0" i="0">
-                <a:solidFill>
-                  <a:srgbClr val="1C1B19"/>
-                </a:solidFill>
-                <a:latin typeface="Source Serif 4"/>
-              </a:rPr>
-              <a:t>Believing stress can be enhancing was linked to better health and work performance, and a short video shifting that belief changed how people responded to stress.</a:t>
-            </a:r>
-          </a:p>
-          <a:p>
-            <a:pPr algn="l">
-              <a:spcAft>
-                <a:spcPts val="585"/>
-              </a:spcAft>
-            </a:pPr>
-            <a:r>
-              <a:rPr sz="1050" b="0" i="0">
-                <a:solidFill>
-                  <a:srgbClr val="5D5A54"/>
-                </a:solidFill>
-                <a:latin typeface="Inter Tight"/>
-              </a:rPr>
-              <a:t>Crum, Salovey &amp; Achor, Journal of Personality and Social Psychology, 2013</a:t>
-            </a:r>
-          </a:p>
-        </p:txBody>
-      </p:sp>
-      <p:sp>
-        <p:nvSpPr>
-          <p:cNvPr id="6" name="TextBox 5"/>
-          <p:cNvSpPr txBox="1"/>
-          <p:nvPr/>
-        </p:nvSpPr>
-        <p:spPr>
-          <a:xfrm>
-            <a:off x="6217920" y="1463040"/>
-            <a:ext cx="5394960" cy="4937760"/>
-          </a:xfrm>
-          <a:prstGeom prst="rect">
-            <a:avLst/>
-          </a:prstGeom>
-          <a:noFill/>
-        </p:spPr>
-        <p:txBody>
-          <a:bodyPr wrap="square" anchor="t" lIns="0" rIns="0" tIns="0" bIns="0">
-            <a:spAutoFit/>
-          </a:bodyPr>
-          <a:lstStyle/>
-          <a:p>
-            <a:pPr algn="l">
-              <a:spcAft>
-                <a:spcPts val="585"/>
-              </a:spcAft>
-            </a:pPr>
-            <a:r>
-              <a:rPr sz="1300" b="0" i="0">
-                <a:solidFill>
-                  <a:srgbClr val="1C1B19"/>
-                </a:solidFill>
-                <a:latin typeface="Source Serif 4"/>
-              </a:rPr>
-              <a:t>Short-term stress responses protect and prepare the body; harm comes when they are turned on too often or fail to turn off (allostatic load).</a:t>
-            </a:r>
-          </a:p>
-          <a:p>
-            <a:pPr algn="l">
-              <a:spcAft>
-                <a:spcPts val="585"/>
-              </a:spcAft>
-            </a:pPr>
-            <a:r>
-              <a:rPr sz="1050" b="0" i="0">
-                <a:solidFill>
-                  <a:srgbClr val="5D5A54"/>
-                </a:solidFill>
-                <a:latin typeface="Inter Tight"/>
-              </a:rPr>
-              <a:t>McEwen, New England Journal of Medicine, 1998</a:t>
-            </a:r>
-          </a:p>
-          <a:p>
-            <a:pPr algn="l">
-              <a:spcAft>
-                <a:spcPts val="585"/>
-              </a:spcAft>
-            </a:pPr>
-            <a:r>
-              <a:rPr sz="1300" b="0" i="0">
-                <a:solidFill>
-                  <a:srgbClr val="1C1B19"/>
-                </a:solidFill>
-                <a:latin typeface="Source Serif 4"/>
-              </a:rPr>
-              <a:t>Developmental scientists separate positive stress (brief, mild), tolerable stress (serious but buffered by supportive adults), and toxic stress (strong, frequent or prolonged without that support).</a:t>
-            </a:r>
-          </a:p>
-          <a:p>
-            <a:pPr algn="l">
-              <a:spcAft>
-                <a:spcPts val="585"/>
-              </a:spcAft>
-            </a:pPr>
-            <a:r>
-              <a:rPr sz="1050" b="0" i="0">
-                <a:solidFill>
-                  <a:srgbClr val="5D5A54"/>
-                </a:solidFill>
-                <a:latin typeface="Inter Tight"/>
-              </a:rPr>
-              <a:t>National Scientific Council on the Developing Child, Harvard, 2005/2014</a:t>
-            </a:r>
-          </a:p>
-          <a:p>
-            <a:pPr algn="l">
-              <a:spcAft>
-                <a:spcPts val="585"/>
-              </a:spcAft>
-            </a:pPr>
-            <a:r>
-              <a:rPr sz="1300" b="0" i="0">
-                <a:solidFill>
-                  <a:srgbClr val="1C1B19"/>
-                </a:solidFill>
-                <a:latin typeface="Source Serif 4"/>
-              </a:rPr>
-              <a:t>Worry and rumination keep the stress response switched on long after the stressful event is over.</a:t>
-            </a:r>
-          </a:p>
-          <a:p>
-            <a:pPr algn="l">
-              <a:spcAft>
-                <a:spcPts val="585"/>
-              </a:spcAft>
-            </a:pPr>
-            <a:r>
-              <a:rPr sz="1050" b="0" i="0">
-                <a:solidFill>
-                  <a:srgbClr val="5D5A54"/>
-                </a:solidFill>
-                <a:latin typeface="Inter Tight"/>
-              </a:rPr>
-              <a:t>Brosschot, Gerin &amp; Thayer, Journal of Psychosomatic Research, 2006</a:t>
-            </a:r>
-          </a:p>
-          <a:p>
-            <a:pPr algn="l">
-              <a:spcAft>
-                <a:spcPts val="585"/>
-              </a:spcAft>
-            </a:pPr>
-            <a:r>
-              <a:rPr sz="1300" b="0" i="0">
-                <a:solidFill>
-                  <a:srgbClr val="1C1B19"/>
-                </a:solidFill>
-                <a:latin typeface="Source Serif 4"/>
-              </a:rPr>
-              <a:t>Discrimination and poverty act as chronic stressors with measurable effects on mental and physical health.</a:t>
-            </a:r>
-          </a:p>
-          <a:p>
-            <a:pPr algn="l">
-              <a:spcAft>
-                <a:spcPts val="585"/>
-              </a:spcAft>
-            </a:pPr>
-            <a:r>
-              <a:rPr sz="1050" b="0" i="0">
-                <a:solidFill>
-                  <a:srgbClr val="5D5A54"/>
-                </a:solidFill>
-                <a:latin typeface="Inter Tight"/>
-              </a:rPr>
-              <a:t>Williams, Journal of Health and Social Behavior, 2018; Evans &amp; Kim, Child Development Perspectives, 2013</a:t>
-            </a:r>
-          </a:p>
-        </p:txBody>
-      </p:sp>
-    </p:spTree>
-  </p:cSld>
-  <p:clrMapOvr>
-    <a:masterClrMapping/>
-  </p:clrMapOvr>
-</p:sld>
-</file>
-
-<file path=ppt/slides/slide5.xml><?xml version="1.0" encoding="utf-8"?>
-<p:sld xmlns:a="http://schemas.openxmlformats.org/drawingml/2006/main" xmlns:p="http://schemas.openxmlformats.org/presentationml/2006/main" xmlns:r="http://schemas.openxmlformats.org/officeDocument/2006/relationships">
-  <p:cSld>
-    <p:bg>
-      <p:bgPr>
-        <a:solidFill>
-          <a:srgbClr val="0B2D5B"/>
-        </a:solidFill>
-        <a:effectLst/>
-      </p:bgPr>
-    </p:bg>
-    <p:spTree>
-      <p:nvGrpSpPr>
-        <p:cNvPr id="1" name=""/>
-        <p:cNvGrpSpPr/>
-        <p:nvPr/>
-      </p:nvGrpSpPr>
-      <p:grpSpPr/>
-      <p:sp>
-        <p:nvSpPr>
-          <p:cNvPr id="2" name="Rectangle 1"/>
+        </p:nvCxnSpPr>
+        <p:spPr>
+          <a:xfrm>
+            <a:off x="2752344" y="3246120"/>
+            <a:ext cx="896112" cy="0"/>
+          </a:xfrm>
+          <a:prstGeom prst="line">
+            <a:avLst/>
+          </a:prstGeom>
+          <a:ln w="31750">
+            <a:solidFill>
+              <a:srgbClr val="F47B20"/>
+            </a:solidFill>
+            <a:tailEnd type="triangle"/>
+          </a:ln>
+        </p:spPr>
+        <p:style>
+          <a:lnRef idx="2">
+            <a:schemeClr val="accent1"/>
+          </a:lnRef>
+          <a:fillRef idx="0">
+            <a:schemeClr val="accent1"/>
+          </a:fillRef>
+          <a:effectRef idx="1">
+            <a:schemeClr val="accent1"/>
+          </a:effectRef>
+          <a:fontRef idx="minor">
+            <a:schemeClr val="tx1"/>
+          </a:fontRef>
+        </p:style>
+      </p:cxnSp>
+      <p:sp>
+        <p:nvSpPr>
+          <p:cNvPr id="9" name="Rectangle 8"/>
           <p:cNvSpPr/>
           <p:nvPr/>
         </p:nvSpPr>
         <p:spPr>
           <a:xfrm>
-            <a:off x="548640" y="502920"/>
-            <a:ext cx="457200" cy="54864"/>
+            <a:off x="3703320" y="2743200"/>
+            <a:ext cx="1874519" cy="1005840"/>
           </a:xfrm>
           <a:prstGeom prst="rect">
             <a:avLst/>
           </a:prstGeom>
           <a:solidFill>
-            <a:srgbClr val="F47B20"/>
+            <a:srgbClr val="FFFFFF"/>
           </a:solidFill>
-          <a:ln>
-            <a:noFill/>
+          <a:ln w="15875">
+            <a:solidFill>
+              <a:srgbClr val="0B2D5B"/>
+            </a:solidFill>
           </a:ln>
           <a:effectLst/>
         </p:spPr>
@@ -7082,14 +7258,295 @@
       </p:sp>
       <p:sp>
         <p:nvSpPr>
-          <p:cNvPr id="3" name="TextBox 2"/>
+          <p:cNvPr id="10" name="TextBox 9"/>
           <p:cNvSpPr txBox="1"/>
           <p:nvPr/>
         </p:nvSpPr>
         <p:spPr>
           <a:xfrm>
-            <a:off x="1143000" y="393192"/>
-            <a:ext cx="8229600" cy="274320"/>
+            <a:off x="3703320" y="2743200"/>
+            <a:ext cx="1874519" cy="1005840"/>
+          </a:xfrm>
+          <a:prstGeom prst="rect">
+            <a:avLst/>
+          </a:prstGeom>
+          <a:noFill/>
+        </p:spPr>
+        <p:txBody>
+          <a:bodyPr wrap="square" anchor="ctr" lIns="0" rIns="0" tIns="0" bIns="0">
+            <a:spAutoFit/>
+          </a:bodyPr>
+          <a:lstStyle/>
+          <a:p>
+            <a:pPr algn="ctr">
+              <a:spcAft>
+                <a:spcPts val="900"/>
+              </a:spcAft>
+            </a:pPr>
+            <a:r>
+              <a:rPr sz="2000" b="1" i="0">
+                <a:solidFill>
+                  <a:srgbClr val="1C1B19"/>
+                </a:solidFill>
+                <a:latin typeface="Source Serif 4"/>
+              </a:rPr>
+              <a:t>Signal</a:t>
+            </a:r>
+          </a:p>
+        </p:txBody>
+      </p:sp>
+      <p:cxnSp>
+        <p:nvCxnSpPr>
+          <p:cNvPr id="11" name="Connector 10"/>
+          <p:cNvCxnSpPr/>
+          <p:nvPr/>
+        </p:nvCxnSpPr>
+        <p:spPr>
+          <a:xfrm>
+            <a:off x="5632704" y="3246120"/>
+            <a:ext cx="896112" cy="0"/>
+          </a:xfrm>
+          <a:prstGeom prst="line">
+            <a:avLst/>
+          </a:prstGeom>
+          <a:ln w="31750">
+            <a:solidFill>
+              <a:srgbClr val="F47B20"/>
+            </a:solidFill>
+            <a:tailEnd type="triangle"/>
+          </a:ln>
+        </p:spPr>
+        <p:style>
+          <a:lnRef idx="2">
+            <a:schemeClr val="accent1"/>
+          </a:lnRef>
+          <a:fillRef idx="0">
+            <a:schemeClr val="accent1"/>
+          </a:fillRef>
+          <a:effectRef idx="1">
+            <a:schemeClr val="accent1"/>
+          </a:effectRef>
+          <a:fontRef idx="minor">
+            <a:schemeClr val="tx1"/>
+          </a:fontRef>
+        </p:style>
+      </p:cxnSp>
+      <p:sp>
+        <p:nvSpPr>
+          <p:cNvPr id="12" name="Rectangle 11"/>
+          <p:cNvSpPr/>
+          <p:nvPr/>
+        </p:nvSpPr>
+        <p:spPr>
+          <a:xfrm>
+            <a:off x="6583680" y="2743200"/>
+            <a:ext cx="1874519" cy="1005840"/>
+          </a:xfrm>
+          <a:prstGeom prst="rect">
+            <a:avLst/>
+          </a:prstGeom>
+          <a:solidFill>
+            <a:srgbClr val="FFFFFF"/>
+          </a:solidFill>
+          <a:ln w="15875">
+            <a:solidFill>
+              <a:srgbClr val="0B2D5B"/>
+            </a:solidFill>
+          </a:ln>
+          <a:effectLst/>
+        </p:spPr>
+        <p:style>
+          <a:lnRef idx="1">
+            <a:schemeClr val="accent1"/>
+          </a:lnRef>
+          <a:fillRef idx="3">
+            <a:schemeClr val="accent1"/>
+          </a:fillRef>
+          <a:effectRef idx="2">
+            <a:schemeClr val="accent1"/>
+          </a:effectRef>
+          <a:fontRef idx="minor">
+            <a:schemeClr val="lt1"/>
+          </a:fontRef>
+        </p:style>
+        <p:txBody>
+          <a:bodyPr rtlCol="0" anchor="ctr"/>
+          <a:lstStyle/>
+          <a:p>
+            <a:pPr algn="ctr"/>
+          </a:p>
+        </p:txBody>
+      </p:sp>
+      <p:sp>
+        <p:nvSpPr>
+          <p:cNvPr id="13" name="TextBox 12"/>
+          <p:cNvSpPr txBox="1"/>
+          <p:nvPr/>
+        </p:nvSpPr>
+        <p:spPr>
+          <a:xfrm>
+            <a:off x="6583680" y="2743200"/>
+            <a:ext cx="1874519" cy="1005840"/>
+          </a:xfrm>
+          <a:prstGeom prst="rect">
+            <a:avLst/>
+          </a:prstGeom>
+          <a:noFill/>
+        </p:spPr>
+        <p:txBody>
+          <a:bodyPr wrap="square" anchor="ctr" lIns="0" rIns="0" tIns="0" bIns="0">
+            <a:spAutoFit/>
+          </a:bodyPr>
+          <a:lstStyle/>
+          <a:p>
+            <a:pPr algn="ctr">
+              <a:spcAft>
+                <a:spcPts val="900"/>
+              </a:spcAft>
+            </a:pPr>
+            <a:r>
+              <a:rPr sz="2000" b="1" i="0">
+                <a:solidFill>
+                  <a:srgbClr val="1C1B19"/>
+                </a:solidFill>
+                <a:latin typeface="Source Serif 4"/>
+              </a:rPr>
+              <a:t>Effort</a:t>
+            </a:r>
+          </a:p>
+        </p:txBody>
+      </p:sp>
+      <p:cxnSp>
+        <p:nvCxnSpPr>
+          <p:cNvPr id="14" name="Connector 13"/>
+          <p:cNvCxnSpPr/>
+          <p:nvPr/>
+        </p:nvCxnSpPr>
+        <p:spPr>
+          <a:xfrm>
+            <a:off x="8513064" y="3246120"/>
+            <a:ext cx="896112" cy="0"/>
+          </a:xfrm>
+          <a:prstGeom prst="line">
+            <a:avLst/>
+          </a:prstGeom>
+          <a:ln w="31750">
+            <a:solidFill>
+              <a:srgbClr val="F47B20"/>
+            </a:solidFill>
+            <a:tailEnd type="triangle"/>
+          </a:ln>
+        </p:spPr>
+        <p:style>
+          <a:lnRef idx="2">
+            <a:schemeClr val="accent1"/>
+          </a:lnRef>
+          <a:fillRef idx="0">
+            <a:schemeClr val="accent1"/>
+          </a:fillRef>
+          <a:effectRef idx="1">
+            <a:schemeClr val="accent1"/>
+          </a:effectRef>
+          <a:fontRef idx="minor">
+            <a:schemeClr val="tx1"/>
+          </a:fontRef>
+        </p:style>
+      </p:cxnSp>
+      <p:sp>
+        <p:nvSpPr>
+          <p:cNvPr id="15" name="Rectangle 14"/>
+          <p:cNvSpPr/>
+          <p:nvPr/>
+        </p:nvSpPr>
+        <p:spPr>
+          <a:xfrm>
+            <a:off x="9464040" y="2743200"/>
+            <a:ext cx="1874519" cy="1005840"/>
+          </a:xfrm>
+          <a:prstGeom prst="rect">
+            <a:avLst/>
+          </a:prstGeom>
+          <a:solidFill>
+            <a:srgbClr val="FFFFFF"/>
+          </a:solidFill>
+          <a:ln w="15875">
+            <a:solidFill>
+              <a:srgbClr val="0B2D5B"/>
+            </a:solidFill>
+          </a:ln>
+          <a:effectLst/>
+        </p:spPr>
+        <p:style>
+          <a:lnRef idx="1">
+            <a:schemeClr val="accent1"/>
+          </a:lnRef>
+          <a:fillRef idx="3">
+            <a:schemeClr val="accent1"/>
+          </a:fillRef>
+          <a:effectRef idx="2">
+            <a:schemeClr val="accent1"/>
+          </a:effectRef>
+          <a:fontRef idx="minor">
+            <a:schemeClr val="lt1"/>
+          </a:fontRef>
+        </p:style>
+        <p:txBody>
+          <a:bodyPr rtlCol="0" anchor="ctr"/>
+          <a:lstStyle/>
+          <a:p>
+            <a:pPr algn="ctr"/>
+          </a:p>
+        </p:txBody>
+      </p:sp>
+      <p:sp>
+        <p:nvSpPr>
+          <p:cNvPr id="16" name="TextBox 15"/>
+          <p:cNvSpPr txBox="1"/>
+          <p:nvPr/>
+        </p:nvSpPr>
+        <p:spPr>
+          <a:xfrm>
+            <a:off x="9464040" y="2743200"/>
+            <a:ext cx="1874519" cy="1005840"/>
+          </a:xfrm>
+          <a:prstGeom prst="rect">
+            <a:avLst/>
+          </a:prstGeom>
+          <a:noFill/>
+        </p:spPr>
+        <p:txBody>
+          <a:bodyPr wrap="square" anchor="ctr" lIns="0" rIns="0" tIns="0" bIns="0">
+            <a:spAutoFit/>
+          </a:bodyPr>
+          <a:lstStyle/>
+          <a:p>
+            <a:pPr algn="ctr">
+              <a:spcAft>
+                <a:spcPts val="900"/>
+              </a:spcAft>
+            </a:pPr>
+            <a:r>
+              <a:rPr sz="2000" b="1" i="0">
+                <a:solidFill>
+                  <a:srgbClr val="1C1B19"/>
+                </a:solidFill>
+                <a:latin typeface="Source Serif 4"/>
+              </a:rPr>
+              <a:t>Recovery</a:t>
+            </a:r>
+          </a:p>
+        </p:txBody>
+      </p:sp>
+      <p:sp>
+        <p:nvSpPr>
+          <p:cNvPr id="17" name="TextBox 16"/>
+          <p:cNvSpPr txBox="1"/>
+          <p:nvPr/>
+        </p:nvSpPr>
+        <p:spPr>
+          <a:xfrm>
+            <a:off x="822960" y="4160520"/>
+            <a:ext cx="10515600" cy="457200"/>
           </a:xfrm>
           <a:prstGeom prst="rect">
             <a:avLst/>
@@ -7102,33 +7559,33 @@
           </a:bodyPr>
           <a:lstStyle/>
           <a:p>
-            <a:pPr algn="l">
-              <a:spcAft>
-                <a:spcPts val="540"/>
-              </a:spcAft>
-            </a:pPr>
-            <a:r>
-              <a:rPr sz="1200" b="1" i="0">
-                <a:solidFill>
-                  <a:srgbClr val="5D5A54"/>
+            <a:pPr algn="ctr">
+              <a:spcAft>
+                <a:spcPts val="810"/>
+              </a:spcAft>
+            </a:pPr>
+            <a:r>
+              <a:rPr sz="1800" b="1" i="0">
+                <a:solidFill>
+                  <a:srgbClr val="F47B20"/>
                 </a:solidFill>
                 <a:latin typeface="Inter Tight"/>
               </a:rPr>
-              <a:t>STRESS IS A SIGNAL</a:t>
-            </a:r>
-          </a:p>
-        </p:txBody>
-      </p:sp>
-      <p:sp>
-        <p:nvSpPr>
-          <p:cNvPr id="4" name="TextBox 3"/>
+              <a:t>↺  and you're stronger for the next one</a:t>
+            </a:r>
+          </a:p>
+        </p:txBody>
+      </p:sp>
+      <p:sp>
+        <p:nvSpPr>
+          <p:cNvPr id="18" name="TextBox 17"/>
           <p:cNvSpPr txBox="1"/>
           <p:nvPr/>
         </p:nvSpPr>
         <p:spPr>
           <a:xfrm>
-            <a:off x="8229600" y="6400800"/>
-            <a:ext cx="3410712" cy="274320"/>
+            <a:off x="822960" y="4846320"/>
+            <a:ext cx="10515600" cy="1188720"/>
           </a:xfrm>
           <a:prstGeom prst="rect">
             <a:avLst/>
@@ -7141,136 +7598,19 @@
           </a:bodyPr>
           <a:lstStyle/>
           <a:p>
-            <a:pPr algn="r">
-              <a:spcAft>
-                <a:spcPts val="450"/>
-              </a:spcAft>
-            </a:pPr>
-            <a:r>
-              <a:rPr sz="1000" b="0" i="0">
+            <a:pPr algn="ctr">
+              <a:spcAft>
+                <a:spcPts val="900"/>
+              </a:spcAft>
+            </a:pPr>
+            <a:r>
+              <a:rPr sz="2000" b="0" i="1">
                 <a:solidFill>
                   <a:srgbClr val="5D5A54"/>
                 </a:solidFill>
-                <a:latin typeface="Inter Tight"/>
-              </a:rPr>
-              <a:t>Beaver Counseling</a:t>
-            </a:r>
-          </a:p>
-        </p:txBody>
-      </p:sp>
-      <p:sp>
-        <p:nvSpPr>
-          <p:cNvPr id="5" name="TextBox 4"/>
-          <p:cNvSpPr txBox="1"/>
-          <p:nvPr/>
-        </p:nvSpPr>
-        <p:spPr>
-          <a:xfrm>
-            <a:off x="822960" y="2011680"/>
-            <a:ext cx="10515600" cy="1463040"/>
-          </a:xfrm>
-          <a:prstGeom prst="rect">
-            <a:avLst/>
-          </a:prstGeom>
-          <a:noFill/>
-        </p:spPr>
-        <p:txBody>
-          <a:bodyPr wrap="square" anchor="b" lIns="0" rIns="0" tIns="0" bIns="0">
-            <a:spAutoFit/>
-          </a:bodyPr>
-          <a:lstStyle/>
-          <a:p>
-            <a:pPr algn="l">
-              <a:spcAft>
-                <a:spcPts val="2700"/>
-              </a:spcAft>
-            </a:pPr>
-            <a:r>
-              <a:rPr sz="6000" b="1" i="0">
-                <a:solidFill>
-                  <a:srgbClr val="FFFFFF"/>
-                </a:solidFill>
                 <a:latin typeface="Source Serif 4"/>
               </a:rPr>
-              <a:t>Stress Is a Signal</a:t>
-            </a:r>
-          </a:p>
-        </p:txBody>
-      </p:sp>
-      <p:sp>
-        <p:nvSpPr>
-          <p:cNvPr id="6" name="TextBox 5"/>
-          <p:cNvSpPr txBox="1"/>
-          <p:nvPr/>
-        </p:nvSpPr>
-        <p:spPr>
-          <a:xfrm>
-            <a:off x="822960" y="3611880"/>
-            <a:ext cx="10515600" cy="914400"/>
-          </a:xfrm>
-          <a:prstGeom prst="rect">
-            <a:avLst/>
-          </a:prstGeom>
-          <a:noFill/>
-        </p:spPr>
-        <p:txBody>
-          <a:bodyPr wrap="square" anchor="t" lIns="0" rIns="0" tIns="0" bIns="0">
-            <a:spAutoFit/>
-          </a:bodyPr>
-          <a:lstStyle/>
-          <a:p>
-            <a:pPr algn="l">
-              <a:spcAft>
-                <a:spcPts val="1080"/>
-              </a:spcAft>
-            </a:pPr>
-            <a:r>
-              <a:rPr sz="2400" b="0" i="1">
-                <a:solidFill>
-                  <a:srgbClr val="E8E4DA"/>
-                </a:solidFill>
-                <a:latin typeface="Source Serif 4"/>
-              </a:rPr>
-              <a:t>Your body is getting you ready. Here's how to use it.</a:t>
-            </a:r>
-          </a:p>
-        </p:txBody>
-      </p:sp>
-      <p:sp>
-        <p:nvSpPr>
-          <p:cNvPr id="7" name="TextBox 6"/>
-          <p:cNvSpPr txBox="1"/>
-          <p:nvPr/>
-        </p:nvSpPr>
-        <p:spPr>
-          <a:xfrm>
-            <a:off x="822960" y="6035040"/>
-            <a:ext cx="7315200" cy="365760"/>
-          </a:xfrm>
-          <a:prstGeom prst="rect">
-            <a:avLst/>
-          </a:prstGeom>
-          <a:noFill/>
-        </p:spPr>
-        <p:txBody>
-          <a:bodyPr wrap="square" anchor="t" lIns="0" rIns="0" tIns="0" bIns="0">
-            <a:spAutoFit/>
-          </a:bodyPr>
-          <a:lstStyle/>
-          <a:p>
-            <a:pPr algn="l">
-              <a:spcAft>
-                <a:spcPts val="585"/>
-              </a:spcAft>
-            </a:pPr>
-            <a:r>
-              <a:rPr sz="1300" b="0" i="0">
-                <a:solidFill>
-                  <a:srgbClr val="E8E4DA"/>
-                </a:solidFill>
-                <a:latin typeface="Inter Tight"/>
-              </a:rPr>
-              <a:t>Beaver Upper School · Counseling</a:t>
+              <a:t>A zebra runs from a lion for three minutes, then goes back to grazing.</a:t>
             </a:r>
           </a:p>
         </p:txBody>
@@ -7379,7 +7719,7 @@
                 </a:solidFill>
                 <a:latin typeface="Inter Tight"/>
               </a:rPr>
-              <a:t>FEEL IT</a:t>
+              <a:t>THE RESEARCH</a:t>
             </a:r>
           </a:p>
         </p:txBody>
@@ -7425,14 +7765,179 @@
       </p:sp>
       <p:sp>
         <p:nvSpPr>
-          <p:cNvPr id="5" name="Rectangle 4"/>
+          <p:cNvPr id="5" name="TextBox 4"/>
+          <p:cNvSpPr txBox="1"/>
+          <p:nvPr/>
+        </p:nvSpPr>
+        <p:spPr>
+          <a:xfrm>
+            <a:off x="822960" y="914400"/>
+            <a:ext cx="10515600" cy="365760"/>
+          </a:xfrm>
+          <a:prstGeom prst="rect">
+            <a:avLst/>
+          </a:prstGeom>
+          <a:noFill/>
+        </p:spPr>
+        <p:txBody>
+          <a:bodyPr wrap="square" anchor="t" lIns="0" rIns="0" tIns="0" bIns="0">
+            <a:spAutoFit/>
+          </a:bodyPr>
+          <a:lstStyle/>
+          <a:p>
+            <a:pPr algn="l">
+              <a:spcAft>
+                <a:spcPts val="630"/>
+              </a:spcAft>
+            </a:pPr>
+            <a:r>
+              <a:rPr sz="1400" b="1" i="0">
+                <a:solidFill>
+                  <a:srgbClr val="0B2D5B"/>
+                </a:solidFill>
+                <a:latin typeface="Inter Tight"/>
+              </a:rPr>
+              <a:t>Yeager et al., 2022  ·  Jamieson et al., 2010, 2012  ·  McEwen, 1998</a:t>
+            </a:r>
+          </a:p>
+        </p:txBody>
+      </p:sp>
+      <p:sp>
+        <p:nvSpPr>
+          <p:cNvPr id="6" name="TextBox 5"/>
+          <p:cNvSpPr txBox="1"/>
+          <p:nvPr/>
+        </p:nvSpPr>
+        <p:spPr>
+          <a:xfrm>
+            <a:off x="822960" y="1325880"/>
+            <a:ext cx="10515600" cy="1097280"/>
+          </a:xfrm>
+          <a:prstGeom prst="rect">
+            <a:avLst/>
+          </a:prstGeom>
+          <a:noFill/>
+        </p:spPr>
+        <p:txBody>
+          <a:bodyPr wrap="square" anchor="t" lIns="0" rIns="0" tIns="0" bIns="0">
+            <a:spAutoFit/>
+          </a:bodyPr>
+          <a:lstStyle/>
+          <a:p>
+            <a:pPr algn="l">
+              <a:spcAft>
+                <a:spcPts val="1440"/>
+              </a:spcAft>
+            </a:pPr>
+            <a:r>
+              <a:rPr sz="3200" b="1" i="0">
+                <a:solidFill>
+                  <a:srgbClr val="1C1B19"/>
+                </a:solidFill>
+                <a:latin typeface="Source Serif 4"/>
+              </a:rPr>
+              <a:t>How you read the signal matters, a little.</a:t>
+            </a:r>
+          </a:p>
+        </p:txBody>
+      </p:sp>
+      <p:sp>
+        <p:nvSpPr>
+          <p:cNvPr id="7" name="TextBox 6"/>
+          <p:cNvSpPr txBox="1"/>
+          <p:nvPr/>
+        </p:nvSpPr>
+        <p:spPr>
+          <a:xfrm>
+            <a:off x="822960" y="2514600"/>
+            <a:ext cx="10515600" cy="2194560"/>
+          </a:xfrm>
+          <a:prstGeom prst="rect">
+            <a:avLst/>
+          </a:prstGeom>
+          <a:noFill/>
+        </p:spPr>
+        <p:txBody>
+          <a:bodyPr wrap="square" anchor="t" lIns="0" rIns="0" tIns="0" bIns="0">
+            <a:spAutoFit/>
+          </a:bodyPr>
+          <a:lstStyle/>
+          <a:p>
+            <a:pPr algn="l">
+              <a:spcAft>
+                <a:spcPts val="855"/>
+              </a:spcAft>
+            </a:pPr>
+            <a:r>
+              <a:rPr sz="1900" b="0" i="0">
+                <a:solidFill>
+                  <a:srgbClr val="1C1B19"/>
+                </a:solidFill>
+                <a:latin typeface="Source Serif 4"/>
+              </a:rPr>
+              <a:t>•  Teens who learned a racing heart can fuel them had steadier bodies under pressure.</a:t>
+            </a:r>
+          </a:p>
+          <a:p>
+            <a:pPr algn="l">
+              <a:spcAft>
+                <a:spcPts val="855"/>
+              </a:spcAft>
+            </a:pPr>
+            <a:r>
+              <a:rPr sz="1900" b="0" i="0">
+                <a:solidFill>
+                  <a:srgbClr val="1C1B19"/>
+                </a:solidFill>
+                <a:latin typeface="Source Serif 4"/>
+              </a:rPr>
+              <a:t>•  Less anxiety and better grades, in several studies.</a:t>
+            </a:r>
+          </a:p>
+          <a:p>
+            <a:pPr algn="l">
+              <a:spcAft>
+                <a:spcPts val="855"/>
+              </a:spcAft>
+            </a:pPr>
+            <a:r>
+              <a:rPr sz="1900" b="0" i="0">
+                <a:solidFill>
+                  <a:srgbClr val="1C1B19"/>
+                </a:solidFill>
+                <a:latin typeface="Source Serif 4"/>
+              </a:rPr>
+              <a:t>•  The pounding didn't stop. They read it differently.</a:t>
+            </a:r>
+          </a:p>
+          <a:p>
+            <a:pPr algn="l">
+              <a:spcAft>
+                <a:spcPts val="855"/>
+              </a:spcAft>
+            </a:pPr>
+            <a:r>
+              <a:rPr sz="1900" b="0" i="0">
+                <a:solidFill>
+                  <a:srgbClr val="1C1B19"/>
+                </a:solidFill>
+                <a:latin typeface="Source Serif 4"/>
+              </a:rPr>
+              <a:t>•  Stress that never shuts off is what wears the body down.</a:t>
+            </a:r>
+          </a:p>
+        </p:txBody>
+      </p:sp>
+      <p:sp>
+        <p:nvSpPr>
+          <p:cNvPr id="8" name="Rectangle 7"/>
           <p:cNvSpPr/>
           <p:nvPr/>
         </p:nvSpPr>
         <p:spPr>
           <a:xfrm>
-            <a:off x="822960" y="1371600"/>
-            <a:ext cx="73152" cy="3566160"/>
+            <a:off x="822960" y="4892040"/>
+            <a:ext cx="73152" cy="1097280"/>
           </a:xfrm>
           <a:prstGeom prst="rect">
             <a:avLst/>
@@ -7469,53 +7974,14 @@
       </p:sp>
       <p:sp>
         <p:nvSpPr>
-          <p:cNvPr id="6" name="TextBox 5"/>
+          <p:cNvPr id="9" name="TextBox 8"/>
           <p:cNvSpPr txBox="1"/>
           <p:nvPr/>
         </p:nvSpPr>
         <p:spPr>
           <a:xfrm>
-            <a:off x="1188720" y="1371600"/>
-            <a:ext cx="10058400" cy="3566160"/>
-          </a:xfrm>
-          <a:prstGeom prst="rect">
-            <a:avLst/>
-          </a:prstGeom>
-          <a:noFill/>
-        </p:spPr>
-        <p:txBody>
-          <a:bodyPr wrap="square" anchor="ctr" lIns="0" rIns="0" tIns="0" bIns="0">
-            <a:spAutoFit/>
-          </a:bodyPr>
-          <a:lstStyle/>
-          <a:p>
-            <a:pPr algn="l">
-              <a:spcAft>
-                <a:spcPts val="1800"/>
-              </a:spcAft>
-            </a:pPr>
-            <a:r>
-              <a:rPr sz="4000" b="0" i="1">
-                <a:solidFill>
-                  <a:srgbClr val="1C1B19"/>
-                </a:solidFill>
-                <a:latin typeface="Source Serif 4"/>
-              </a:rPr>
-              <a:t>Thirty seconds. Jumping jacks, fast claps, or tap your feet. Then notice.</a:t>
-            </a:r>
-          </a:p>
-        </p:txBody>
-      </p:sp>
-      <p:sp>
-        <p:nvSpPr>
-          <p:cNvPr id="7" name="TextBox 6"/>
-          <p:cNvSpPr txBox="1"/>
-          <p:nvPr/>
-        </p:nvSpPr>
-        <p:spPr>
-          <a:xfrm>
-            <a:off x="1188720" y="5120640"/>
-            <a:ext cx="10058400" cy="914400"/>
+            <a:off x="1097280" y="4892040"/>
+            <a:ext cx="10241280" cy="1188720"/>
           </a:xfrm>
           <a:prstGeom prst="rect">
             <a:avLst/>
@@ -7530,17 +7996,33 @@
           <a:p>
             <a:pPr algn="l">
               <a:spcAft>
-                <a:spcPts val="810"/>
-              </a:spcAft>
-            </a:pPr>
-            <a:r>
-              <a:rPr sz="1800" b="0" i="0">
-                <a:solidFill>
-                  <a:srgbClr val="5D5A54"/>
+                <a:spcPts val="855"/>
+              </a:spcAft>
+            </a:pPr>
+            <a:r>
+              <a:rPr sz="1200" b="1" i="0">
+                <a:solidFill>
+                  <a:srgbClr val="F47B20"/>
                 </a:solidFill>
                 <a:latin typeface="Inter Tight"/>
               </a:rPr>
-              <a:t>What changed? Heart, breathing, hands, face?</a:t>
+              <a:t>IN CLASS</a:t>
+            </a:r>
+          </a:p>
+          <a:p>
+            <a:pPr algn="l">
+              <a:spcAft>
+                <a:spcPts val="855"/>
+              </a:spcAft>
+            </a:pPr>
+            <a:r>
+              <a:rPr sz="1900" b="0" i="0">
+                <a:solidFill>
+                  <a:srgbClr val="1C1B19"/>
+                </a:solidFill>
+                <a:latin typeface="Source Serif 4"/>
+              </a:rPr>
+              <a:t>Say it straight: this is a real boost, not a magic switch.</a:t>
             </a:r>
           </a:p>
         </p:txBody>
@@ -7649,7 +8131,7 @@
                 </a:solidFill>
                 <a:latin typeface="Inter Tight"/>
               </a:rPr>
-              <a:t>READ THE SIGNAL</a:t>
+              <a:t>SIGNAL OR STUCK ON?</a:t>
             </a:r>
           </a:p>
         </p:txBody>
@@ -7727,7 +8209,7 @@
                 </a:solidFill>
                 <a:latin typeface="Source Serif 4"/>
               </a:rPr>
-              <a:t>What each change is for</a:t>
+              <a:t>Which is which?</a:t>
             </a:r>
           </a:p>
         </p:txBody>
@@ -7741,7 +8223,7 @@
         <p:spPr>
           <a:xfrm>
             <a:off x="822960" y="2103120"/>
-            <a:ext cx="5120640" cy="3931920"/>
+            <a:ext cx="2423160" cy="3840480"/>
           </a:xfrm>
           <a:prstGeom prst="rect">
             <a:avLst/>
@@ -7786,8 +8268,8 @@
         </p:nvSpPr>
         <p:spPr>
           <a:xfrm>
-            <a:off x="1097280" y="2286000"/>
-            <a:ext cx="4572000" cy="457200"/>
+            <a:off x="1051560" y="2286000"/>
+            <a:ext cx="1965960" cy="365760"/>
           </a:xfrm>
           <a:prstGeom prst="rect">
             <a:avLst/>
@@ -7812,7 +8294,7 @@
                 </a:solidFill>
                 <a:latin typeface="Inter Tight"/>
               </a:rPr>
-              <a:t>YOU FEEL</a:t>
+              <a:t>MIA</a:t>
             </a:r>
           </a:p>
         </p:txBody>
@@ -7825,8 +8307,8 @@
         </p:nvSpPr>
         <p:spPr>
           <a:xfrm>
-            <a:off x="1097280" y="2788920"/>
-            <a:ext cx="4572000" cy="3108960"/>
+            <a:off x="1051560" y="2743200"/>
+            <a:ext cx="1965960" cy="3017520"/>
           </a:xfrm>
           <a:prstGeom prst="rect">
             <a:avLst/>
@@ -7841,81 +8323,17 @@
           <a:p>
             <a:pPr algn="l">
               <a:spcAft>
-                <a:spcPts val="855"/>
-              </a:spcAft>
-            </a:pPr>
-            <a:r>
-              <a:rPr sz="1900" b="0" i="0">
+                <a:spcPts val="810"/>
+              </a:spcAft>
+            </a:pPr>
+            <a:r>
+              <a:rPr sz="1800" b="0" i="0">
                 <a:solidFill>
                   <a:srgbClr val="1C1B19"/>
                 </a:solidFill>
                 <a:latin typeface="Source Serif 4"/>
               </a:rPr>
-              <a:t>Racing heart</a:t>
-            </a:r>
-          </a:p>
-          <a:p>
-            <a:pPr algn="l">
-              <a:spcAft>
-                <a:spcPts val="855"/>
-              </a:spcAft>
-            </a:pPr>
-            <a:r>
-              <a:rPr sz="1900" b="0" i="0">
-                <a:solidFill>
-                  <a:srgbClr val="1C1B19"/>
-                </a:solidFill>
-                <a:latin typeface="Source Serif 4"/>
-              </a:rPr>
-              <a:t>Fast breathing</a:t>
-            </a:r>
-          </a:p>
-          <a:p>
-            <a:pPr algn="l">
-              <a:spcAft>
-                <a:spcPts val="855"/>
-              </a:spcAft>
-            </a:pPr>
-            <a:r>
-              <a:rPr sz="1900" b="0" i="0">
-                <a:solidFill>
-                  <a:srgbClr val="1C1B19"/>
-                </a:solidFill>
-                <a:latin typeface="Source Serif 4"/>
-              </a:rPr>
-              <a:t>Butterflies</a:t>
-            </a:r>
-          </a:p>
-          <a:p>
-            <a:pPr algn="l">
-              <a:spcAft>
-                <a:spcPts val="855"/>
-              </a:spcAft>
-            </a:pPr>
-            <a:r>
-              <a:rPr sz="1900" b="0" i="0">
-                <a:solidFill>
-                  <a:srgbClr val="1C1B19"/>
-                </a:solidFill>
-                <a:latin typeface="Source Serif 4"/>
-              </a:rPr>
-              <a:t>Sweaty hands</a:t>
-            </a:r>
-          </a:p>
-          <a:p>
-            <a:pPr algn="l">
-              <a:spcAft>
-                <a:spcPts val="855"/>
-              </a:spcAft>
-            </a:pPr>
-            <a:r>
-              <a:rPr sz="1900" b="0" i="0">
-                <a:solidFill>
-                  <a:srgbClr val="1C1B19"/>
-                </a:solidFill>
-                <a:latin typeface="Source Serif 4"/>
-              </a:rPr>
-              <a:t>Laser focus</a:t>
+              <a:t>Heart pounding in the hallway before her solo. After the concert she's wiped out and happy.</a:t>
             </a:r>
           </a:p>
         </p:txBody>
@@ -7928,8 +8346,8 @@
         </p:nvSpPr>
         <p:spPr>
           <a:xfrm>
-            <a:off x="6309360" y="2103120"/>
-            <a:ext cx="5120640" cy="3931920"/>
+            <a:off x="3520439" y="2103120"/>
+            <a:ext cx="2423160" cy="3840480"/>
           </a:xfrm>
           <a:prstGeom prst="rect">
             <a:avLst/>
@@ -7974,8 +8392,8 @@
         </p:nvSpPr>
         <p:spPr>
           <a:xfrm>
-            <a:off x="6583680" y="2286000"/>
-            <a:ext cx="4572000" cy="457200"/>
+            <a:off x="3749039" y="2286000"/>
+            <a:ext cx="1965960" cy="365760"/>
           </a:xfrm>
           <a:prstGeom prst="rect">
             <a:avLst/>
@@ -8000,7 +8418,7 @@
                 </a:solidFill>
                 <a:latin typeface="Inter Tight"/>
               </a:rPr>
-              <a:t>YOUR BODY IS</a:t>
+              <a:t>ANDRE</a:t>
             </a:r>
           </a:p>
         </p:txBody>
@@ -8013,8 +8431,8 @@
         </p:nvSpPr>
         <p:spPr>
           <a:xfrm>
-            <a:off x="6583680" y="2788920"/>
-            <a:ext cx="4572000" cy="3108960"/>
+            <a:off x="3749039" y="2743200"/>
+            <a:ext cx="1965960" cy="3017520"/>
           </a:xfrm>
           <a:prstGeom prst="rect">
             <a:avLst/>
@@ -8029,81 +8447,265 @@
           <a:p>
             <a:pPr algn="l">
               <a:spcAft>
-                <a:spcPts val="855"/>
-              </a:spcAft>
-            </a:pPr>
-            <a:r>
-              <a:rPr sz="1900" b="0" i="0">
+                <a:spcPts val="810"/>
+              </a:spcAft>
+            </a:pPr>
+            <a:r>
+              <a:rPr sz="1800" b="0" i="0">
                 <a:solidFill>
                   <a:srgbClr val="1C1B19"/>
                 </a:solidFill>
                 <a:latin typeface="Source Serif 4"/>
               </a:rPr>
-              <a:t>Sending blood to muscles and brain</a:t>
-            </a:r>
-          </a:p>
-          <a:p>
-            <a:pPr algn="l">
-              <a:spcAft>
-                <a:spcPts val="855"/>
-              </a:spcAft>
-            </a:pPr>
-            <a:r>
-              <a:rPr sz="1900" b="0" i="0">
+              <a:t>Hasn't slept well in a month. His family might have to move, and he thinks about it all through class.</a:t>
+            </a:r>
+          </a:p>
+        </p:txBody>
+      </p:sp>
+      <p:sp>
+        <p:nvSpPr>
+          <p:cNvPr id="12" name="Rectangle 11"/>
+          <p:cNvSpPr/>
+          <p:nvPr/>
+        </p:nvSpPr>
+        <p:spPr>
+          <a:xfrm>
+            <a:off x="6217920" y="2103120"/>
+            <a:ext cx="2423160" cy="3840480"/>
+          </a:xfrm>
+          <a:prstGeom prst="rect">
+            <a:avLst/>
+          </a:prstGeom>
+          <a:solidFill>
+            <a:srgbClr val="FFFFFF"/>
+          </a:solidFill>
+          <a:ln w="15875">
+            <a:solidFill>
+              <a:srgbClr val="D8D2C6"/>
+            </a:solidFill>
+          </a:ln>
+          <a:effectLst/>
+        </p:spPr>
+        <p:style>
+          <a:lnRef idx="1">
+            <a:schemeClr val="accent1"/>
+          </a:lnRef>
+          <a:fillRef idx="3">
+            <a:schemeClr val="accent1"/>
+          </a:fillRef>
+          <a:effectRef idx="2">
+            <a:schemeClr val="accent1"/>
+          </a:effectRef>
+          <a:fontRef idx="minor">
+            <a:schemeClr val="lt1"/>
+          </a:fontRef>
+        </p:style>
+        <p:txBody>
+          <a:bodyPr rtlCol="0" anchor="ctr"/>
+          <a:lstStyle/>
+          <a:p>
+            <a:pPr algn="ctr"/>
+          </a:p>
+        </p:txBody>
+      </p:sp>
+      <p:sp>
+        <p:nvSpPr>
+          <p:cNvPr id="13" name="TextBox 12"/>
+          <p:cNvSpPr txBox="1"/>
+          <p:nvPr/>
+        </p:nvSpPr>
+        <p:spPr>
+          <a:xfrm>
+            <a:off x="6446520" y="2286000"/>
+            <a:ext cx="1965960" cy="365760"/>
+          </a:xfrm>
+          <a:prstGeom prst="rect">
+            <a:avLst/>
+          </a:prstGeom>
+          <a:noFill/>
+        </p:spPr>
+        <p:txBody>
+          <a:bodyPr wrap="square" anchor="t" lIns="0" rIns="0" tIns="0" bIns="0">
+            <a:spAutoFit/>
+          </a:bodyPr>
+          <a:lstStyle/>
+          <a:p>
+            <a:pPr algn="l">
+              <a:spcAft>
+                <a:spcPts val="585"/>
+              </a:spcAft>
+            </a:pPr>
+            <a:r>
+              <a:rPr sz="1300" b="1" i="0">
+                <a:solidFill>
+                  <a:srgbClr val="0B2D5B"/>
+                </a:solidFill>
+                <a:latin typeface="Inter Tight"/>
+              </a:rPr>
+              <a:t>SAM</a:t>
+            </a:r>
+          </a:p>
+        </p:txBody>
+      </p:sp>
+      <p:sp>
+        <p:nvSpPr>
+          <p:cNvPr id="14" name="TextBox 13"/>
+          <p:cNvSpPr txBox="1"/>
+          <p:nvPr/>
+        </p:nvSpPr>
+        <p:spPr>
+          <a:xfrm>
+            <a:off x="6446520" y="2743200"/>
+            <a:ext cx="1965960" cy="3017520"/>
+          </a:xfrm>
+          <a:prstGeom prst="rect">
+            <a:avLst/>
+          </a:prstGeom>
+          <a:noFill/>
+        </p:spPr>
+        <p:txBody>
+          <a:bodyPr wrap="square" anchor="t" lIns="0" rIns="0" tIns="0" bIns="0">
+            <a:spAutoFit/>
+          </a:bodyPr>
+          <a:lstStyle/>
+          <a:p>
+            <a:pPr algn="l">
+              <a:spcAft>
+                <a:spcPts val="810"/>
+              </a:spcAft>
+            </a:pPr>
+            <a:r>
+              <a:rPr sz="1800" b="0" i="0">
                 <a:solidFill>
                   <a:srgbClr val="1C1B19"/>
                 </a:solidFill>
                 <a:latin typeface="Source Serif 4"/>
               </a:rPr>
-              <a:t>Taking in more oxygen</a:t>
-            </a:r>
-          </a:p>
-          <a:p>
-            <a:pPr algn="l">
-              <a:spcAft>
-                <a:spcPts val="855"/>
-              </a:spcAft>
-            </a:pPr>
-            <a:r>
-              <a:rPr sz="1900" b="0" i="0">
+              <a:t>Nervous all week about a big test. Once it's over, Sam sleeps nine hours.</a:t>
+            </a:r>
+          </a:p>
+        </p:txBody>
+      </p:sp>
+      <p:sp>
+        <p:nvSpPr>
+          <p:cNvPr id="15" name="Rectangle 14"/>
+          <p:cNvSpPr/>
+          <p:nvPr/>
+        </p:nvSpPr>
+        <p:spPr>
+          <a:xfrm>
+            <a:off x="8915400" y="2103120"/>
+            <a:ext cx="2423160" cy="3840480"/>
+          </a:xfrm>
+          <a:prstGeom prst="rect">
+            <a:avLst/>
+          </a:prstGeom>
+          <a:solidFill>
+            <a:srgbClr val="FFFFFF"/>
+          </a:solidFill>
+          <a:ln w="15875">
+            <a:solidFill>
+              <a:srgbClr val="D8D2C6"/>
+            </a:solidFill>
+          </a:ln>
+          <a:effectLst/>
+        </p:spPr>
+        <p:style>
+          <a:lnRef idx="1">
+            <a:schemeClr val="accent1"/>
+          </a:lnRef>
+          <a:fillRef idx="3">
+            <a:schemeClr val="accent1"/>
+          </a:fillRef>
+          <a:effectRef idx="2">
+            <a:schemeClr val="accent1"/>
+          </a:effectRef>
+          <a:fontRef idx="minor">
+            <a:schemeClr val="lt1"/>
+          </a:fontRef>
+        </p:style>
+        <p:txBody>
+          <a:bodyPr rtlCol="0" anchor="ctr"/>
+          <a:lstStyle/>
+          <a:p>
+            <a:pPr algn="ctr"/>
+          </a:p>
+        </p:txBody>
+      </p:sp>
+      <p:sp>
+        <p:nvSpPr>
+          <p:cNvPr id="16" name="TextBox 15"/>
+          <p:cNvSpPr txBox="1"/>
+          <p:nvPr/>
+        </p:nvSpPr>
+        <p:spPr>
+          <a:xfrm>
+            <a:off x="9144000" y="2286000"/>
+            <a:ext cx="1965960" cy="365760"/>
+          </a:xfrm>
+          <a:prstGeom prst="rect">
+            <a:avLst/>
+          </a:prstGeom>
+          <a:noFill/>
+        </p:spPr>
+        <p:txBody>
+          <a:bodyPr wrap="square" anchor="t" lIns="0" rIns="0" tIns="0" bIns="0">
+            <a:spAutoFit/>
+          </a:bodyPr>
+          <a:lstStyle/>
+          <a:p>
+            <a:pPr algn="l">
+              <a:spcAft>
+                <a:spcPts val="585"/>
+              </a:spcAft>
+            </a:pPr>
+            <a:r>
+              <a:rPr sz="1300" b="1" i="0">
+                <a:solidFill>
+                  <a:srgbClr val="0B2D5B"/>
+                </a:solidFill>
+                <a:latin typeface="Inter Tight"/>
+              </a:rPr>
+              <a:t>LENA</a:t>
+            </a:r>
+          </a:p>
+        </p:txBody>
+      </p:sp>
+      <p:sp>
+        <p:nvSpPr>
+          <p:cNvPr id="17" name="TextBox 16"/>
+          <p:cNvSpPr txBox="1"/>
+          <p:nvPr/>
+        </p:nvSpPr>
+        <p:spPr>
+          <a:xfrm>
+            <a:off x="9144000" y="2743200"/>
+            <a:ext cx="1965960" cy="3017520"/>
+          </a:xfrm>
+          <a:prstGeom prst="rect">
+            <a:avLst/>
+          </a:prstGeom>
+          <a:noFill/>
+        </p:spPr>
+        <p:txBody>
+          <a:bodyPr wrap="square" anchor="t" lIns="0" rIns="0" tIns="0" bIns="0">
+            <a:spAutoFit/>
+          </a:bodyPr>
+          <a:lstStyle/>
+          <a:p>
+            <a:pPr algn="l">
+              <a:spcAft>
+                <a:spcPts val="810"/>
+              </a:spcAft>
+            </a:pPr>
+            <a:r>
+              <a:rPr sz="1800" b="0" i="0">
                 <a:solidFill>
                   <a:srgbClr val="1C1B19"/>
                 </a:solidFill>
                 <a:latin typeface="Source Serif 4"/>
               </a:rPr>
-              <a:t>Moving blood away from your stomach</a:t>
-            </a:r>
-          </a:p>
-          <a:p>
-            <a:pPr algn="l">
-              <a:spcAft>
-                <a:spcPts val="855"/>
-              </a:spcAft>
-            </a:pPr>
-            <a:r>
-              <a:rPr sz="1900" b="0" i="0">
-                <a:solidFill>
-                  <a:srgbClr val="1C1B19"/>
-                </a:solidFill>
-                <a:latin typeface="Source Serif 4"/>
-              </a:rPr>
-              <a:t>Turning the cooling system on early</a:t>
-            </a:r>
-          </a:p>
-          <a:p>
-            <a:pPr algn="l">
-              <a:spcAft>
-                <a:spcPts val="855"/>
-              </a:spcAft>
-            </a:pPr>
-            <a:r>
-              <a:rPr sz="1900" b="0" i="0">
-                <a:solidFill>
-                  <a:srgbClr val="1C1B19"/>
-                </a:solidFill>
-                <a:latin typeface="Source Serif 4"/>
-              </a:rPr>
-              <a:t>Zooming in on what matters</a:t>
+              <a:t>Gets comments about her accent most days. Her stomach hurts every morning before school.</a:t>
             </a:r>
           </a:p>
         </p:txBody>
@@ -8212,7 +8814,7 @@
                 </a:solidFill>
                 <a:latin typeface="Inter Tight"/>
               </a:rPr>
-              <a:t>BUILT TO SWITCH OFF</a:t>
+              <a:t>BEFORE YOU GO</a:t>
             </a:r>
           </a:p>
         </p:txBody>
@@ -8264,7 +8866,7 @@
         </p:nvSpPr>
         <p:spPr>
           <a:xfrm>
-            <a:off x="822960" y="1005840"/>
+            <a:off x="822960" y="1188720"/>
             <a:ext cx="10515600" cy="914400"/>
           </a:xfrm>
           <a:prstGeom prst="rect">
@@ -8280,31 +8882,70 @@
           <a:p>
             <a:pPr algn="l">
               <a:spcAft>
-                <a:spcPts val="1530"/>
-              </a:spcAft>
-            </a:pPr>
-            <a:r>
-              <a:rPr sz="3400" b="1" i="0">
+                <a:spcPts val="1620"/>
+              </a:spcAft>
+            </a:pPr>
+            <a:r>
+              <a:rPr sz="3600" b="1" i="0">
                 <a:solidFill>
                   <a:srgbClr val="1C1B19"/>
                 </a:solidFill>
                 <a:latin typeface="Source Serif 4"/>
               </a:rPr>
-              <a:t>Signal, effort, recovery</a:t>
-            </a:r>
-          </a:p>
-        </p:txBody>
-      </p:sp>
-      <p:sp>
-        <p:nvSpPr>
-          <p:cNvPr id="6" name="Rectangle 5"/>
+              <a:t>Signal, or stuck on?</a:t>
+            </a:r>
+          </a:p>
+        </p:txBody>
+      </p:sp>
+      <p:sp>
+        <p:nvSpPr>
+          <p:cNvPr id="6" name="TextBox 5"/>
+          <p:cNvSpPr txBox="1"/>
+          <p:nvPr/>
+        </p:nvSpPr>
+        <p:spPr>
+          <a:xfrm>
+            <a:off x="822960" y="2286000"/>
+            <a:ext cx="10515600" cy="1463040"/>
+          </a:xfrm>
+          <a:prstGeom prst="rect">
+            <a:avLst/>
+          </a:prstGeom>
+          <a:noFill/>
+        </p:spPr>
+        <p:txBody>
+          <a:bodyPr wrap="square" anchor="t" lIns="0" rIns="0" tIns="0" bIns="0">
+            <a:spAutoFit/>
+          </a:bodyPr>
+          <a:lstStyle/>
+          <a:p>
+            <a:pPr algn="l">
+              <a:spcAft>
+                <a:spcPts val="1080"/>
+              </a:spcAft>
+            </a:pPr>
+            <a:r>
+              <a:rPr sz="2400" b="0" i="0">
+                <a:solidFill>
+                  <a:srgbClr val="1C1B19"/>
+                </a:solidFill>
+                <a:latin typeface="Source Serif 4"/>
+              </a:rPr>
+              <a:t>Pick one thing from the student page to try. Keep it to yourself.</a:t>
+            </a:r>
+          </a:p>
+        </p:txBody>
+      </p:sp>
+      <p:sp>
+        <p:nvSpPr>
+          <p:cNvPr id="7" name="Rectangle 6"/>
           <p:cNvSpPr/>
           <p:nvPr/>
         </p:nvSpPr>
         <p:spPr>
           <a:xfrm>
-            <a:off x="822960" y="2743200"/>
-            <a:ext cx="1874519" cy="1005840"/>
+            <a:off x="822960" y="4023360"/>
+            <a:ext cx="10515600" cy="1371600"/>
           </a:xfrm>
           <a:prstGeom prst="rect">
             <a:avLst/>
@@ -8314,7 +8955,7 @@
           </a:solidFill>
           <a:ln w="15875">
             <a:solidFill>
-              <a:srgbClr val="0B2D5B"/>
+              <a:srgbClr val="1C1B19"/>
             </a:solidFill>
           </a:ln>
           <a:effectLst/>
@@ -8343,14 +8984,14 @@
       </p:sp>
       <p:sp>
         <p:nvSpPr>
-          <p:cNvPr id="7" name="TextBox 6"/>
+          <p:cNvPr id="8" name="TextBox 7"/>
           <p:cNvSpPr txBox="1"/>
           <p:nvPr/>
         </p:nvSpPr>
         <p:spPr>
           <a:xfrm>
-            <a:off x="822960" y="2743200"/>
-            <a:ext cx="1874519" cy="1005840"/>
+            <a:off x="1097280" y="4206240"/>
+            <a:ext cx="10058400" cy="365760"/>
           </a:xfrm>
           <a:prstGeom prst="rect">
             <a:avLst/>
@@ -8358,85 +8999,112 @@
           <a:noFill/>
         </p:spPr>
         <p:txBody>
-          <a:bodyPr wrap="square" anchor="ctr" lIns="0" rIns="0" tIns="0" bIns="0">
+          <a:bodyPr wrap="square" anchor="t" lIns="0" rIns="0" tIns="0" bIns="0">
             <a:spAutoFit/>
           </a:bodyPr>
           <a:lstStyle/>
           <a:p>
-            <a:pPr algn="ctr">
+            <a:pPr algn="l">
+              <a:spcAft>
+                <a:spcPts val="540"/>
+              </a:spcAft>
+            </a:pPr>
+            <a:r>
+              <a:rPr sz="1200" b="1" i="0">
+                <a:solidFill>
+                  <a:srgbClr val="0B2D5B"/>
+                </a:solidFill>
+                <a:latin typeface="Inter Tight"/>
+              </a:rPr>
+              <a:t>STUDENT PAGE</a:t>
+            </a:r>
+          </a:p>
+        </p:txBody>
+      </p:sp>
+      <p:sp>
+        <p:nvSpPr>
+          <p:cNvPr id="9" name="TextBox 8"/>
+          <p:cNvSpPr txBox="1"/>
+          <p:nvPr/>
+        </p:nvSpPr>
+        <p:spPr>
+          <a:xfrm>
+            <a:off x="1097280" y="4617720"/>
+            <a:ext cx="10058400" cy="640080"/>
+          </a:xfrm>
+          <a:prstGeom prst="rect">
+            <a:avLst/>
+          </a:prstGeom>
+          <a:noFill/>
+        </p:spPr>
+        <p:txBody>
+          <a:bodyPr wrap="square" anchor="t" lIns="0" rIns="0" tIns="0" bIns="0">
+            <a:spAutoFit/>
+          </a:bodyPr>
+          <a:lstStyle/>
+          <a:p>
+            <a:pPr algn="l">
               <a:spcAft>
                 <a:spcPts val="900"/>
               </a:spcAft>
             </a:pPr>
             <a:r>
-              <a:rPr sz="2000" b="1" i="0">
+              <a:rPr sz="2000" b="0" i="0">
                 <a:solidFill>
                   <a:srgbClr val="1C1B19"/>
                 </a:solidFill>
-                <a:latin typeface="Source Serif 4"/>
-              </a:rPr>
-              <a:t>Challenge</a:t>
-            </a:r>
-          </a:p>
-        </p:txBody>
-      </p:sp>
-      <p:cxnSp>
-        <p:nvCxnSpPr>
-          <p:cNvPr id="8" name="Connector 7"/>
-          <p:cNvCxnSpPr/>
-          <p:nvPr/>
-        </p:nvCxnSpPr>
-        <p:spPr>
-          <a:xfrm>
-            <a:off x="2752344" y="3246120"/>
-            <a:ext cx="896112" cy="0"/>
-          </a:xfrm>
-          <a:prstGeom prst="line">
-            <a:avLst/>
-          </a:prstGeom>
-          <a:ln w="31750">
-            <a:solidFill>
-              <a:srgbClr val="F47B20"/>
-            </a:solidFill>
-            <a:tailEnd type="triangle"/>
-          </a:ln>
-        </p:spPr>
-        <p:style>
-          <a:lnRef idx="2">
-            <a:schemeClr val="accent1"/>
-          </a:lnRef>
-          <a:fillRef idx="0">
-            <a:schemeClr val="accent1"/>
-          </a:fillRef>
-          <a:effectRef idx="1">
-            <a:schemeClr val="accent1"/>
-          </a:effectRef>
-          <a:fontRef idx="minor">
-            <a:schemeClr val="tx1"/>
-          </a:fontRef>
-        </p:style>
-      </p:cxnSp>
-      <p:sp>
-        <p:nvSpPr>
-          <p:cNvPr id="9" name="Rectangle 8"/>
+                <a:latin typeface="Inter Tight"/>
+              </a:rPr>
+              <a:t>https://rmwtoolkit.github.io/bcds-toolkit/stress-is-a-signal-high-school.html</a:t>
+            </a:r>
+          </a:p>
+        </p:txBody>
+      </p:sp>
+    </p:spTree>
+  </p:cSld>
+  <p:clrMapOvr>
+    <a:masterClrMapping/>
+  </p:clrMapOvr>
+</p:sld>
+</file>
+
+<file path=ppt/slides/slide9.xml><?xml version="1.0" encoding="utf-8"?>
+<p:sld xmlns:a="http://schemas.openxmlformats.org/drawingml/2006/main" xmlns:p="http://schemas.openxmlformats.org/presentationml/2006/main" xmlns:r="http://schemas.openxmlformats.org/officeDocument/2006/relationships" show="0">
+  <p:cSld>
+    <p:bg>
+      <p:bgPr>
+        <a:solidFill>
+          <a:srgbClr val="EEEBE4"/>
+        </a:solidFill>
+        <a:effectLst/>
+      </p:bgPr>
+    </p:bg>
+    <p:spTree>
+      <p:nvGrpSpPr>
+        <p:cNvPr id="1" name=""/>
+        <p:cNvGrpSpPr/>
+        <p:nvPr/>
+      </p:nvGrpSpPr>
+      <p:grpSpPr/>
+      <p:sp>
+        <p:nvSpPr>
+          <p:cNvPr id="2" name="Rectangle 1"/>
           <p:cNvSpPr/>
           <p:nvPr/>
         </p:nvSpPr>
         <p:spPr>
           <a:xfrm>
-            <a:off x="3703320" y="2743200"/>
-            <a:ext cx="1874519" cy="1005840"/>
+            <a:off x="0" y="0"/>
+            <a:ext cx="12191695" cy="384048"/>
           </a:xfrm>
           <a:prstGeom prst="rect">
             <a:avLst/>
           </a:prstGeom>
           <a:solidFill>
-            <a:srgbClr val="FFFFFF"/>
+            <a:srgbClr val="0B2D5B"/>
           </a:solidFill>
-          <a:ln w="15875">
-            <a:solidFill>
-              <a:srgbClr val="0B2D5B"/>
-            </a:solidFill>
+          <a:ln>
+            <a:noFill/>
           </a:ln>
           <a:effectLst/>
         </p:spPr>
@@ -8464,295 +9132,14 @@
       </p:sp>
       <p:sp>
         <p:nvSpPr>
-          <p:cNvPr id="10" name="TextBox 9"/>
+          <p:cNvPr id="3" name="TextBox 2"/>
           <p:cNvSpPr txBox="1"/>
           <p:nvPr/>
         </p:nvSpPr>
         <p:spPr>
           <a:xfrm>
-            <a:off x="3703320" y="2743200"/>
-            <a:ext cx="1874519" cy="1005840"/>
-          </a:xfrm>
-          <a:prstGeom prst="rect">
-            <a:avLst/>
-          </a:prstGeom>
-          <a:noFill/>
-        </p:spPr>
-        <p:txBody>
-          <a:bodyPr wrap="square" anchor="ctr" lIns="0" rIns="0" tIns="0" bIns="0">
-            <a:spAutoFit/>
-          </a:bodyPr>
-          <a:lstStyle/>
-          <a:p>
-            <a:pPr algn="ctr">
-              <a:spcAft>
-                <a:spcPts val="900"/>
-              </a:spcAft>
-            </a:pPr>
-            <a:r>
-              <a:rPr sz="2000" b="1" i="0">
-                <a:solidFill>
-                  <a:srgbClr val="1C1B19"/>
-                </a:solidFill>
-                <a:latin typeface="Source Serif 4"/>
-              </a:rPr>
-              <a:t>Signal</a:t>
-            </a:r>
-          </a:p>
-        </p:txBody>
-      </p:sp>
-      <p:cxnSp>
-        <p:nvCxnSpPr>
-          <p:cNvPr id="11" name="Connector 10"/>
-          <p:cNvCxnSpPr/>
-          <p:nvPr/>
-        </p:nvCxnSpPr>
-        <p:spPr>
-          <a:xfrm>
-            <a:off x="5632704" y="3246120"/>
-            <a:ext cx="896112" cy="0"/>
-          </a:xfrm>
-          <a:prstGeom prst="line">
-            <a:avLst/>
-          </a:prstGeom>
-          <a:ln w="31750">
-            <a:solidFill>
-              <a:srgbClr val="F47B20"/>
-            </a:solidFill>
-            <a:tailEnd type="triangle"/>
-          </a:ln>
-        </p:spPr>
-        <p:style>
-          <a:lnRef idx="2">
-            <a:schemeClr val="accent1"/>
-          </a:lnRef>
-          <a:fillRef idx="0">
-            <a:schemeClr val="accent1"/>
-          </a:fillRef>
-          <a:effectRef idx="1">
-            <a:schemeClr val="accent1"/>
-          </a:effectRef>
-          <a:fontRef idx="minor">
-            <a:schemeClr val="tx1"/>
-          </a:fontRef>
-        </p:style>
-      </p:cxnSp>
-      <p:sp>
-        <p:nvSpPr>
-          <p:cNvPr id="12" name="Rectangle 11"/>
-          <p:cNvSpPr/>
-          <p:nvPr/>
-        </p:nvSpPr>
-        <p:spPr>
-          <a:xfrm>
-            <a:off x="6583680" y="2743200"/>
-            <a:ext cx="1874519" cy="1005840"/>
-          </a:xfrm>
-          <a:prstGeom prst="rect">
-            <a:avLst/>
-          </a:prstGeom>
-          <a:solidFill>
-            <a:srgbClr val="FFFFFF"/>
-          </a:solidFill>
-          <a:ln w="15875">
-            <a:solidFill>
-              <a:srgbClr val="0B2D5B"/>
-            </a:solidFill>
-          </a:ln>
-          <a:effectLst/>
-        </p:spPr>
-        <p:style>
-          <a:lnRef idx="1">
-            <a:schemeClr val="accent1"/>
-          </a:lnRef>
-          <a:fillRef idx="3">
-            <a:schemeClr val="accent1"/>
-          </a:fillRef>
-          <a:effectRef idx="2">
-            <a:schemeClr val="accent1"/>
-          </a:effectRef>
-          <a:fontRef idx="minor">
-            <a:schemeClr val="lt1"/>
-          </a:fontRef>
-        </p:style>
-        <p:txBody>
-          <a:bodyPr rtlCol="0" anchor="ctr"/>
-          <a:lstStyle/>
-          <a:p>
-            <a:pPr algn="ctr"/>
-          </a:p>
-        </p:txBody>
-      </p:sp>
-      <p:sp>
-        <p:nvSpPr>
-          <p:cNvPr id="13" name="TextBox 12"/>
-          <p:cNvSpPr txBox="1"/>
-          <p:nvPr/>
-        </p:nvSpPr>
-        <p:spPr>
-          <a:xfrm>
-            <a:off x="6583680" y="2743200"/>
-            <a:ext cx="1874519" cy="1005840"/>
-          </a:xfrm>
-          <a:prstGeom prst="rect">
-            <a:avLst/>
-          </a:prstGeom>
-          <a:noFill/>
-        </p:spPr>
-        <p:txBody>
-          <a:bodyPr wrap="square" anchor="ctr" lIns="0" rIns="0" tIns="0" bIns="0">
-            <a:spAutoFit/>
-          </a:bodyPr>
-          <a:lstStyle/>
-          <a:p>
-            <a:pPr algn="ctr">
-              <a:spcAft>
-                <a:spcPts val="900"/>
-              </a:spcAft>
-            </a:pPr>
-            <a:r>
-              <a:rPr sz="2000" b="1" i="0">
-                <a:solidFill>
-                  <a:srgbClr val="1C1B19"/>
-                </a:solidFill>
-                <a:latin typeface="Source Serif 4"/>
-              </a:rPr>
-              <a:t>Effort</a:t>
-            </a:r>
-          </a:p>
-        </p:txBody>
-      </p:sp>
-      <p:cxnSp>
-        <p:nvCxnSpPr>
-          <p:cNvPr id="14" name="Connector 13"/>
-          <p:cNvCxnSpPr/>
-          <p:nvPr/>
-        </p:nvCxnSpPr>
-        <p:spPr>
-          <a:xfrm>
-            <a:off x="8513064" y="3246120"/>
-            <a:ext cx="896112" cy="0"/>
-          </a:xfrm>
-          <a:prstGeom prst="line">
-            <a:avLst/>
-          </a:prstGeom>
-          <a:ln w="31750">
-            <a:solidFill>
-              <a:srgbClr val="F47B20"/>
-            </a:solidFill>
-            <a:tailEnd type="triangle"/>
-          </a:ln>
-        </p:spPr>
-        <p:style>
-          <a:lnRef idx="2">
-            <a:schemeClr val="accent1"/>
-          </a:lnRef>
-          <a:fillRef idx="0">
-            <a:schemeClr val="accent1"/>
-          </a:fillRef>
-          <a:effectRef idx="1">
-            <a:schemeClr val="accent1"/>
-          </a:effectRef>
-          <a:fontRef idx="minor">
-            <a:schemeClr val="tx1"/>
-          </a:fontRef>
-        </p:style>
-      </p:cxnSp>
-      <p:sp>
-        <p:nvSpPr>
-          <p:cNvPr id="15" name="Rectangle 14"/>
-          <p:cNvSpPr/>
-          <p:nvPr/>
-        </p:nvSpPr>
-        <p:spPr>
-          <a:xfrm>
-            <a:off x="9464040" y="2743200"/>
-            <a:ext cx="1874519" cy="1005840"/>
-          </a:xfrm>
-          <a:prstGeom prst="rect">
-            <a:avLst/>
-          </a:prstGeom>
-          <a:solidFill>
-            <a:srgbClr val="FFFFFF"/>
-          </a:solidFill>
-          <a:ln w="15875">
-            <a:solidFill>
-              <a:srgbClr val="0B2D5B"/>
-            </a:solidFill>
-          </a:ln>
-          <a:effectLst/>
-        </p:spPr>
-        <p:style>
-          <a:lnRef idx="1">
-            <a:schemeClr val="accent1"/>
-          </a:lnRef>
-          <a:fillRef idx="3">
-            <a:schemeClr val="accent1"/>
-          </a:fillRef>
-          <a:effectRef idx="2">
-            <a:schemeClr val="accent1"/>
-          </a:effectRef>
-          <a:fontRef idx="minor">
-            <a:schemeClr val="lt1"/>
-          </a:fontRef>
-        </p:style>
-        <p:txBody>
-          <a:bodyPr rtlCol="0" anchor="ctr"/>
-          <a:lstStyle/>
-          <a:p>
-            <a:pPr algn="ctr"/>
-          </a:p>
-        </p:txBody>
-      </p:sp>
-      <p:sp>
-        <p:nvSpPr>
-          <p:cNvPr id="16" name="TextBox 15"/>
-          <p:cNvSpPr txBox="1"/>
-          <p:nvPr/>
-        </p:nvSpPr>
-        <p:spPr>
-          <a:xfrm>
-            <a:off x="9464040" y="2743200"/>
-            <a:ext cx="1874519" cy="1005840"/>
-          </a:xfrm>
-          <a:prstGeom prst="rect">
-            <a:avLst/>
-          </a:prstGeom>
-          <a:noFill/>
-        </p:spPr>
-        <p:txBody>
-          <a:bodyPr wrap="square" anchor="ctr" lIns="0" rIns="0" tIns="0" bIns="0">
-            <a:spAutoFit/>
-          </a:bodyPr>
-          <a:lstStyle/>
-          <a:p>
-            <a:pPr algn="ctr">
-              <a:spcAft>
-                <a:spcPts val="900"/>
-              </a:spcAft>
-            </a:pPr>
-            <a:r>
-              <a:rPr sz="2000" b="1" i="0">
-                <a:solidFill>
-                  <a:srgbClr val="1C1B19"/>
-                </a:solidFill>
-                <a:latin typeface="Source Serif 4"/>
-              </a:rPr>
-              <a:t>Recovery</a:t>
-            </a:r>
-          </a:p>
-        </p:txBody>
-      </p:sp>
-      <p:sp>
-        <p:nvSpPr>
-          <p:cNvPr id="17" name="TextBox 16"/>
-          <p:cNvSpPr txBox="1"/>
-          <p:nvPr/>
-        </p:nvSpPr>
-        <p:spPr>
-          <a:xfrm>
-            <a:off x="822960" y="4160520"/>
-            <a:ext cx="10515600" cy="457200"/>
+            <a:off x="548640" y="100584"/>
+            <a:ext cx="10972800" cy="274320"/>
           </a:xfrm>
           <a:prstGeom prst="rect">
             <a:avLst/>
@@ -8765,33 +9152,33 @@
           </a:bodyPr>
           <a:lstStyle/>
           <a:p>
-            <a:pPr algn="ctr">
-              <a:spcAft>
-                <a:spcPts val="810"/>
-              </a:spcAft>
-            </a:pPr>
-            <a:r>
-              <a:rPr sz="1800" b="1" i="0">
-                <a:solidFill>
-                  <a:srgbClr val="F47B20"/>
+            <a:pPr algn="l">
+              <a:spcAft>
+                <a:spcPts val="495"/>
+              </a:spcAft>
+            </a:pPr>
+            <a:r>
+              <a:rPr sz="1100" b="1" i="0">
+                <a:solidFill>
+                  <a:srgbClr val="FFFFFF"/>
                 </a:solidFill>
                 <a:latin typeface="Inter Tight"/>
               </a:rPr>
-              <a:t>↺  and you're stronger for the next one</a:t>
-            </a:r>
-          </a:p>
-        </p:txBody>
-      </p:sp>
-      <p:sp>
-        <p:nvSpPr>
-          <p:cNvPr id="18" name="TextBox 17"/>
+              <a:t>TEACHER PAGE  ·  skipped when you present  ·  Lesson plan</a:t>
+            </a:r>
+          </a:p>
+        </p:txBody>
+      </p:sp>
+      <p:sp>
+        <p:nvSpPr>
+          <p:cNvPr id="4" name="TextBox 3"/>
           <p:cNvSpPr txBox="1"/>
           <p:nvPr/>
         </p:nvSpPr>
         <p:spPr>
           <a:xfrm>
-            <a:off x="822960" y="4846320"/>
-            <a:ext cx="10515600" cy="1188720"/>
+            <a:off x="548640" y="685800"/>
+            <a:ext cx="10972800" cy="731520"/>
           </a:xfrm>
           <a:prstGeom prst="rect">
             <a:avLst/>
@@ -8804,103 +9191,33 @@
           </a:bodyPr>
           <a:lstStyle/>
           <a:p>
-            <a:pPr algn="ctr">
-              <a:spcAft>
-                <a:spcPts val="900"/>
-              </a:spcAft>
-            </a:pPr>
-            <a:r>
-              <a:rPr sz="2000" b="0" i="1">
-                <a:solidFill>
-                  <a:srgbClr val="5D5A54"/>
+            <a:pPr algn="l">
+              <a:spcAft>
+                <a:spcPts val="1530"/>
+              </a:spcAft>
+            </a:pPr>
+            <a:r>
+              <a:rPr sz="3400" b="1" i="0">
+                <a:solidFill>
+                  <a:srgbClr val="1C1B19"/>
                 </a:solidFill>
                 <a:latin typeface="Source Serif 4"/>
               </a:rPr>
-              <a:t>A zebra runs from a lion for three minutes, then goes back to grazing.</a:t>
-            </a:r>
-          </a:p>
-        </p:txBody>
-      </p:sp>
-    </p:spTree>
-  </p:cSld>
-  <p:clrMapOvr>
-    <a:masterClrMapping/>
-  </p:clrMapOvr>
-</p:sld>
-</file>
-
-<file path=ppt/slides/slide9.xml><?xml version="1.0" encoding="utf-8"?>
-<p:sld xmlns:a="http://schemas.openxmlformats.org/drawingml/2006/main" xmlns:p="http://schemas.openxmlformats.org/presentationml/2006/main" xmlns:r="http://schemas.openxmlformats.org/officeDocument/2006/relationships">
-  <p:cSld>
-    <p:bg>
-      <p:bgPr>
-        <a:solidFill>
-          <a:srgbClr val="F7F4EE"/>
-        </a:solidFill>
-        <a:effectLst/>
-      </p:bgPr>
-    </p:bg>
-    <p:spTree>
-      <p:nvGrpSpPr>
-        <p:cNvPr id="1" name=""/>
-        <p:cNvGrpSpPr/>
-        <p:nvPr/>
-      </p:nvGrpSpPr>
-      <p:grpSpPr/>
-      <p:sp>
-        <p:nvSpPr>
-          <p:cNvPr id="2" name="Rectangle 1"/>
-          <p:cNvSpPr/>
-          <p:nvPr/>
-        </p:nvSpPr>
-        <p:spPr>
-          <a:xfrm>
-            <a:off x="548640" y="502920"/>
-            <a:ext cx="457200" cy="54864"/>
-          </a:xfrm>
-          <a:prstGeom prst="rect">
-            <a:avLst/>
-          </a:prstGeom>
-          <a:solidFill>
-            <a:srgbClr val="F47B20"/>
-          </a:solidFill>
-          <a:ln>
-            <a:noFill/>
-          </a:ln>
-          <a:effectLst/>
-        </p:spPr>
-        <p:style>
-          <a:lnRef idx="1">
-            <a:schemeClr val="accent1"/>
-          </a:lnRef>
-          <a:fillRef idx="3">
-            <a:schemeClr val="accent1"/>
-          </a:fillRef>
-          <a:effectRef idx="2">
-            <a:schemeClr val="accent1"/>
-          </a:effectRef>
-          <a:fontRef idx="minor">
-            <a:schemeClr val="lt1"/>
-          </a:fontRef>
-        </p:style>
-        <p:txBody>
-          <a:bodyPr rtlCol="0" anchor="ctr"/>
-          <a:lstStyle/>
-          <a:p>
-            <a:pPr algn="ctr"/>
-          </a:p>
-        </p:txBody>
-      </p:sp>
-      <p:sp>
-        <p:nvSpPr>
-          <p:cNvPr id="3" name="TextBox 2"/>
+              <a:t>Stress Is a Signal</a:t>
+            </a:r>
+          </a:p>
+        </p:txBody>
+      </p:sp>
+      <p:sp>
+        <p:nvSpPr>
+          <p:cNvPr id="5" name="TextBox 4"/>
           <p:cNvSpPr txBox="1"/>
           <p:nvPr/>
         </p:nvSpPr>
         <p:spPr>
           <a:xfrm>
-            <a:off x="1143000" y="393192"/>
-            <a:ext cx="8229600" cy="274320"/>
+            <a:off x="548640" y="1325880"/>
+            <a:ext cx="10972800" cy="365760"/>
           </a:xfrm>
           <a:prstGeom prst="rect">
             <a:avLst/>
@@ -8915,31 +9232,31 @@
           <a:p>
             <a:pPr algn="l">
               <a:spcAft>
-                <a:spcPts val="540"/>
-              </a:spcAft>
-            </a:pPr>
-            <a:r>
-              <a:rPr sz="1200" b="1" i="0">
+                <a:spcPts val="630"/>
+              </a:spcAft>
+            </a:pPr>
+            <a:r>
+              <a:rPr sz="1400" b="0" i="0">
                 <a:solidFill>
                   <a:srgbClr val="5D5A54"/>
                 </a:solidFill>
                 <a:latin typeface="Inter Tight"/>
               </a:rPr>
-              <a:t>THE RESEARCH</a:t>
-            </a:r>
-          </a:p>
-        </p:txBody>
-      </p:sp>
-      <p:sp>
-        <p:nvSpPr>
-          <p:cNvPr id="4" name="TextBox 3"/>
+              <a:t>Upper School  ·  20 minutes (fits a 30-minute advisory, with time for your opening check-in; 10-minute version below)  ·  Any grade</a:t>
+            </a:r>
+          </a:p>
+        </p:txBody>
+      </p:sp>
+      <p:sp>
+        <p:nvSpPr>
+          <p:cNvPr id="6" name="TextBox 5"/>
           <p:cNvSpPr txBox="1"/>
           <p:nvPr/>
         </p:nvSpPr>
         <p:spPr>
           <a:xfrm>
-            <a:off x="8229600" y="6400800"/>
-            <a:ext cx="3410712" cy="274320"/>
+            <a:off x="548640" y="1828800"/>
+            <a:ext cx="5120640" cy="4389120"/>
           </a:xfrm>
           <a:prstGeom prst="rect">
             <a:avLst/>
@@ -8952,33 +9269,129 @@
           </a:bodyPr>
           <a:lstStyle/>
           <a:p>
-            <a:pPr algn="r">
-              <a:spcAft>
-                <a:spcPts val="450"/>
-              </a:spcAft>
-            </a:pPr>
-            <a:r>
-              <a:rPr sz="1000" b="0" i="0">
-                <a:solidFill>
-                  <a:srgbClr val="5D5A54"/>
+            <a:pPr algn="l">
+              <a:spcAft>
+                <a:spcPts val="675"/>
+              </a:spcAft>
+            </a:pPr>
+            <a:r>
+              <a:rPr sz="1100" b="1" i="0">
+                <a:solidFill>
+                  <a:srgbClr val="0B2D5B"/>
                 </a:solidFill>
                 <a:latin typeface="Inter Tight"/>
               </a:rPr>
-              <a:t>Beaver Counseling</a:t>
-            </a:r>
-          </a:p>
-        </p:txBody>
-      </p:sp>
-      <p:sp>
-        <p:nvSpPr>
-          <p:cNvPr id="5" name="TextBox 4"/>
+              <a:t>GOAL</a:t>
+            </a:r>
+          </a:p>
+          <a:p>
+            <a:pPr algn="l">
+              <a:spcAft>
+                <a:spcPts val="675"/>
+              </a:spcAft>
+            </a:pPr>
+            <a:r>
+              <a:rPr sz="1500" b="0" i="0">
+                <a:solidFill>
+                  <a:srgbClr val="1C1B19"/>
+                </a:solidFill>
+                <a:latin typeface="Source Serif 4"/>
+              </a:rPr>
+              <a:t>Students can explain what the stress response does for them, use one way to read a racing heart as fuel, and tell the difference between a stress signal that settles and stress that stays stuck on. Nobody is asked to share what's stressing them or how much.</a:t>
+            </a:r>
+          </a:p>
+          <a:p>
+            <a:pPr algn="l">
+              <a:spcAft>
+                <a:spcPts val="675"/>
+              </a:spcAft>
+            </a:pPr>
+            <a:r>
+              <a:rPr sz="1500" b="0" i="0">
+                <a:solidFill>
+                  <a:srgbClr val="1C1B19"/>
+                </a:solidFill>
+                <a:latin typeface="Source Serif 4"/>
+              </a:rPr>
+              <a:t/>
+            </a:r>
+          </a:p>
+          <a:p>
+            <a:pPr algn="l">
+              <a:spcAft>
+                <a:spcPts val="675"/>
+              </a:spcAft>
+            </a:pPr>
+            <a:r>
+              <a:rPr sz="1100" b="1" i="0">
+                <a:solidFill>
+                  <a:srgbClr val="0B2D5B"/>
+                </a:solidFill>
+                <a:latin typeface="Inter Tight"/>
+              </a:rPr>
+              <a:t>MATERIALS</a:t>
+            </a:r>
+          </a:p>
+          <a:p>
+            <a:pPr algn="l">
+              <a:spcAft>
+                <a:spcPts val="675"/>
+              </a:spcAft>
+            </a:pPr>
+            <a:r>
+              <a:rPr sz="1500" b="0" i="0">
+                <a:solidFill>
+                  <a:srgbClr val="1C1B19"/>
+                </a:solidFill>
+                <a:latin typeface="Source Serif 4"/>
+              </a:rPr>
+              <a:t>A board or chart paper with two columns: Signal and Stuck on</a:t>
+            </a:r>
+          </a:p>
+          <a:p>
+            <a:pPr algn="l">
+              <a:spcAft>
+                <a:spcPts val="675"/>
+              </a:spcAft>
+            </a:pPr>
+            <a:r>
+              <a:rPr sz="1500" b="0" i="0">
+                <a:solidFill>
+                  <a:srgbClr val="1C1B19"/>
+                </a:solidFill>
+                <a:latin typeface="Source Serif 4"/>
+              </a:rPr>
+              <a:t>Index cards, one per student</a:t>
+            </a:r>
+          </a:p>
+          <a:p>
+            <a:pPr algn="l">
+              <a:spcAft>
+                <a:spcPts val="675"/>
+              </a:spcAft>
+            </a:pPr>
+            <a:r>
+              <a:rPr sz="1500" b="0" i="0">
+                <a:solidFill>
+                  <a:srgbClr val="1C1B19"/>
+                </a:solidFill>
+                <a:latin typeface="Source Serif 4"/>
+              </a:rPr>
+              <a:t>The student page link (last slide) to share after advisory</a:t>
+            </a:r>
+          </a:p>
+        </p:txBody>
+      </p:sp>
+      <p:sp>
+        <p:nvSpPr>
+          <p:cNvPr id="7" name="TextBox 6"/>
           <p:cNvSpPr txBox="1"/>
           <p:nvPr/>
         </p:nvSpPr>
         <p:spPr>
           <a:xfrm>
-            <a:off x="822960" y="914400"/>
-            <a:ext cx="10515600" cy="365760"/>
+            <a:off x="6126480" y="1828800"/>
+            <a:ext cx="5486400" cy="4389120"/>
           </a:xfrm>
           <a:prstGeom prst="rect">
             <a:avLst/>
@@ -8997,238 +9410,186 @@
               </a:spcAft>
             </a:pPr>
             <a:r>
-              <a:rPr sz="1400" b="1" i="0">
+              <a:rPr sz="1100" b="1" i="0">
                 <a:solidFill>
                   <a:srgbClr val="0B2D5B"/>
                 </a:solidFill>
                 <a:latin typeface="Inter Tight"/>
               </a:rPr>
-              <a:t>Yeager et al., 2022  ·  Jamieson et al., 2010, 2012  ·  McEwen, 1998</a:t>
-            </a:r>
-          </a:p>
-        </p:txBody>
-      </p:sp>
-      <p:sp>
-        <p:nvSpPr>
-          <p:cNvPr id="6" name="TextBox 5"/>
-          <p:cNvSpPr txBox="1"/>
-          <p:nvPr/>
-        </p:nvSpPr>
-        <p:spPr>
-          <a:xfrm>
-            <a:off x="822960" y="1325880"/>
-            <a:ext cx="10515600" cy="1097280"/>
-          </a:xfrm>
-          <a:prstGeom prst="rect">
-            <a:avLst/>
-          </a:prstGeom>
-          <a:noFill/>
-        </p:spPr>
-        <p:txBody>
-          <a:bodyPr wrap="square" anchor="t" lIns="0" rIns="0" tIns="0" bIns="0">
-            <a:spAutoFit/>
-          </a:bodyPr>
-          <a:lstStyle/>
-          <a:p>
-            <a:pPr algn="l">
-              <a:spcAft>
-                <a:spcPts val="1440"/>
-              </a:spcAft>
-            </a:pPr>
-            <a:r>
-              <a:rPr sz="3200" b="1" i="0">
+              <a:t>FLOW</a:t>
+            </a:r>
+          </a:p>
+          <a:p>
+            <a:pPr algn="l">
+              <a:spcAft>
+                <a:spcPts val="630"/>
+              </a:spcAft>
+            </a:pPr>
+            <a:r>
+              <a:rPr sz="1300" b="1" i="0">
+                <a:solidFill>
+                  <a:srgbClr val="F47B20"/>
+                </a:solidFill>
+                <a:latin typeface="Inter Tight"/>
+              </a:rPr>
+              <a:t>3 min   </a:t>
+            </a:r>
+            <a:r>
+              <a:rPr sz="1400" b="0" i="0">
                 <a:solidFill>
                   <a:srgbClr val="1C1B19"/>
                 </a:solidFill>
                 <a:latin typeface="Source Serif 4"/>
               </a:rPr>
-              <a:t>How you read the signal matters, a little.</a:t>
-            </a:r>
-          </a:p>
-        </p:txBody>
-      </p:sp>
-      <p:sp>
-        <p:nvSpPr>
-          <p:cNvPr id="7" name="TextBox 6"/>
-          <p:cNvSpPr txBox="1"/>
-          <p:nvPr/>
-        </p:nvSpPr>
-        <p:spPr>
-          <a:xfrm>
-            <a:off x="822960" y="2514600"/>
-            <a:ext cx="10515600" cy="2194560"/>
-          </a:xfrm>
-          <a:prstGeom prst="rect">
-            <a:avLst/>
-          </a:prstGeom>
-          <a:noFill/>
-        </p:spPr>
-        <p:txBody>
-          <a:bodyPr wrap="square" anchor="t" lIns="0" rIns="0" tIns="0" bIns="0">
-            <a:spAutoFit/>
-          </a:bodyPr>
-          <a:lstStyle/>
-          <a:p>
-            <a:pPr algn="l">
-              <a:spcAft>
-                <a:spcPts val="855"/>
-              </a:spcAft>
-            </a:pPr>
-            <a:r>
-              <a:rPr sz="1900" b="0" i="0">
+              <a:t>Feel it: thirty seconds of movement, then notice</a:t>
+            </a:r>
+          </a:p>
+          <a:p>
+            <a:pPr algn="l">
+              <a:spcAft>
+                <a:spcPts val="630"/>
+              </a:spcAft>
+            </a:pPr>
+            <a:r>
+              <a:rPr sz="1300" b="1" i="0">
+                <a:solidFill>
+                  <a:srgbClr val="F47B20"/>
+                </a:solidFill>
+                <a:latin typeface="Inter Tight"/>
+              </a:rPr>
+              <a:t>4 min   </a:t>
+            </a:r>
+            <a:r>
+              <a:rPr sz="1400" b="0" i="0">
                 <a:solidFill>
                   <a:srgbClr val="1C1B19"/>
                 </a:solidFill>
                 <a:latin typeface="Source Serif 4"/>
               </a:rPr>
-              <a:t>•  Teens who learned a racing heart can fuel them had steadier bodies under pressure.</a:t>
-            </a:r>
-          </a:p>
-          <a:p>
-            <a:pPr algn="l">
-              <a:spcAft>
-                <a:spcPts val="855"/>
-              </a:spcAft>
-            </a:pPr>
-            <a:r>
-              <a:rPr sz="1900" b="0" i="0">
+              <a:t>Read the signal: what each body change is for</a:t>
+            </a:r>
+          </a:p>
+          <a:p>
+            <a:pPr algn="l">
+              <a:spcAft>
+                <a:spcPts val="630"/>
+              </a:spcAft>
+            </a:pPr>
+            <a:r>
+              <a:rPr sz="1300" b="1" i="0">
+                <a:solidFill>
+                  <a:srgbClr val="F47B20"/>
+                </a:solidFill>
+                <a:latin typeface="Inter Tight"/>
+              </a:rPr>
+              <a:t>4 min   </a:t>
+            </a:r>
+            <a:r>
+              <a:rPr sz="1400" b="0" i="0">
                 <a:solidFill>
                   <a:srgbClr val="1C1B19"/>
                 </a:solidFill>
                 <a:latin typeface="Source Serif 4"/>
               </a:rPr>
-              <a:t>•  Less anxiety and better grades, in several studies.</a:t>
-            </a:r>
-          </a:p>
-          <a:p>
-            <a:pPr algn="l">
-              <a:spcAft>
-                <a:spcPts val="855"/>
-              </a:spcAft>
-            </a:pPr>
-            <a:r>
-              <a:rPr sz="1900" b="0" i="0">
+              <a:t>Signal, effort, recovery, and the research</a:t>
+            </a:r>
+          </a:p>
+          <a:p>
+            <a:pPr algn="l">
+              <a:spcAft>
+                <a:spcPts val="630"/>
+              </a:spcAft>
+            </a:pPr>
+            <a:r>
+              <a:rPr sz="1300" b="1" i="0">
+                <a:solidFill>
+                  <a:srgbClr val="F47B20"/>
+                </a:solidFill>
+                <a:latin typeface="Inter Tight"/>
+              </a:rPr>
+              <a:t>5 min   </a:t>
+            </a:r>
+            <a:r>
+              <a:rPr sz="1400" b="0" i="0">
                 <a:solidFill>
                   <a:srgbClr val="1C1B19"/>
                 </a:solidFill>
                 <a:latin typeface="Source Serif 4"/>
               </a:rPr>
-              <a:t>•  The pounding didn't stop. They read it differently.</a:t>
-            </a:r>
-          </a:p>
-          <a:p>
-            <a:pPr algn="l">
-              <a:spcAft>
-                <a:spcPts val="855"/>
-              </a:spcAft>
-            </a:pPr>
-            <a:r>
-              <a:rPr sz="1900" b="0" i="0">
+              <a:t>Signal or stuck on? (four cards)</a:t>
+            </a:r>
+          </a:p>
+          <a:p>
+            <a:pPr algn="l">
+              <a:spcAft>
+                <a:spcPts val="630"/>
+              </a:spcAft>
+            </a:pPr>
+            <a:r>
+              <a:rPr sz="1300" b="1" i="0">
+                <a:solidFill>
+                  <a:srgbClr val="F47B20"/>
+                </a:solidFill>
+                <a:latin typeface="Inter Tight"/>
+              </a:rPr>
+              <a:t>4 min   </a:t>
+            </a:r>
+            <a:r>
+              <a:rPr sz="1400" b="0" i="0">
                 <a:solidFill>
                   <a:srgbClr val="1C1B19"/>
                 </a:solidFill>
                 <a:latin typeface="Source Serif 4"/>
               </a:rPr>
-              <a:t>•  Stress that never shuts off is what wears the body down.</a:t>
-            </a:r>
-          </a:p>
-        </p:txBody>
-      </p:sp>
-      <p:sp>
-        <p:nvSpPr>
-          <p:cNvPr id="8" name="Rectangle 7"/>
-          <p:cNvSpPr/>
-          <p:nvPr/>
-        </p:nvSpPr>
-        <p:spPr>
-          <a:xfrm>
-            <a:off x="822960" y="4892040"/>
-            <a:ext cx="73152" cy="1097280"/>
-          </a:xfrm>
-          <a:prstGeom prst="rect">
-            <a:avLst/>
-          </a:prstGeom>
-          <a:solidFill>
-            <a:srgbClr val="F47B20"/>
-          </a:solidFill>
-          <a:ln>
-            <a:noFill/>
-          </a:ln>
-          <a:effectLst/>
-        </p:spPr>
-        <p:style>
-          <a:lnRef idx="1">
-            <a:schemeClr val="accent1"/>
-          </a:lnRef>
-          <a:fillRef idx="3">
-            <a:schemeClr val="accent1"/>
-          </a:fillRef>
-          <a:effectRef idx="2">
-            <a:schemeClr val="accent1"/>
-          </a:effectRef>
-          <a:fontRef idx="minor">
-            <a:schemeClr val="lt1"/>
-          </a:fontRef>
-        </p:style>
-        <p:txBody>
-          <a:bodyPr rtlCol="0" anchor="ctr"/>
-          <a:lstStyle/>
-          <a:p>
-            <a:pPr algn="ctr"/>
-          </a:p>
-        </p:txBody>
-      </p:sp>
-      <p:sp>
-        <p:nvSpPr>
-          <p:cNvPr id="9" name="TextBox 8"/>
-          <p:cNvSpPr txBox="1"/>
-          <p:nvPr/>
-        </p:nvSpPr>
-        <p:spPr>
-          <a:xfrm>
-            <a:off x="1097280" y="4892040"/>
-            <a:ext cx="10241280" cy="1188720"/>
-          </a:xfrm>
-          <a:prstGeom prst="rect">
-            <a:avLst/>
-          </a:prstGeom>
-          <a:noFill/>
-        </p:spPr>
-        <p:txBody>
-          <a:bodyPr wrap="square" anchor="t" lIns="0" rIns="0" tIns="0" bIns="0">
-            <a:spAutoFit/>
-          </a:bodyPr>
-          <a:lstStyle/>
-          <a:p>
-            <a:pPr algn="l">
-              <a:spcAft>
-                <a:spcPts val="855"/>
-              </a:spcAft>
-            </a:pPr>
-            <a:r>
-              <a:rPr sz="1200" b="1" i="0">
-                <a:solidFill>
-                  <a:srgbClr val="F47B20"/>
+              <a:t>Pick one, privately, and the student page link</a:t>
+            </a:r>
+          </a:p>
+          <a:p>
+            <a:pPr algn="l">
+              <a:spcAft>
+                <a:spcPts val="630"/>
+              </a:spcAft>
+            </a:pPr>
+            <a:r>
+              <a:rPr sz="1400" b="0" i="0">
+                <a:solidFill>
+                  <a:srgbClr val="1C1B19"/>
+                </a:solidFill>
+                <a:latin typeface="Source Serif 4"/>
+              </a:rPr>
+              <a:t/>
+            </a:r>
+          </a:p>
+          <a:p>
+            <a:pPr algn="l">
+              <a:spcAft>
+                <a:spcPts val="630"/>
+              </a:spcAft>
+            </a:pPr>
+            <a:r>
+              <a:rPr sz="1100" b="1" i="0">
+                <a:solidFill>
+                  <a:srgbClr val="0B2D5B"/>
                 </a:solidFill>
                 <a:latin typeface="Inter Tight"/>
               </a:rPr>
-              <a:t>IN CLASS</a:t>
-            </a:r>
-          </a:p>
-          <a:p>
-            <a:pPr algn="l">
-              <a:spcAft>
-                <a:spcPts val="855"/>
-              </a:spcAft>
-            </a:pPr>
-            <a:r>
-              <a:rPr sz="1900" b="0" i="0">
+              <a:t>SHORT ON TIME (10-MINUTE CHECK-IN)</a:t>
+            </a:r>
+          </a:p>
+          <a:p>
+            <a:pPr algn="l">
+              <a:spcAft>
+                <a:spcPts val="630"/>
+              </a:spcAft>
+            </a:pPr>
+            <a:r>
+              <a:rPr sz="1400" b="0" i="0">
                 <a:solidFill>
                   <a:srgbClr val="1C1B19"/>
                 </a:solidFill>
                 <a:latin typeface="Source Serif 4"/>
               </a:rPr>
-              <a:t>Say it straight: this is a real boost, not a magic switch.</a:t>
+              <a:t>Feel it (2), the Read the signal slide (3), Signal or stuck on with two of the cards (3), pick one and share the link (2).</a:t>
             </a:r>
           </a:p>
         </p:txBody>

--- a/decks/stress-is-a-signal-lesson-v2.pptx
+++ b/decks/stress-is-a-signal-lesson-v2.pptx
@@ -6065,6 +6065,45 @@
                 <a:latin typeface="Inter Tight"/>
               </a:rPr>
               <a:t>Beaver Upper School · Counseling</a:t>
+            </a:r>
+          </a:p>
+        </p:txBody>
+      </p:sp>
+      <p:sp>
+        <p:nvSpPr>
+          <p:cNvPr id="8" name="TextBox 7"/>
+          <p:cNvSpPr txBox="1"/>
+          <p:nvPr/>
+        </p:nvSpPr>
+        <p:spPr>
+          <a:xfrm>
+            <a:off x="6766560" y="5897880"/>
+            <a:ext cx="4846320" cy="640080"/>
+          </a:xfrm>
+          <a:prstGeom prst="rect">
+            <a:avLst/>
+          </a:prstGeom>
+          <a:noFill/>
+        </p:spPr>
+        <p:txBody>
+          <a:bodyPr wrap="square" anchor="t" lIns="0" rIns="0" tIns="0" bIns="0">
+            <a:spAutoFit/>
+          </a:bodyPr>
+          <a:lstStyle/>
+          <a:p>
+            <a:pPr algn="r">
+              <a:spcAft>
+                <a:spcPts val="495"/>
+              </a:spcAft>
+            </a:pPr>
+            <a:r>
+              <a:rPr sz="1100" b="0" i="0">
+                <a:solidFill>
+                  <a:srgbClr val="E8E4DA"/>
+                </a:solidFill>
+                <a:latin typeface="Inter Tight"/>
+              </a:rPr>
+              <a:t>Written by Dr. Rick Wilson, with AI-assisted drafting. Every lesson is reviewed and edited by Dr. Wilson.</a:t>
             </a:r>
           </a:p>
         </p:txBody>
